--- a/slides/4-12_antithrombotic_drugs/4-12_antithrombotic_drugs.pptx
+++ b/slides/4-12_antithrombotic_drugs/4-12_antithrombotic_drugs.pptx
@@ -2309,7 +2309,7 @@
                 <a:ea typeface="メイリオ" pitchFamily="34" charset="-122"/>
                 <a:cs typeface="メイリオ" pitchFamily="34" charset="-120"/>
               </a:rPr>
-              <a:t>抗血小</a:t>
+              <a:t>抗血小板</a:t>
             </a:r>
             <a:endParaRPr lang="ja-JP" sz="1050" dirty="0"/>
           </a:p>
@@ -2326,7 +2326,7 @@
                 <a:ea typeface="メイリオ" pitchFamily="34" charset="-122"/>
                 <a:cs typeface="メイリオ" pitchFamily="34" charset="-120"/>
               </a:rPr>
-              <a:t>板薬</a:t>
+              <a:t>薬</a:t>
             </a:r>
             <a:endParaRPr lang="ja-JP" sz="1050" dirty="0"/>
           </a:p>
@@ -2716,7 +2716,7 @@
         </p:nvSpPr>
         <p:spPr>
           <a:xfrm>
-            <a:off x="7526426" y="2902306"/>
+            <a:off x="7526426" y="2883103"/>
             <a:ext cx="320040" cy="374904"/>
           </a:xfrm>
           <a:prstGeom prst="rect">
@@ -2755,7 +2755,7 @@
         </p:nvSpPr>
         <p:spPr>
           <a:xfrm>
-            <a:off x="7782458" y="2902306"/>
+            <a:off x="7782458" y="2883103"/>
             <a:ext cx="3812134" cy="374904"/>
           </a:xfrm>
           <a:prstGeom prst="rect">
@@ -2794,7 +2794,7 @@
         </p:nvSpPr>
         <p:spPr>
           <a:xfrm>
-            <a:off x="7782458" y="3237890"/>
+            <a:off x="7782458" y="3218688"/>
             <a:ext cx="3812134" cy="374904"/>
           </a:xfrm>
           <a:prstGeom prst="rect">
@@ -2833,7 +2833,7 @@
         </p:nvSpPr>
         <p:spPr>
           <a:xfrm>
-            <a:off x="7526426" y="3649370"/>
+            <a:off x="7526426" y="3610966"/>
             <a:ext cx="320040" cy="374904"/>
           </a:xfrm>
           <a:prstGeom prst="rect">
@@ -2872,7 +2872,7 @@
         </p:nvSpPr>
         <p:spPr>
           <a:xfrm>
-            <a:off x="7782458" y="3649370"/>
+            <a:off x="7782458" y="3610966"/>
             <a:ext cx="3812134" cy="374904"/>
           </a:xfrm>
           <a:prstGeom prst="rect">
@@ -2911,7 +2911,7 @@
         </p:nvSpPr>
         <p:spPr>
           <a:xfrm>
-            <a:off x="7782458" y="3984955"/>
+            <a:off x="7782458" y="3946550"/>
             <a:ext cx="3812134" cy="374904"/>
           </a:xfrm>
           <a:prstGeom prst="rect">
@@ -2950,7 +2950,7 @@
         </p:nvSpPr>
         <p:spPr>
           <a:xfrm>
-            <a:off x="7526426" y="4397350"/>
+            <a:off x="7526426" y="4339742"/>
             <a:ext cx="320040" cy="374904"/>
           </a:xfrm>
           <a:prstGeom prst="rect">
@@ -2989,7 +2989,7 @@
         </p:nvSpPr>
         <p:spPr>
           <a:xfrm>
-            <a:off x="7782458" y="4397350"/>
+            <a:off x="7782458" y="4339742"/>
             <a:ext cx="3812134" cy="374904"/>
           </a:xfrm>
           <a:prstGeom prst="rect">
@@ -3028,7 +3028,7 @@
         </p:nvSpPr>
         <p:spPr>
           <a:xfrm>
-            <a:off x="7782458" y="4732020"/>
+            <a:off x="7782458" y="4674413"/>
             <a:ext cx="3812134" cy="374904"/>
           </a:xfrm>
           <a:prstGeom prst="rect">
@@ -3067,7 +3067,7 @@
         </p:nvSpPr>
         <p:spPr>
           <a:xfrm>
-            <a:off x="7526426" y="5144414"/>
+            <a:off x="7526426" y="5067605"/>
             <a:ext cx="320040" cy="374904"/>
           </a:xfrm>
           <a:prstGeom prst="rect">
@@ -3106,7 +3106,7 @@
         </p:nvSpPr>
         <p:spPr>
           <a:xfrm>
-            <a:off x="7782458" y="5144414"/>
+            <a:off x="7782458" y="5067605"/>
             <a:ext cx="3812134" cy="374904"/>
           </a:xfrm>
           <a:prstGeom prst="rect">
@@ -3145,7 +3145,7 @@
         </p:nvSpPr>
         <p:spPr>
           <a:xfrm>
-            <a:off x="7782458" y="5479999"/>
+            <a:off x="7782458" y="5403190"/>
             <a:ext cx="3812134" cy="374904"/>
           </a:xfrm>
           <a:prstGeom prst="rect">
@@ -3511,7 +3511,7 @@
         </p:nvSpPr>
         <p:spPr>
           <a:xfrm>
-            <a:off x="594360" y="2980030"/>
+            <a:off x="594360" y="2942539"/>
             <a:ext cx="320040" cy="374904"/>
           </a:xfrm>
           <a:prstGeom prst="rect">
@@ -3550,7 +3550,7 @@
         </p:nvSpPr>
         <p:spPr>
           <a:xfrm>
-            <a:off x="850392" y="2980030"/>
+            <a:off x="850392" y="2942539"/>
             <a:ext cx="6273698" cy="374904"/>
           </a:xfrm>
           <a:prstGeom prst="rect">
@@ -3600,7 +3600,7 @@
         </p:nvSpPr>
         <p:spPr>
           <a:xfrm>
-            <a:off x="850392" y="3315614"/>
+            <a:off x="850392" y="3278124"/>
             <a:ext cx="6273698" cy="374904"/>
           </a:xfrm>
           <a:prstGeom prst="rect">
@@ -3650,7 +3650,7 @@
         </p:nvSpPr>
         <p:spPr>
           <a:xfrm>
-            <a:off x="594360" y="3804818"/>
+            <a:off x="594360" y="3729838"/>
             <a:ext cx="320040" cy="374904"/>
           </a:xfrm>
           <a:prstGeom prst="rect">
@@ -3689,7 +3689,7 @@
         </p:nvSpPr>
         <p:spPr>
           <a:xfrm>
-            <a:off x="850392" y="3804818"/>
+            <a:off x="850392" y="3729838"/>
             <a:ext cx="6273698" cy="374904"/>
           </a:xfrm>
           <a:prstGeom prst="rect">
@@ -3739,7 +3739,7 @@
         </p:nvSpPr>
         <p:spPr>
           <a:xfrm>
-            <a:off x="850392" y="4140403"/>
+            <a:off x="850392" y="4065422"/>
             <a:ext cx="6273698" cy="374904"/>
           </a:xfrm>
           <a:prstGeom prst="rect">
@@ -3778,7 +3778,7 @@
         </p:nvSpPr>
         <p:spPr>
           <a:xfrm>
-            <a:off x="850392" y="4475988"/>
+            <a:off x="850392" y="4401007"/>
             <a:ext cx="6273698" cy="374904"/>
           </a:xfrm>
           <a:prstGeom prst="rect">
@@ -4039,7 +4039,7 @@
                 <a:ea typeface="メイリオ" pitchFamily="34" charset="-122"/>
                 <a:cs typeface="メイリオ" pitchFamily="34" charset="-120"/>
               </a:rPr>
-              <a:t>抗血小</a:t>
+              <a:t>抗血小板</a:t>
             </a:r>
             <a:endParaRPr lang="ja-JP" sz="1050" dirty="0"/>
           </a:p>
@@ -4056,7 +4056,7 @@
                 <a:ea typeface="メイリオ" pitchFamily="34" charset="-122"/>
                 <a:cs typeface="メイリオ" pitchFamily="34" charset="-120"/>
               </a:rPr>
-              <a:t>板薬</a:t>
+              <a:t>薬</a:t>
             </a:r>
             <a:endParaRPr lang="ja-JP" sz="1050" dirty="0"/>
           </a:p>
@@ -4537,7 +4537,7 @@
             <a:r>
               <a:rPr lang="ja-JP" altLang="en-US" sz="2400" b="1" dirty="0">
                 <a:solidFill>
-                  <a:srgbClr val="C00000"/>
+                  <a:srgbClr val="262626"/>
                 </a:solidFill>
                 <a:latin typeface="メイリオ" pitchFamily="34" charset="0"/>
                 <a:ea typeface="メイリオ" pitchFamily="34" charset="-122"/>
@@ -5004,7 +5004,7 @@
                 <a:ea typeface="メイリオ" pitchFamily="34" charset="-122"/>
                 <a:cs typeface="メイリオ" pitchFamily="34" charset="-120"/>
               </a:rPr>
-              <a:t>抗血小</a:t>
+              <a:t>抗血小板</a:t>
             </a:r>
             <a:endParaRPr lang="ja-JP" sz="1050" dirty="0"/>
           </a:p>
@@ -5021,7 +5021,7 @@
                 <a:ea typeface="メイリオ" pitchFamily="34" charset="-122"/>
                 <a:cs typeface="メイリオ" pitchFamily="34" charset="-120"/>
               </a:rPr>
-              <a:t>板薬</a:t>
+              <a:t>薬</a:t>
             </a:r>
             <a:endParaRPr lang="ja-JP" sz="1050" dirty="0"/>
           </a:p>
@@ -5382,7 +5382,7 @@
         </p:nvSpPr>
         <p:spPr>
           <a:xfrm>
-            <a:off x="576072" y="1719072"/>
+            <a:off x="576072" y="1709928"/>
             <a:ext cx="6249010" cy="374904"/>
           </a:xfrm>
           <a:prstGeom prst="rect">
@@ -5421,7 +5421,7 @@
         </p:nvSpPr>
         <p:spPr>
           <a:xfrm>
-            <a:off x="576072" y="2082089"/>
+            <a:off x="576072" y="2063801"/>
             <a:ext cx="6249010" cy="374904"/>
           </a:xfrm>
           <a:prstGeom prst="rect">
@@ -5471,7 +5471,7 @@
         </p:nvSpPr>
         <p:spPr>
           <a:xfrm>
-            <a:off x="576072" y="2438705"/>
+            <a:off x="576072" y="2398471"/>
             <a:ext cx="6249010" cy="374904"/>
           </a:xfrm>
           <a:prstGeom prst="rect">
@@ -5521,7 +5521,7 @@
         </p:nvSpPr>
         <p:spPr>
           <a:xfrm>
-            <a:off x="576072" y="2774290"/>
+            <a:off x="576072" y="2734056"/>
             <a:ext cx="6249010" cy="374904"/>
           </a:xfrm>
           <a:prstGeom prst="rect">
@@ -5560,7 +5560,7 @@
         </p:nvSpPr>
         <p:spPr>
           <a:xfrm>
-            <a:off x="576072" y="3109874"/>
+            <a:off x="576072" y="3069641"/>
             <a:ext cx="6249010" cy="374904"/>
           </a:xfrm>
           <a:prstGeom prst="rect">
@@ -5599,7 +5599,7 @@
         </p:nvSpPr>
         <p:spPr>
           <a:xfrm>
-            <a:off x="576072" y="3466490"/>
+            <a:off x="576072" y="3404311"/>
             <a:ext cx="6249010" cy="374904"/>
           </a:xfrm>
           <a:prstGeom prst="rect">
@@ -5638,7 +5638,7 @@
         </p:nvSpPr>
         <p:spPr>
           <a:xfrm>
-            <a:off x="576072" y="3802075"/>
+            <a:off x="576072" y="3739896"/>
             <a:ext cx="6249010" cy="374904"/>
           </a:xfrm>
           <a:prstGeom prst="rect">
@@ -5677,7 +5677,7 @@
         </p:nvSpPr>
         <p:spPr>
           <a:xfrm>
-            <a:off x="576072" y="4137660"/>
+            <a:off x="576072" y="4075481"/>
             <a:ext cx="6249010" cy="374904"/>
           </a:xfrm>
           <a:prstGeom prst="rect">
@@ -5716,7 +5716,7 @@
         </p:nvSpPr>
         <p:spPr>
           <a:xfrm>
-            <a:off x="576072" y="4494276"/>
+            <a:off x="576072" y="4410151"/>
             <a:ext cx="6249010" cy="374904"/>
           </a:xfrm>
           <a:prstGeom prst="rect">
@@ -5777,7 +5777,7 @@
         </p:nvSpPr>
         <p:spPr>
           <a:xfrm>
-            <a:off x="7190842" y="1719072"/>
+            <a:off x="7190842" y="1709928"/>
             <a:ext cx="4421124" cy="374904"/>
           </a:xfrm>
           <a:prstGeom prst="rect">
@@ -5816,7 +5816,7 @@
         </p:nvSpPr>
         <p:spPr>
           <a:xfrm>
-            <a:off x="7190842" y="2082089"/>
+            <a:off x="7190842" y="2063801"/>
             <a:ext cx="4421124" cy="374904"/>
           </a:xfrm>
           <a:prstGeom prst="rect">
@@ -5855,7 +5855,7 @@
         </p:nvSpPr>
         <p:spPr>
           <a:xfrm>
-            <a:off x="7190842" y="2416759"/>
+            <a:off x="7190842" y="2398471"/>
             <a:ext cx="4421124" cy="374904"/>
           </a:xfrm>
           <a:prstGeom prst="rect">
@@ -5872,6 +5872,17 @@
               <a:buNone/>
             </a:pPr>
             <a:r>
+              <a:rPr lang="ja-JP" altLang="en-US" sz="2200" b="1" dirty="0">
+                <a:solidFill>
+                  <a:srgbClr val="262626"/>
+                </a:solidFill>
+                <a:latin typeface="メイリオ" pitchFamily="34" charset="0"/>
+                <a:ea typeface="メイリオ" pitchFamily="34" charset="-122"/>
+                <a:cs typeface="メイリオ" pitchFamily="34" charset="-120"/>
+              </a:rPr>
+              <a:t>違う。</a:t>
+            </a:r>
+            <a:r>
               <a:rPr lang="ja-JP" altLang="en-US" sz="2200" dirty="0">
                 <a:solidFill>
                   <a:srgbClr val="262626"/>
@@ -5880,7 +5891,7 @@
                 <a:ea typeface="メイリオ" pitchFamily="34" charset="-122"/>
                 <a:cs typeface="メイリオ" pitchFamily="34" charset="-120"/>
               </a:rPr>
-              <a:t>違う。最終内服の日時で数える</a:t>
+              <a:t>最終内服の日時で数える</a:t>
             </a:r>
             <a:endParaRPr lang="ja-JP" sz="2200" dirty="0"/>
           </a:p>
@@ -5894,7 +5905,7 @@
         </p:nvSpPr>
         <p:spPr>
           <a:xfrm>
-            <a:off x="7190842" y="2774290"/>
+            <a:off x="7190842" y="2734056"/>
             <a:ext cx="4421124" cy="374904"/>
           </a:xfrm>
           <a:prstGeom prst="rect">
@@ -5919,18 +5930,7 @@
                 <a:ea typeface="メイリオ" pitchFamily="34" charset="-122"/>
                 <a:cs typeface="メイリオ" pitchFamily="34" charset="-120"/>
               </a:rPr>
-              <a:t>腎機能は</a:t>
-            </a:r>
-            <a:r>
-              <a:rPr lang="ja-JP" altLang="en-US" sz="2200" dirty="0">
-                <a:solidFill>
-                  <a:srgbClr val="262626"/>
-                </a:solidFill>
-                <a:latin typeface="メイリオ" pitchFamily="34" charset="0"/>
-                <a:ea typeface="メイリオ" pitchFamily="34" charset="-122"/>
-                <a:cs typeface="メイリオ" pitchFamily="34" charset="-120"/>
-              </a:rPr>
-              <a:t> eGFR ではなく CrCl</a:t>
+              <a:t>腎機能は eGFR ではなく CrCl</a:t>
             </a:r>
             <a:endParaRPr lang="ja-JP" sz="2200" dirty="0"/>
           </a:p>
@@ -5944,7 +5944,7 @@
         </p:nvSpPr>
         <p:spPr>
           <a:xfrm>
-            <a:off x="7190842" y="3109874"/>
+            <a:off x="7190842" y="3069641"/>
             <a:ext cx="4421124" cy="374904"/>
           </a:xfrm>
           <a:prstGeom prst="rect">
@@ -5983,7 +5983,7 @@
         </p:nvSpPr>
         <p:spPr>
           <a:xfrm>
-            <a:off x="7190842" y="3466490"/>
+            <a:off x="7190842" y="3404311"/>
             <a:ext cx="4421124" cy="374904"/>
           </a:xfrm>
           <a:prstGeom prst="rect">
@@ -6022,7 +6022,7 @@
         </p:nvSpPr>
         <p:spPr>
           <a:xfrm>
-            <a:off x="7190842" y="3802075"/>
+            <a:off x="7190842" y="3739896"/>
             <a:ext cx="4421124" cy="374904"/>
           </a:xfrm>
           <a:prstGeom prst="rect">
@@ -6061,7 +6061,7 @@
         </p:nvSpPr>
         <p:spPr>
           <a:xfrm>
-            <a:off x="7190842" y="4159606"/>
+            <a:off x="7190842" y="4075481"/>
             <a:ext cx="4421124" cy="374904"/>
           </a:xfrm>
           <a:prstGeom prst="rect">
@@ -6100,7 +6100,7 @@
         </p:nvSpPr>
         <p:spPr>
           <a:xfrm>
-            <a:off x="7190842" y="4494276"/>
+            <a:off x="7190842" y="4410151"/>
             <a:ext cx="4421124" cy="374904"/>
           </a:xfrm>
           <a:prstGeom prst="rect">
@@ -6125,7 +6125,18 @@
                 <a:ea typeface="メイリオ" pitchFamily="34" charset="-122"/>
                 <a:cs typeface="メイリオ" pitchFamily="34" charset="-120"/>
               </a:rPr>
-              <a:t>（24/48 時間など）も確かめる</a:t>
+              <a:t>（24/48 時間など）</a:t>
+            </a:r>
+            <a:r>
+              <a:rPr lang="ja-JP" altLang="en-US" sz="2200" b="1" dirty="0">
+                <a:solidFill>
+                  <a:srgbClr val="262626"/>
+                </a:solidFill>
+                <a:latin typeface="メイリオ" pitchFamily="34" charset="0"/>
+                <a:ea typeface="メイリオ" pitchFamily="34" charset="-122"/>
+                <a:cs typeface="メイリオ" pitchFamily="34" charset="-120"/>
+              </a:rPr>
+              <a:t>も確かめる</a:t>
             </a:r>
             <a:endParaRPr lang="ja-JP" sz="2200" dirty="0"/>
           </a:p>
@@ -6350,7 +6361,7 @@
                 <a:ea typeface="メイリオ" pitchFamily="34" charset="-122"/>
                 <a:cs typeface="メイリオ" pitchFamily="34" charset="-120"/>
               </a:rPr>
-              <a:t>抗血小</a:t>
+              <a:t>抗血小板</a:t>
             </a:r>
             <a:endParaRPr lang="ja-JP" sz="1050" dirty="0"/>
           </a:p>
@@ -6367,7 +6378,7 @@
                 <a:ea typeface="メイリオ" pitchFamily="34" charset="-122"/>
                 <a:cs typeface="メイリオ" pitchFamily="34" charset="-120"/>
               </a:rPr>
-              <a:t>板薬</a:t>
+              <a:t>薬</a:t>
             </a:r>
             <a:endParaRPr lang="ja-JP" sz="1050" dirty="0"/>
           </a:p>
@@ -8102,7 +8113,7 @@
                 <a:ea typeface="メイリオ" pitchFamily="34" charset="-122"/>
                 <a:cs typeface="メイリオ" pitchFamily="34" charset="-120"/>
               </a:rPr>
-              <a:t>抗血小</a:t>
+              <a:t>抗血小板</a:t>
             </a:r>
             <a:endParaRPr lang="ja-JP" sz="1050" dirty="0"/>
           </a:p>
@@ -8119,7 +8130,7 @@
                 <a:ea typeface="メイリオ" pitchFamily="34" charset="-122"/>
                 <a:cs typeface="メイリオ" pitchFamily="34" charset="-120"/>
               </a:rPr>
-              <a:t>板薬</a:t>
+              <a:t>薬</a:t>
             </a:r>
             <a:endParaRPr lang="ja-JP" sz="1050" dirty="0"/>
           </a:p>
@@ -8346,9 +8357,9 @@
             <a:tbl>
               <a:tblPr/>
               <a:tblGrid>
-                <a:gridCol w="1965960"/>
-                <a:gridCol w="5879592"/>
-                <a:gridCol w="3337560"/>
+                <a:gridCol w="2139696"/>
+                <a:gridCol w="5710428"/>
+                <a:gridCol w="3332988"/>
               </a:tblGrid>
               <a:tr h="356616">
                 <a:tc>
@@ -10398,7 +10409,7 @@
                 <a:ea typeface="メイリオ" pitchFamily="34" charset="-122"/>
                 <a:cs typeface="メイリオ" pitchFamily="34" charset="-120"/>
               </a:rPr>
-              <a:t>抗血小</a:t>
+              <a:t>抗血小板</a:t>
             </a:r>
             <a:endParaRPr lang="ja-JP" sz="1050" dirty="0"/>
           </a:p>
@@ -10415,7 +10426,7 @@
                 <a:ea typeface="メイリオ" pitchFamily="34" charset="-122"/>
                 <a:cs typeface="メイリオ" pitchFamily="34" charset="-120"/>
               </a:rPr>
-              <a:t>板薬</a:t>
+              <a:t>薬</a:t>
             </a:r>
             <a:endParaRPr lang="ja-JP" sz="1050" dirty="0"/>
           </a:p>
@@ -10596,7 +10607,7 @@
                 <a:ea typeface="メイリオ" pitchFamily="34" charset="-122"/>
                 <a:cs typeface="メイリオ" pitchFamily="34" charset="-120"/>
               </a:rPr>
-              <a:t>日本循環器学会／日本不整脈心電学会 2020 年改訂版 不整脈薬物治療ガイドライン/Douketis JD,</a:t>
+              <a:t>日本循環器学会／日本不整脈心電学会 2020 年改訂版 不整脈薬物治療ガイドライン</a:t>
             </a:r>
             <a:endParaRPr lang="ja-JP" sz="1600" dirty="0"/>
           </a:p>
@@ -10613,7 +10624,7 @@
                 <a:ea typeface="メイリオ" pitchFamily="34" charset="-122"/>
                 <a:cs typeface="メイリオ" pitchFamily="34" charset="-120"/>
               </a:rPr>
-              <a:t>et al. Chest 2022;162:e207-e243（ACCP 2022）/Iwasaki YK, et al. Circ J 2025;89:1012-1073</a:t>
+              <a:t>Douketis JD, et al. Chest 2022;162:e207-e243/Iwasaki YK, et al. Circ J 2025;89:1012-1073</a:t>
             </a:r>
             <a:endParaRPr lang="ja-JP" sz="1600" dirty="0"/>
           </a:p>
@@ -10835,7 +10846,7 @@
         </p:nvSpPr>
         <p:spPr>
           <a:xfrm>
-            <a:off x="594360" y="2612441"/>
+            <a:off x="594360" y="2593238"/>
             <a:ext cx="320040" cy="374904"/>
           </a:xfrm>
           <a:prstGeom prst="rect">
@@ -10874,7 +10885,7 @@
         </p:nvSpPr>
         <p:spPr>
           <a:xfrm>
-            <a:off x="850392" y="2612441"/>
+            <a:off x="850392" y="2593238"/>
             <a:ext cx="5114239" cy="374904"/>
           </a:xfrm>
           <a:prstGeom prst="rect">
@@ -10913,7 +10924,7 @@
         </p:nvSpPr>
         <p:spPr>
           <a:xfrm>
-            <a:off x="850392" y="2948026"/>
+            <a:off x="850392" y="2928823"/>
             <a:ext cx="5114239" cy="374904"/>
           </a:xfrm>
           <a:prstGeom prst="rect">
@@ -10952,7 +10963,7 @@
         </p:nvSpPr>
         <p:spPr>
           <a:xfrm>
-            <a:off x="594360" y="3406140"/>
+            <a:off x="594360" y="3367735"/>
             <a:ext cx="320040" cy="374904"/>
           </a:xfrm>
           <a:prstGeom prst="rect">
@@ -10991,7 +11002,7 @@
         </p:nvSpPr>
         <p:spPr>
           <a:xfrm>
-            <a:off x="850392" y="3406140"/>
+            <a:off x="850392" y="3367735"/>
             <a:ext cx="5114239" cy="374904"/>
           </a:xfrm>
           <a:prstGeom prst="rect">
@@ -11041,7 +11052,7 @@
         </p:nvSpPr>
         <p:spPr>
           <a:xfrm>
-            <a:off x="594360" y="3863340"/>
+            <a:off x="594360" y="3805733"/>
             <a:ext cx="320040" cy="374904"/>
           </a:xfrm>
           <a:prstGeom prst="rect">
@@ -11080,7 +11091,7 @@
         </p:nvSpPr>
         <p:spPr>
           <a:xfrm>
-            <a:off x="850392" y="3863340"/>
+            <a:off x="850392" y="3805733"/>
             <a:ext cx="5114239" cy="374904"/>
           </a:xfrm>
           <a:prstGeom prst="rect">
@@ -11119,7 +11130,7 @@
         </p:nvSpPr>
         <p:spPr>
           <a:xfrm>
-            <a:off x="850392" y="4198925"/>
+            <a:off x="850392" y="4141318"/>
             <a:ext cx="5114239" cy="374904"/>
           </a:xfrm>
           <a:prstGeom prst="rect">
@@ -11158,7 +11169,7 @@
         </p:nvSpPr>
         <p:spPr>
           <a:xfrm>
-            <a:off x="594360" y="4657039"/>
+            <a:off x="594360" y="4580230"/>
             <a:ext cx="320040" cy="374904"/>
           </a:xfrm>
           <a:prstGeom prst="rect">
@@ -11197,7 +11208,7 @@
         </p:nvSpPr>
         <p:spPr>
           <a:xfrm>
-            <a:off x="850392" y="4657039"/>
+            <a:off x="850392" y="4580230"/>
             <a:ext cx="5114239" cy="374904"/>
           </a:xfrm>
           <a:prstGeom prst="rect">
@@ -11425,7 +11436,7 @@
         </p:nvSpPr>
         <p:spPr>
           <a:xfrm>
-            <a:off x="6366967" y="2948026"/>
+            <a:off x="6366967" y="2928823"/>
             <a:ext cx="320040" cy="374904"/>
           </a:xfrm>
           <a:prstGeom prst="rect">
@@ -11464,7 +11475,7 @@
         </p:nvSpPr>
         <p:spPr>
           <a:xfrm>
-            <a:off x="6622999" y="2948026"/>
+            <a:off x="6622999" y="2928823"/>
             <a:ext cx="4970678" cy="374904"/>
           </a:xfrm>
           <a:prstGeom prst="rect">
@@ -11503,7 +11514,7 @@
         </p:nvSpPr>
         <p:spPr>
           <a:xfrm>
-            <a:off x="6622999" y="3283610"/>
+            <a:off x="6622999" y="3264408"/>
             <a:ext cx="4970678" cy="374904"/>
           </a:xfrm>
           <a:prstGeom prst="rect">
@@ -11542,7 +11553,7 @@
         </p:nvSpPr>
         <p:spPr>
           <a:xfrm>
-            <a:off x="6366967" y="3740810"/>
+            <a:off x="6366967" y="3702406"/>
             <a:ext cx="320040" cy="374904"/>
           </a:xfrm>
           <a:prstGeom prst="rect">
@@ -11581,7 +11592,7 @@
         </p:nvSpPr>
         <p:spPr>
           <a:xfrm>
-            <a:off x="6622999" y="3740810"/>
+            <a:off x="6622999" y="3702406"/>
             <a:ext cx="4970678" cy="374904"/>
           </a:xfrm>
           <a:prstGeom prst="rect">
@@ -11620,7 +11631,7 @@
         </p:nvSpPr>
         <p:spPr>
           <a:xfrm>
-            <a:off x="6366967" y="4198925"/>
+            <a:off x="6366967" y="4141318"/>
             <a:ext cx="320040" cy="374904"/>
           </a:xfrm>
           <a:prstGeom prst="rect">
@@ -11659,7 +11670,7 @@
         </p:nvSpPr>
         <p:spPr>
           <a:xfrm>
-            <a:off x="6622999" y="4198925"/>
+            <a:off x="6622999" y="4141318"/>
             <a:ext cx="4970678" cy="374904"/>
           </a:xfrm>
           <a:prstGeom prst="rect">
@@ -11698,7 +11709,7 @@
         </p:nvSpPr>
         <p:spPr>
           <a:xfrm>
-            <a:off x="6366967" y="4657039"/>
+            <a:off x="6366967" y="4580230"/>
             <a:ext cx="320040" cy="374904"/>
           </a:xfrm>
           <a:prstGeom prst="rect">
@@ -11737,7 +11748,7 @@
         </p:nvSpPr>
         <p:spPr>
           <a:xfrm>
-            <a:off x="6622999" y="4657039"/>
+            <a:off x="6622999" y="4580230"/>
             <a:ext cx="4970678" cy="374904"/>
           </a:xfrm>
           <a:prstGeom prst="rect">
@@ -11987,7 +11998,7 @@
                 <a:ea typeface="メイリオ" pitchFamily="34" charset="-122"/>
                 <a:cs typeface="メイリオ" pitchFamily="34" charset="-120"/>
               </a:rPr>
-              <a:t>抗血小</a:t>
+              <a:t>抗血小板</a:t>
             </a:r>
             <a:endParaRPr lang="ja-JP" sz="1050" dirty="0"/>
           </a:p>
@@ -12004,7 +12015,7 @@
                 <a:ea typeface="メイリオ" pitchFamily="34" charset="-122"/>
                 <a:cs typeface="メイリオ" pitchFamily="34" charset="-120"/>
               </a:rPr>
-              <a:t>板薬</a:t>
+              <a:t>薬</a:t>
             </a:r>
             <a:endParaRPr lang="ja-JP" sz="1050" dirty="0"/>
           </a:p>
@@ -12185,7 +12196,7 @@
                 <a:ea typeface="メイリオ" pitchFamily="34" charset="-122"/>
                 <a:cs typeface="メイリオ" pitchFamily="34" charset="-120"/>
               </a:rPr>
-              <a:t>Kopp SL, et al. Reg Anesth Pain Med 2025 / Douketis JD, et al. JAMA Intern Med</a:t>
+              <a:t>Kopp SL, et al. Reg Anesth Pain Med 2025/Douketis JD, et al. JAMA Intern Med</a:t>
             </a:r>
             <a:endParaRPr lang="ja-JP" sz="1600" dirty="0"/>
           </a:p>
@@ -12202,7 +12213,7 @@
                 <a:ea typeface="メイリオ" pitchFamily="34" charset="-122"/>
                 <a:cs typeface="メイリオ" pitchFamily="34" charset="-120"/>
               </a:rPr>
-              <a:t>2019;179:1469-78 / 日本循環器学会／日本不整脈心電学会2020年改訂版不整脈薬物治療ガイドライン</a:t>
+              <a:t>2019;179:1469-78/日本循環器学会／日本不整脈心電学会 2020 年改訂版不整脈薬物治療ガイドライン</a:t>
             </a:r>
             <a:endParaRPr lang="ja-JP" sz="1600" dirty="0"/>
           </a:p>
@@ -12216,12 +12227,12 @@
         </p:nvSpPr>
         <p:spPr>
           <a:xfrm>
-            <a:off x="502920" y="1691640"/>
-            <a:ext cx="11183112" cy="3511296"/>
+            <a:off x="502920" y="1664208"/>
+            <a:ext cx="11183112" cy="3538728"/>
           </a:xfrm>
           <a:prstGeom prst="roundRect">
             <a:avLst>
-              <a:gd name="adj" fmla="val 2083"/>
+              <a:gd name="adj" fmla="val 2067"/>
             </a:avLst>
           </a:prstGeom>
           <a:solidFill>
@@ -12238,7 +12249,7 @@
         </p:nvSpPr>
         <p:spPr>
           <a:xfrm>
-            <a:off x="585216" y="1783080"/>
+            <a:off x="585216" y="1755648"/>
             <a:ext cx="11018520" cy="374904"/>
           </a:xfrm>
           <a:prstGeom prst="rect">
@@ -12299,7 +12310,7 @@
         </p:nvSpPr>
         <p:spPr>
           <a:xfrm>
-            <a:off x="896112" y="2118665"/>
+            <a:off x="896112" y="2127809"/>
             <a:ext cx="10707624" cy="374904"/>
           </a:xfrm>
           <a:prstGeom prst="rect">
@@ -12338,7 +12349,7 @@
         </p:nvSpPr>
         <p:spPr>
           <a:xfrm>
-            <a:off x="896112" y="2453335"/>
+            <a:off x="896112" y="2462479"/>
             <a:ext cx="10707624" cy="374904"/>
           </a:xfrm>
           <a:prstGeom prst="rect">
@@ -12388,7 +12399,7 @@
         </p:nvSpPr>
         <p:spPr>
           <a:xfrm>
-            <a:off x="585216" y="2843784"/>
+            <a:off x="585216" y="2852928"/>
             <a:ext cx="11018520" cy="374904"/>
           </a:xfrm>
           <a:prstGeom prst="rect">
@@ -12438,7 +12449,7 @@
         </p:nvSpPr>
         <p:spPr>
           <a:xfrm>
-            <a:off x="585216" y="3279953"/>
+            <a:off x="585216" y="3266237"/>
             <a:ext cx="11018520" cy="0"/>
           </a:xfrm>
           <a:prstGeom prst="line">
@@ -12461,7 +12472,7 @@
         </p:nvSpPr>
         <p:spPr>
           <a:xfrm>
-            <a:off x="585216" y="3380537"/>
+            <a:off x="585216" y="3343961"/>
             <a:ext cx="11018520" cy="374904"/>
           </a:xfrm>
           <a:prstGeom prst="rect">
@@ -12522,7 +12533,7 @@
         </p:nvSpPr>
         <p:spPr>
           <a:xfrm>
-            <a:off x="585216" y="3770071"/>
+            <a:off x="585216" y="3733495"/>
             <a:ext cx="11018520" cy="374904"/>
           </a:xfrm>
           <a:prstGeom prst="rect">
@@ -12983,7 +12994,7 @@
                 <a:ea typeface="メイリオ" pitchFamily="34" charset="-122"/>
                 <a:cs typeface="メイリオ" pitchFamily="34" charset="-120"/>
               </a:rPr>
-              <a:t>抗血小</a:t>
+              <a:t>抗血小板</a:t>
             </a:r>
             <a:endParaRPr lang="ja-JP" sz="1050" dirty="0"/>
           </a:p>
@@ -13000,7 +13011,7 @@
                 <a:ea typeface="メイリオ" pitchFamily="34" charset="-122"/>
                 <a:cs typeface="メイリオ" pitchFamily="34" charset="-120"/>
               </a:rPr>
-              <a:t>板薬</a:t>
+              <a:t>薬</a:t>
             </a:r>
             <a:endParaRPr lang="ja-JP" sz="1050" dirty="0"/>
           </a:p>
@@ -13181,7 +13192,7 @@
                 <a:ea typeface="メイリオ" pitchFamily="34" charset="-122"/>
                 <a:cs typeface="メイリオ" pitchFamily="34" charset="-120"/>
               </a:rPr>
-              <a:t>日本循環器学会／日本不整脈心電学会 2020 年改訂版 不整脈薬物治療ガイドライン / Douketis JD,</a:t>
+              <a:t>日本循環器学会／日本不整脈心電学会 2020 年改訂版 不整脈薬物治療ガイドライン</a:t>
             </a:r>
             <a:endParaRPr lang="ja-JP" sz="1600" dirty="0"/>
           </a:p>
@@ -13198,7 +13209,7 @@
                 <a:ea typeface="メイリオ" pitchFamily="34" charset="-122"/>
                 <a:cs typeface="メイリオ" pitchFamily="34" charset="-120"/>
               </a:rPr>
-              <a:t>et al. Chest 2022;162:e207-e243 / Kopp SL, et al. Reg Anesth Pain Med 2025（ASRA 第 5 版）</a:t>
+              <a:t>Douketis JD, et al. Chest 2022;162:e207-e243 / Kopp SL, et al. Reg Anesth Pain Med 2025</a:t>
             </a:r>
             <a:endParaRPr lang="ja-JP" sz="1600" dirty="0"/>
           </a:p>
@@ -13396,7 +13407,7 @@
             <a:r>
               <a:rPr lang="ja-JP" altLang="en-US" sz="2400" b="1" dirty="0">
                 <a:solidFill>
-                  <a:srgbClr val="C00000"/>
+                  <a:srgbClr val="D55E00"/>
                 </a:solidFill>
                 <a:latin typeface="メイリオ" pitchFamily="34" charset="0"/>
                 <a:ea typeface="メイリオ" pitchFamily="34" charset="-122"/>

--- a/slides/4-12_antithrombotic_drugs/4-12_antithrombotic_drugs.pptx
+++ b/slides/4-12_antithrombotic_drugs/4-12_antithrombotic_drugs.pptx
@@ -14,9 +14,10 @@
     <p:sldId id="262" r:id="rId8"/>
     <p:sldId id="263" r:id="rId9"/>
     <p:sldId id="264" r:id="rId10"/>
+    <p:sldId id="265" r:id="rId11"/>
   </p:sldIdLst>
   <p:notesMasterIdLst>
-    <p:notesMasterId r:id="rId11"/>
+    <p:notesMasterId r:id="rId12"/>
   </p:notesMasterIdLst>
   <p:sldSz cx="12192000" cy="6858000"/>
   <p:notesSz cx="6858000" cy="12192000"/>
@@ -551,6 +552,93 @@
 </p:notes>
 </file>
 
+<file path=ppt/notesSlides/notesSlide10.xml><?xml version="1.0" encoding="utf-8"?>
+<p:notes xmlns:a="http://schemas.openxmlformats.org/drawingml/2006/main" xmlns:r="http://schemas.openxmlformats.org/officeDocument/2006/relationships" xmlns:p="http://schemas.openxmlformats.org/presentationml/2006/main">
+  <p:cSld>
+    <p:spTree>
+      <p:nvGrpSpPr>
+        <p:cNvPr id="1" name=""/>
+        <p:cNvGrpSpPr/>
+        <p:nvPr/>
+      </p:nvGrpSpPr>
+      <p:grpSpPr>
+        <a:xfrm>
+          <a:off x="0" y="0"/>
+          <a:ext cx="0" cy="0"/>
+          <a:chOff x="0" y="0"/>
+          <a:chExt cx="0" cy="0"/>
+        </a:xfrm>
+      </p:grpSpPr>
+      <p:sp>
+        <p:nvSpPr>
+          <p:cNvPr id="2" name="Slide Image Placeholder 1"/>
+          <p:cNvSpPr>
+            <a:spLocks noGrp="1" noRot="1" noChangeAspect="1"/>
+          </p:cNvSpPr>
+          <p:nvPr>
+            <p:ph type="sldImg"/>
+          </p:nvPr>
+        </p:nvSpPr>
+        <p:spPr/>
+      </p:sp>
+      <p:sp>
+        <p:nvSpPr>
+          <p:cNvPr id="3" name="Notes Placeholder 2"/>
+          <p:cNvSpPr>
+            <a:spLocks noGrp="1"/>
+          </p:cNvSpPr>
+          <p:nvPr>
+            <p:ph type="body" idx="1"/>
+          </p:nvPr>
+        </p:nvSpPr>
+        <p:spPr/>
+        <p:txBody>
+          <a:bodyPr/>
+          <a:lstStyle/>
+          <a:p>
+            <a:r>
+              <a:rPr lang="ja-JP" altLang="en-US" dirty="0"/>
+              <a:t>まとめ（約 1 分）。抗血栓薬の休薬は、手技の出血リスク（抜歯・白内障・体表は継続、脊髄幹麻酔・胸腹部は中断）と患者の血栓リスク（機械弁、3 か月以内の脳卒中・静脈血栓塞栓症、ステント後）で決め、処方医に相談する。ワルファリンは 5 日前に止めて INR を確かめ、DOAC は手術の出血リスクで 1〜2 日休薬し、ヘパリンブリッジは原則しない（BRIDGE、PAUSE）。アスピリンは原則続け（頭蓋内・脊柱管内の手術は別）、P2Y12 阻害薬は PCI 施行医と相談してから止める。区域麻酔の休薬は手術より長く、高用量 DOAC は 72 時間（心房細動の減量用量も高用量として扱う）、ダビガトランは腎機能で 72〜120 時間（ASRA 第 5 版。国内 3 学会は改訂第 2 版）。最終内服の日時、再開の条件、相談した相手を記録し、緊急手術では中和薬の在庫と全身麻酔への変更を考える。次は 4-13（常用薬②：糖尿病薬）。</a:t>
+            </a:r>
+          </a:p>
+        </p:txBody>
+      </p:sp>
+      <p:sp>
+        <p:nvSpPr>
+          <p:cNvPr id="4" name="Slide Number Placeholder 3"/>
+          <p:cNvSpPr>
+            <a:spLocks noGrp="1"/>
+          </p:cNvSpPr>
+          <p:nvPr>
+            <p:ph type="sldNum" sz="quarter" idx="10"/>
+          </p:nvPr>
+        </p:nvSpPr>
+        <p:spPr/>
+        <p:txBody>
+          <a:bodyPr/>
+          <a:lstStyle/>
+          <a:p>
+            <a:fld id="{F7021451-1387-4CA6-816F-3879F97B5CBC}" type="slidenum">
+              <a:rPr lang="en-US"/>
+              <a:t>10</a:t>
+            </a:fld>
+            <a:endParaRPr lang="en-US"/>
+          </a:p>
+        </p:txBody>
+      </p:sp>
+    </p:spTree>
+    <p:extLst>
+      <p:ext uri="{BB962C8B-B14F-4D97-AF65-F5344CB8AC3E}">
+        <p14:creationId xmlns:p14="http://schemas.microsoft.com/office/powerpoint/2010/main" val="1024086991"/>
+      </p:ext>
+    </p:extLst>
+  </p:cSld>
+  <p:clrMapOvr>
+    <a:masterClrMapping/>
+  </p:clrMapOvr>
+</p:notes>
+</file>
+
 <file path=ppt/notesSlides/notesSlide2.xml><?xml version="1.0" encoding="utf-8"?>
 <p:notes xmlns:a="http://schemas.openxmlformats.org/drawingml/2006/main" xmlns:r="http://schemas.openxmlformats.org/officeDocument/2006/relationships" xmlns:p="http://schemas.openxmlformats.org/presentationml/2006/main">
   <p:cSld>
@@ -972,7 +1060,7 @@
           <a:p>
             <a:r>
               <a:rPr lang="ja-JP" altLang="en-US" dirty="0"/>
-              <a:t>P2Y12 阻害薬: 手術での休薬の目安は ACCP 2022・ESC 2022 でクロピドグレル 5 日、チカグレロル 3〜5 日、プラスグレル 7 日。国内の添付文書はプラビックス・エフィエントとも 14 日以上前（エフィエントは「血小板凝集抑制が問題となるような手術の場合には、14 日以上前に投与を中止することが望ましい」）【要確認: PMDA 電子添文（プラビックス、エフィエント）の「重要な基本的注意」にある手術前の中止の記載。今回は二次資料と検索の抜粋で確認】。プラスグレルの国内用量は海外より少ないが、国内用量で周術期の休薬期間を検証したデータは見つからず、目安の 7 日は海外データによる。区域麻酔ではクロピドグレル 5〜7 日、チカグレロル 5 日、プラスグレル 7〜10 日（ASRA 第 5 版 → S6）。チカグレロルは可逆的に結合するが、休薬の目安は 3〜5 日。再開は止血を確認して術後 24 時間が目安（ACCP 2022）。負荷投与するかは出血リスクと PCI 施行医の判断で。</a:t>
+              <a:t>P2Y12 阻害薬: 手術での休薬の目安は ACCP 2022・ESC 2022 でクロピドグレル 5 日、チカグレロル 3〜5 日、プラスグレル 7 日。国内の添付文書はプラビックス・エフィエントとも 14 日以上前（エフィエントは「血小板凝集抑制が問題となるような手術の場合には、14 日以上前に投与を中止することが望ましい」）【要確認: PMDA 電子添文（プラビックス、エフィエント）の「重要な基本的注意」にある手術前の中止の記載。今回は二次資料と検索の抜粋で確認】。プラスグレルの国内用量は海外より少ないが、国内用量で周術期の休薬期間を検証したデータは見つからず、目安の 7 日は海外データによる。区域麻酔ではクロピドグレル 5〜7 日、チカグレロル 5 日、プラスグレル 7〜10 日（ASRA 第 5 版 → S7）。チカグレロルは可逆的に結合するが、休薬の目安は 3〜5 日。再開は止血を確認して術後 24 時間が目安（ACCP 2022）。負荷投与するかは出血リスクと PCI 施行医の判断で。</a:t>
             </a:r>
           </a:p>
           <a:p>
@@ -1077,7 +1165,13 @@
           <a:p>
             <a:r>
               <a:rPr lang="ja-JP" altLang="en-US" dirty="0"/>
-              <a:t>ASRA 第 5 版（Kopp SL, et al. Reg Anesth Pain Med 2025。2025 年 10 月オンライン公開、doi:10.1136/rapm-2024-105766）: 米国区域麻酔学会の抗血栓療法中の区域麻酔ガイドライン第 5 版は、用量の呼び方を「低用量／高用量」に改め、エビデンスが乏しい部分は保守的な方針をとる。用量の区分は量そのものではなく、患者の特徴と適応で決まる（抄録）。高用量の抗 Xa DOAC（アピキサバン、リバーロキサバン、エドキサバン）は脊髄幹麻酔・深部ブロックの 72 時間以上前に中止し、初回投与は穿刺またはカテーテル抜去から 24 時間以上あける（表の「24 時間後」の意味）。低用量はリバーロキサバン 24 時間、アピキサバン 36 時間、再開は抜去 6 時間後。LMWH は低用量 12 時間以上、高用量 24 時間以上、再開は抜去 4 時間以上後。施設で測定できれば、残存 DOAC 濃度 30 ng/mL 未満または抗 Xa 活性 0.1 IU/mL 以下を目安にできる（国内 3 学会 改訂第 2 版も同じ閾値を参照する）。休薬から 24〜48 時間で 30 ng/mL 未満に下がるのは約 2/3 の患者なので（2023 ACC/AHA）、時間だけで安全とは言えない。中和薬のルーチン投与は推奨しない【要確認: ASRA 第 5 版の原文（rapm.bmj.com）で、表の各時間（今回は Cureus 2026 の比較表と Guideline Central の要約で確認）と、中和薬のルーチン投与を推奨しない記載】。</a:t>
+              <a:t>ASRA 第 5 版（Kopp SL, et al. Reg Anesth Pain Med 2025。2025 年 10 月オンライン公開、doi:10.1136/rapm-2024-105766）: 米国区域麻酔学会の抗血栓療法中の区域麻酔ガイドライン第 5 版は、用量の呼び方を「低用量／高用量」に改め、エビデンスが乏しい部分は保守的な方針をとる。用量の区分は量そのものではなく、患者の特徴と適応で決まる（抄録）。高用量の抗 Xa DOAC（アピキサバン、リバーロキサバン、エドキサバン）は脊髄幹麻酔・深部ブロックの 72 時間以上前に中止し、初回投与は穿刺またはカテーテル抜去から 24 時間以上あける（表の「24 時間後」の意味）。低用量はリバーロキサバン 24 時間、アピキサバン 36 時間、再開は抜去 6 時間後。施設で測定できれば、残存 DOAC 濃度 30 ng/mL 未満または抗 Xa 活性 0.1 IU/mL 以下を目安にできる（国内 3 学会 改訂第 2 版も同じ閾値を参照する）。休薬から 24〜48 時間で 30 ng/mL 未満に下がるのは約 2/3 の患者なので（2023 ACC/AHA）、時間だけで安全とは言えない。中和薬のルーチン投与は推奨しない【要確認: ASRA 第 5 版の原文（rapm.bmj.com）で、表の各時間（今回は Cureus 2026 の比較表と Guideline Central の要約で確認）と、中和薬のルーチン投与を推奨しない記載】。</a:t>
+            </a:r>
+          </a:p>
+          <a:p>
+            <a:r>
+              <a:rPr lang="ja-JP" altLang="en-US" dirty="0"/>
+              <a:t>ワルファリン: 約 5 日前に中止し、INR が正常化（施設基準 1.4〜1.5 未満）してから穿刺する。カテーテルの抜去も INR 1.5 未満で行い、抜去後はすぐ再開できる。ESAIC/ESRA 2022 は、ワルファリン内服中のカテーテル留置を禁忌とする（二次資料）。</a:t>
             </a:r>
           </a:p>
           <a:p>
@@ -1095,25 +1189,7 @@
           <a:p>
             <a:r>
               <a:rPr lang="ja-JP" altLang="en-US" dirty="0"/>
-              <a:t>ヘパリン: 未分画ヘパリンの静注は 4〜6 時間止めて aPTT が正常なのを確かめ、再開は抜去 1 時間以上後。皮下注は低用量 4〜6 時間、高用量 12〜24 時間止める。皮下注の再開は、二次資料（Cureus 2026 の表）では抜去後すぐでよいとされるが、講義では静注と揃えて抜去 1 時間以上後とする（講義者の運用提案）【要確認: ASRA 第 5 版原文の皮下注 UFH の再開時刻】。国内の術後 VTE 予防のエノキサパリン 2000 IU×2 は「低用量の 1 日 2 回」にあたるので、硬膜外カテーテルを留置している間は投与しない。初回投与はカテーテル抜去の 4 時間以上後とし、開始時刻を術前に主科と決めて指示に書く【要確認: PMDA のクレキサン電子添文の「警告」「重要な基本的注意」にある脊椎・硬膜外麻酔とカテーテル抜去の記載】。</a:t>
-            </a:r>
-          </a:p>
-          <a:p>
-            <a:r>
-              <a:rPr lang="ja-JP" altLang="en-US" dirty="0"/>
-              <a:t>国内 3 学会: 日本ペインクリニック学会・日本麻酔科学会・日本区域麻酔学会 合同「抗血栓療法中の区域麻酔・神経ブロックガイドライン 改訂第 2 版」（2026）が出た。2016 年版（追補 2017）の表は旧版なので使わない。改訂第 2 版は、低用量アスピリンを含む NSAIDs では神経ブロック前の休薬は必須でない、出血リスクが特に高くなければ体表の神経ブロックは休薬せずに行える、脊髄幹麻酔・深部ブロックでは薬物動態に基づいて休薬期間を設ける、としている【要確認: 改訂第 2 版の本文（日本ペインクリニック学会サイトの PDF。今回は接続できず検索の抜粋だけ）で、この 3 点と薬剤別休薬期間表。表を確かめるまで S6 に国内の列は加えない】。</a:t>
-            </a:r>
-          </a:p>
-          <a:p>
-            <a:r>
-              <a:rPr lang="ja-JP" altLang="en-US" dirty="0"/>
-              <a:t>手術の基準との差: 外科が決めた DOAC の休薬（PAUSE・ACCP: 高出血リスクで 2 日＝最終内服から約 60〜68 時間）では、ASRA が脊髄幹麻酔に求める 72 時間を満たさない。脊髄くも膜下・硬膜外麻酔を使うかもしれない症例は、術前外来の時点で麻酔科が休薬期間を決める。</a:t>
-            </a:r>
-          </a:p>
-          <a:p>
-            <a:r>
-              <a:rPr lang="ja-JP" altLang="en-US" dirty="0"/>
-              <a:t>カテーテル: 抜去も穿刺と同じくらい危ない。抜去前の休薬（LMWH、ワルファリンは INR 1.5 未満）と抜去後の再開時刻を指示に書く。LMWH（皮下注）の低用量 1 日 2 回投与中・高用量投与中は、カテーテルを留置しない。クロピドグレルは負荷投与をしなければ 1〜2 日留置してよく、再開は負荷なしなら抜去後すぐ、負荷投与なら抜去 6 時間後。プラスグレル・チカグレロルの投与中は留置しない【要確認: ASRA 第 5 版原文の抗血小板薬の項で、プラスグレル・チカグレロル投与中のカテーテル留置の扱い。第 4 版の推奨で、第 5 版では確かめられていない】。DOAC はカテーテル抜去後に再開する（低用量 6 時間、高用量 24 時間）。ESAIC/ESRA 2022 は、ワルファリン内服中のカテーテル留置を禁忌とする（二次資料）。</a:t>
+              <a:t>手術の基準との差: 外科が決めた DOAC の休薬（PAUSE・ACCP: 高出血リスクで 2 日＝最終内服から約 60〜68 時間）では、ASRA が脊髄幹麻酔に求める 72 時間を満たさない。脊髄くも膜下・硬膜外麻酔を使うかもしれない症例は、術前外来の時点で麻酔科が休薬期間を決める。DOAC はカテーテル抜去後に再開する（低用量 6 時間、高用量 24 時間）。</a:t>
             </a:r>
           </a:p>
           <a:p>
@@ -1206,19 +1282,37 @@
           <a:p>
             <a:r>
               <a:rPr lang="ja-JP" altLang="en-US" dirty="0"/>
-              <a:t>相談: JCS/JHRS 2020 は、手技を行う医師が抗凝固薬の処方医に相談し、患者に血栓リスクを説明して同意を得るよう求めている。ステント後は PCI 施行医、機械弁は循環器内科・心臓血管外科、3 か月以内の静脈血栓塞栓症は待機手術を延期するか（延期できるなら少なくとも 3 か月。→ S2）を主科・処方医と決める。離島では電話・オンラインでの相談先を前もって決めておく。</a:t>
+              <a:t>LMWH: 低用量（術後 VTE 予防量）は 12 時間以上、高用量は 24 時間以上止め、再開は抜去 4 時間以上後（ASRA 第 5 版）。国内の術後 VTE 予防のエノキサパリン 2000 IU×2 は「低用量の 1 日 2 回」にあたるので、硬膜外カテーテルを留置している間は投与しない。初回投与はカテーテル抜去の 4 時間以上後とし、開始時刻を術前に主科と決めて指示に書く【要確認: PMDA のクレキサン電子添文の「警告」「重要な基本的注意」にある脊椎・硬膜外麻酔とカテーテル抜去の記載】。LMWH（皮下注）の低用量 1 日 2 回投与中・高用量投与中は、カテーテルを留置しない。</a:t>
             </a:r>
           </a:p>
           <a:p>
             <a:r>
               <a:rPr lang="ja-JP" altLang="en-US" dirty="0"/>
-              <a:t>緊急手術: 休薬表は待機手術向けで、緊急手術には当てはまらない。最終内服の時刻を聞き、ワルファリンは INR、DOAC は腎機能（CrCl）と時間で残り方を推定する。ダビガトランはイダルシズマブ 5 g（投与後 1 分以内に中和、効果は 24 時間）、ワルファリンはビタミン K とプロトロンビン複合体製剤。抗 Xa 薬の中和薬アンデキサネット アルファ（オンデキサ）は国内で使えるが、適応は生命を脅かす出血・止血困難な出血で（JCS/JHRS 2024：I、B）、出血のない緊急手術の前の中和は適応に入らない。ヘパリンの作用も打ち消すので、人工心肺などヘパリンを使う手術では ACT で監視する。プロトロンビン複合体製剤は抗 Xa 薬の大出血で考慮できるが、DOAC には保険適用外。離島では在庫を確かめ、なければ血液製剤と出血に備え、脊髄幹麻酔を避けて全身麻酔にする。</a:t>
+              <a:t>未分画ヘパリン: 静注は 4〜6 時間止めて aPTT が正常なのを確かめ、再開は抜去 1 時間以上後。皮下注は低用量 4〜6 時間、高用量 12〜24 時間止める。皮下注の再開は、二次資料（Cureus 2026 の表）では抜去後すぐでよいとされるが、講義では静注と揃えて抜去 1 時間以上後とする（講義者の運用提案）【要確認: ASRA 第 5 版原文の皮下注 UFH の再開時刻】。</a:t>
             </a:r>
           </a:p>
           <a:p>
             <a:r>
               <a:rPr lang="ja-JP" altLang="en-US" dirty="0"/>
-              <a:t>記録: 休薬の指示、再開の時刻、相談した相手、患者への説明を記録し、病棟・手術室・主科に伝える。</a:t>
+              <a:t>抗血小板薬: アスピリン単剤と NSAIDs なら脊髄幹麻酔・深部ブロックの前に休薬は不要（ASRA 第 5 版）。クロピドグレルは 5〜7 日、チカグレロルは 5 日、プラスグレルは 7〜10 日前に止める。クロピドグレルは負荷投与をしなければ 1〜2 日留置してよく、再開は負荷なしなら抜去後すぐ、負荷投与なら抜去 6 時間後。プラスグレル・チカグレロルの投与中は留置しない【要確認: ASRA 第 5 版原文の抗血小板薬の項で、プラスグレル・チカグレロル投与中のカテーテル留置の扱い。第 4 版の推奨で、第 5 版では確かめられていない】。</a:t>
+            </a:r>
+          </a:p>
+          <a:p>
+            <a:r>
+              <a:rPr lang="ja-JP" altLang="en-US" dirty="0"/>
+              <a:t>国内 3 学会: 日本ペインクリニック学会・日本麻酔科学会・日本区域麻酔学会 合同「抗血栓療法中の区域麻酔・神経ブロックガイドライン 改訂第 2 版」（2026）が出た。2016 年版（追補 2017）の表は旧版なので使わない。改訂第 2 版は、低用量アスピリンを含む NSAIDs では神経ブロック前の休薬は必須でない、出血リスクが特に高くなければ体表の神経ブロックは休薬せずに行える、脊髄幹麻酔・深部ブロックでは薬物動態に基づいて休薬期間を設ける、としている【要確認: 改訂第 2 版の本文（日本ペインクリニック学会サイトの PDF。今回は接続できず検索の抜粋だけ）で、この 3 点と薬剤別休薬期間表。表を確かめるまで S6・S7 に国内の列は加えない】。</a:t>
+            </a:r>
+          </a:p>
+          <a:p>
+            <a:r>
+              <a:rPr lang="ja-JP" altLang="en-US" dirty="0"/>
+              <a:t>カテーテル: 抜去も穿刺と同じくらい危ない。抜去前の休薬（LMWH、ワルファリンは INR 1.5 未満）と抜去後の再開時刻を指示に書く。DOAC はカテーテル抜去後に再開する（低用量 6 時間、高用量 24 時間 → S6）。</a:t>
+            </a:r>
+          </a:p>
+          <a:p>
+            <a:r>
+              <a:rPr lang="ja-JP" altLang="en-US" dirty="0"/>
+              <a:t>参考: 抗血栓療法中の区域麻酔・神経ブロックガイドライン 改訂第 2 版（2026） / Selvamani BJ, et al. Cureus 2026;18:e107704（比較表。二次資料）</a:t>
             </a:r>
           </a:p>
         </p:txBody>
@@ -1305,31 +1399,19 @@
           <a:p>
             <a:r>
               <a:rPr lang="ja-JP" altLang="en-US" dirty="0"/>
-              <a:t>書き方: 薬ごとに、最終内服の日時、なぜその長さか（手術の出血リスクか、脊髄幹麻酔か）、ブリッジの有無、再開の時刻と条件（止血の確認）、相談した相手、を書く。「2 日前から中止」だけでは最終内服の時刻がわからず、48 時間と 60 時間の違いが生まれる。</a:t>
+              <a:t>相談: JCS/JHRS 2020 は、手技を行う医師が抗凝固薬の処方医に相談し、患者に血栓リスクを説明して同意を得るよう求めている。ステント後は PCI 施行医、機械弁は循環器内科・心臓血管外科、3 か月以内の静脈血栓塞栓症は待機手術を延期するか（延期できるなら少なくとも 3 か月。→ S2）を主科・処方医と決める。離島では電話・オンラインでの相談先を前もって決めておく。</a:t>
             </a:r>
           </a:p>
           <a:p>
             <a:r>
               <a:rPr lang="ja-JP" altLang="en-US" dirty="0"/>
-              <a:t>時間の計算: 手術 3 日前の夜 20 時に最終内服すると、当日 9 時の入室では 61 時間（13 時でも 65 時間）で、72 時間に届かない。4 日前の夜 20 時なら 9 時入室で約 85 時間。最終内服の時刻から入室時刻までを時間で数える。エリキュース 5 mg×2 は ASRA の高用量で、心房細動の減量用量（2.5 mg×2）も高用量として扱う（→ S6）。</a:t>
+              <a:t>緊急手術: 休薬表は待機手術向けで、緊急手術には当てはまらない。最終内服の時刻を聞き、ワルファリンは INR、DOAC は腎機能（CrCl）と時間で残り方を推定する。ダビガトランはイダルシズマブ 5 g（投与後 1 分以内に中和、効果は 24 時間）、ワルファリンはビタミン K とプロトロンビン複合体製剤。抗 Xa 薬の中和薬アンデキサネット アルファ（オンデキサ）は国内で使えるが、適応は生命を脅かす出血・止血困難な出血で（JCS/JHRS 2024：I、B）、出血のない緊急手術の前の中和は適応に入らない。ヘパリンの作用も打ち消すので、人工心肺などヘパリンを使う手術では ACT で監視する。プロトロンビン複合体製剤は抗 Xa 薬の大出血で考慮できるが、DOAC には保険適用外。離島では在庫を確かめ、なければ血液製剤と出血に備え、脊髄幹麻酔を避けて全身麻酔にする。</a:t>
             </a:r>
           </a:p>
           <a:p>
             <a:r>
               <a:rPr lang="ja-JP" altLang="en-US" dirty="0"/>
-              <a:t>例を 2 人に分けた理由: 心房細動でステント留置から 1 年を超えた患者は、抗凝固薬の単剤が標準（JCS/JHRS 2020、Class I）。抗凝固薬と抗血小板薬を併用している患者は単剤の表では安全と言えないので、脊髄幹麻酔を避けるか、処方の見直しを含めて処方医と決める。患者 B のようにステント留置から 2 年たっても DAPT が続いているのは標準的ではないので、続けている理由を PCI 施行医に確かめる。クロピドグレルは ASRA 第 5 版で脊髄幹麻酔の前に 5〜7 日なので、例では長い方の 7 日で指示した（講義者の運用提案。手術 7 日前の朝 8 時なら当日 9 時で 7 日と 1 時間）。</a:t>
-            </a:r>
-          </a:p>
-          <a:p>
-            <a:r>
-              <a:rPr lang="ja-JP" altLang="en-US" dirty="0"/>
-              <a:t>区域麻酔: 脊髄くも膜下麻酔・硬膜外麻酔を使う可能性があれば、手術の基準（DOAC 2 日）ではなく区域麻酔の基準（高用量 DOAC 72 時間）で指示を出す。当日に基準を満たしていなければ、区域麻酔をあきらめて全身麻酔にするか延期する。</a:t>
-            </a:r>
-          </a:p>
-          <a:p>
-            <a:r>
-              <a:rPr lang="ja-JP" altLang="en-US" dirty="0"/>
-              <a:t>再開: 止血が確認できたら速やかに。エリキュースの術後 2 日目の夜の再開は、穿刺から 24 時間以上たっており、高出血リスク手術の再開（術後 2〜3 日、PAUSE）とも合う。P2Y12 阻害薬を負荷投与で再開するなら、穿刺・カテーテル抜去から 6 時間以上あける（ASRA 第 5 版、二次資料）。硬膜外カテーテルを留置している間は、抜去のタイミングと再開時刻を別に書く（→ S6）。</a:t>
+              <a:t>記録: 休薬の指示、再開の時刻、相談した相手、患者への説明を記録し、病棟・手術室・主科に伝える。</a:t>
             </a:r>
           </a:p>
         </p:txBody>
@@ -1416,7 +1498,31 @@
           <a:p>
             <a:r>
               <a:rPr lang="ja-JP" altLang="en-US" dirty="0"/>
-              <a:t>まとめ（約 1 分）。抗血栓薬の休薬は、手技の出血リスク（抜歯・白内障・体表は継続、脊髄幹麻酔・胸腹部は中断）と患者の血栓リスク（機械弁、3 か月以内の脳卒中・静脈血栓塞栓症、ステント後）で決め、処方医に相談する。ワルファリンは 5 日前に止めて INR を確かめ、DOAC は手術の出血リスクで 1〜2 日休薬し、ヘパリンブリッジは原則しない（BRIDGE、PAUSE）。アスピリンは原則続け（頭蓋内・脊柱管内の手術は別）、P2Y12 阻害薬は PCI 施行医と相談してから止める。区域麻酔の休薬は手術より長く、高用量 DOAC は 72 時間（心房細動の減量用量も高用量として扱う）、ダビガトランは腎機能で 72〜120 時間（ASRA 第 5 版。国内 3 学会は改訂第 2 版）。最終内服の日時、再開の条件、相談した相手を記録し、緊急手術では中和薬の在庫と全身麻酔への変更を考える。次は 4-13（常用薬②：糖尿病薬）。</a:t>
+              <a:t>書き方: 薬ごとに、最終内服の日時、なぜその長さか（手術の出血リスクか、脊髄幹麻酔か）、ブリッジの有無、再開の時刻と条件（止血の確認）、相談した相手、を書く。「2 日前から中止」だけでは最終内服の時刻がわからず、48 時間と 60 時間の違いが生まれる。</a:t>
+            </a:r>
+          </a:p>
+          <a:p>
+            <a:r>
+              <a:rPr lang="ja-JP" altLang="en-US" dirty="0"/>
+              <a:t>時間の計算: 手術 3 日前の夜 20 時に最終内服すると、当日 9 時の入室では 61 時間（13 時でも 65 時間）で、72 時間に届かない。4 日前の夜 20 時なら 9 時入室で約 85 時間。最終内服の時刻から入室時刻までを時間で数える。エリキュース 5 mg×2 は ASRA の高用量で、心房細動の減量用量（2.5 mg×2）も高用量として扱う（→ S6）。</a:t>
+            </a:r>
+          </a:p>
+          <a:p>
+            <a:r>
+              <a:rPr lang="ja-JP" altLang="en-US" dirty="0"/>
+              <a:t>例を 2 人に分けた理由: 心房細動でステント留置から 1 年を超えた患者は、抗凝固薬の単剤が標準（JCS/JHRS 2020、Class I）。抗凝固薬と抗血小板薬を併用している患者は単剤の表では安全と言えないので、脊髄幹麻酔を避けるか、処方の見直しを含めて処方医と決める。患者 B のようにステント留置から 2 年たっても DAPT が続いているのは標準的ではないので、続けている理由を PCI 施行医に確かめる。クロピドグレルは ASRA 第 5 版で脊髄幹麻酔の前に 5〜7 日なので、例では長い方の 7 日で指示した（講義者の運用提案。手術 7 日前の朝 8 時なら当日 9 時で 7 日と 1 時間）。</a:t>
+            </a:r>
+          </a:p>
+          <a:p>
+            <a:r>
+              <a:rPr lang="ja-JP" altLang="en-US" dirty="0"/>
+              <a:t>区域麻酔: 脊髄くも膜下麻酔・硬膜外麻酔を使う可能性があれば、手術の基準（DOAC 2 日）ではなく区域麻酔の基準（高用量 DOAC 72 時間）で指示を出す。当日に基準を満たしていなければ、区域麻酔をあきらめて全身麻酔にするか延期する。</a:t>
+            </a:r>
+          </a:p>
+          <a:p>
+            <a:r>
+              <a:rPr lang="ja-JP" altLang="en-US" dirty="0"/>
+              <a:t>再開: 止血が確認できたら速やかに。エリキュースの術後 2 日目の夜の再開は、穿刺から 24 時間以上たっており、高出血リスク手術の再開（術後 2〜3 日、PAUSE）とも合う。P2Y12 阻害薬を負荷投与で再開するなら、穿刺・カテーテル抜去から 6 時間以上あける（ASRA 第 5 版、二次資料）。硬膜外カテーテルを留置している間は、抜去のタイミングと再開時刻を別に書く（→ S7）。</a:t>
             </a:r>
           </a:p>
         </p:txBody>
@@ -2098,6 +2204,650 @@
 </p:sld>
 </file>
 
+<file path=ppt/slides/slide10.xml><?xml version="1.0" encoding="utf-8"?>
+<p:sld xmlns:a="http://schemas.openxmlformats.org/drawingml/2006/main" xmlns:r="http://schemas.openxmlformats.org/officeDocument/2006/relationships" xmlns:p="http://schemas.openxmlformats.org/presentationml/2006/main">
+  <p:cSld name="Slide 10">
+    <p:spTree>
+      <p:nvGrpSpPr>
+        <p:cNvPr id="1" name=""/>
+        <p:cNvGrpSpPr/>
+        <p:nvPr/>
+      </p:nvGrpSpPr>
+      <p:grpSpPr>
+        <a:xfrm>
+          <a:off x="0" y="0"/>
+          <a:ext cx="0" cy="0"/>
+          <a:chOff x="0" y="0"/>
+          <a:chExt cx="0" cy="0"/>
+        </a:xfrm>
+      </p:grpSpPr>
+      <p:sp>
+        <p:nvSpPr>
+          <p:cNvPr id="2" name="Title"/>
+          <p:cNvSpPr>
+            <a:spLocks noGrp="1"/>
+          </p:cNvSpPr>
+          <p:nvPr>
+            <p:ph type="title"/>
+          </p:nvPr>
+        </p:nvSpPr>
+        <p:spPr>
+          <a:xfrm>
+            <a:off x="502920" y="320040"/>
+            <a:ext cx="8503920" cy="868680"/>
+          </a:xfrm>
+          <a:prstGeom prst="rect">
+            <a:avLst/>
+          </a:prstGeom>
+          <a:noFill/>
+          <a:ln/>
+        </p:spPr>
+        <p:txBody>
+          <a:bodyPr wrap="square" lIns="0" tIns="0" rIns="0" bIns="0" rtlCol="0" anchor="ctr"/>
+          <a:lstStyle/>
+          <a:p>
+            <a:pPr algn="l" indent="0" marL="0">
+              <a:buNone/>
+            </a:pPr>
+            <a:r>
+              <a:rPr lang="ja-JP" altLang="en-US" sz="4400" b="1" dirty="0">
+                <a:ln w="28575">
+                  <a:solidFill>
+                    <a:srgbClr val="000000"/>
+                  </a:solidFill>
+                </a:ln>
+                <a:solidFill>
+                  <a:srgbClr val="BF9000"/>
+                </a:solidFill>
+                <a:latin typeface="メイリオ" pitchFamily="34" charset="0"/>
+                <a:ea typeface="メイリオ" pitchFamily="34" charset="-122"/>
+                <a:cs typeface="メイリオ" pitchFamily="34" charset="-120"/>
+              </a:rPr>
+              <a:t>まとめ</a:t>
+            </a:r>
+            <a:endParaRPr lang="ja-JP" sz="4400" dirty="0"/>
+          </a:p>
+        </p:txBody>
+      </p:sp>
+      <p:sp>
+        <p:nvSpPr>
+          <p:cNvPr id="3" name="Shape 1"/>
+          <p:cNvSpPr/>
+          <p:nvPr/>
+        </p:nvSpPr>
+        <p:spPr>
+          <a:xfrm>
+            <a:off x="0" y="1389888"/>
+            <a:ext cx="12191970" cy="0"/>
+          </a:xfrm>
+          <a:prstGeom prst="line">
+            <a:avLst/>
+          </a:prstGeom>
+          <a:noFill/>
+          <a:ln w="101600">
+            <a:solidFill>
+              <a:srgbClr val="BF9000"/>
+            </a:solidFill>
+            <a:prstDash val="solid"/>
+          </a:ln>
+        </p:spPr>
+      </p:sp>
+      <p:sp>
+        <p:nvSpPr>
+          <p:cNvPr id="4" name="Text 2"/>
+          <p:cNvSpPr/>
+          <p:nvPr/>
+        </p:nvSpPr>
+        <p:spPr>
+          <a:xfrm>
+            <a:off x="8677656" y="54864"/>
+            <a:ext cx="621792" cy="585216"/>
+          </a:xfrm>
+          <a:prstGeom prst="roundRect">
+            <a:avLst>
+              <a:gd name="adj" fmla="val 7813"/>
+            </a:avLst>
+          </a:prstGeom>
+          <a:solidFill>
+            <a:srgbClr val="D9D9D9"/>
+          </a:solidFill>
+          <a:ln/>
+        </p:spPr>
+        <p:txBody>
+          <a:bodyPr wrap="none" lIns="0" tIns="0" rIns="0" bIns="0" rtlCol="0" anchor="ctr"/>
+          <a:lstStyle/>
+          <a:p>
+            <a:pPr algn="ctr" indent="0" marL="0">
+              <a:buNone/>
+            </a:pPr>
+            <a:r>
+              <a:rPr lang="ja-JP" altLang="en-US" sz="1050" dirty="0">
+                <a:solidFill>
+                  <a:srgbClr val="404040"/>
+                </a:solidFill>
+                <a:latin typeface="メイリオ" pitchFamily="34" charset="0"/>
+                <a:ea typeface="メイリオ" pitchFamily="34" charset="-122"/>
+                <a:cs typeface="メイリオ" pitchFamily="34" charset="-120"/>
+              </a:rPr>
+              <a:t>考え方</a:t>
+            </a:r>
+            <a:endParaRPr lang="ja-JP" sz="1050" dirty="0"/>
+          </a:p>
+        </p:txBody>
+      </p:sp>
+      <p:sp>
+        <p:nvSpPr>
+          <p:cNvPr id="5" name="Text 3"/>
+          <p:cNvSpPr/>
+          <p:nvPr/>
+        </p:nvSpPr>
+        <p:spPr>
+          <a:xfrm>
+            <a:off x="9354312" y="54864"/>
+            <a:ext cx="621792" cy="585216"/>
+          </a:xfrm>
+          <a:prstGeom prst="roundRect">
+            <a:avLst>
+              <a:gd name="adj" fmla="val 7813"/>
+            </a:avLst>
+          </a:prstGeom>
+          <a:solidFill>
+            <a:srgbClr val="D9D9D9"/>
+          </a:solidFill>
+          <a:ln/>
+        </p:spPr>
+        <p:txBody>
+          <a:bodyPr wrap="none" lIns="0" tIns="0" rIns="0" bIns="0" rtlCol="0" anchor="ctr"/>
+          <a:lstStyle/>
+          <a:p>
+            <a:pPr algn="ctr" indent="0" marL="0">
+              <a:buNone/>
+            </a:pPr>
+            <a:r>
+              <a:rPr lang="ja-JP" altLang="en-US" sz="1050" dirty="0">
+                <a:solidFill>
+                  <a:srgbClr val="404040"/>
+                </a:solidFill>
+                <a:latin typeface="メイリオ" pitchFamily="34" charset="0"/>
+                <a:ea typeface="メイリオ" pitchFamily="34" charset="-122"/>
+                <a:cs typeface="メイリオ" pitchFamily="34" charset="-120"/>
+              </a:rPr>
+              <a:t>抗凝固薬</a:t>
+            </a:r>
+            <a:endParaRPr lang="ja-JP" sz="1050" dirty="0"/>
+          </a:p>
+        </p:txBody>
+      </p:sp>
+      <p:sp>
+        <p:nvSpPr>
+          <p:cNvPr id="6" name="Text 4"/>
+          <p:cNvSpPr/>
+          <p:nvPr/>
+        </p:nvSpPr>
+        <p:spPr>
+          <a:xfrm>
+            <a:off x="10030968" y="54864"/>
+            <a:ext cx="621792" cy="585216"/>
+          </a:xfrm>
+          <a:prstGeom prst="roundRect">
+            <a:avLst>
+              <a:gd name="adj" fmla="val 7813"/>
+            </a:avLst>
+          </a:prstGeom>
+          <a:solidFill>
+            <a:srgbClr val="D9D9D9"/>
+          </a:solidFill>
+          <a:ln/>
+        </p:spPr>
+        <p:txBody>
+          <a:bodyPr wrap="none" lIns="0" tIns="0" rIns="0" bIns="0" rtlCol="0" anchor="ctr"/>
+          <a:lstStyle/>
+          <a:p>
+            <a:pPr algn="ctr" indent="0" marL="0">
+              <a:buNone/>
+            </a:pPr>
+            <a:r>
+              <a:rPr lang="ja-JP" altLang="en-US" sz="1050" dirty="0">
+                <a:solidFill>
+                  <a:srgbClr val="404040"/>
+                </a:solidFill>
+                <a:latin typeface="メイリオ" pitchFamily="34" charset="0"/>
+                <a:ea typeface="メイリオ" pitchFamily="34" charset="-122"/>
+                <a:cs typeface="メイリオ" pitchFamily="34" charset="-120"/>
+              </a:rPr>
+              <a:t>抗血小板</a:t>
+            </a:r>
+            <a:endParaRPr lang="ja-JP" sz="1050" dirty="0"/>
+          </a:p>
+          <a:p>
+            <a:pPr algn="ctr" indent="0" marL="0">
+              <a:buNone/>
+            </a:pPr>
+            <a:r>
+              <a:rPr lang="ja-JP" altLang="en-US" sz="1050" dirty="0">
+                <a:solidFill>
+                  <a:srgbClr val="404040"/>
+                </a:solidFill>
+                <a:latin typeface="メイリオ" pitchFamily="34" charset="0"/>
+                <a:ea typeface="メイリオ" pitchFamily="34" charset="-122"/>
+                <a:cs typeface="メイリオ" pitchFamily="34" charset="-120"/>
+              </a:rPr>
+              <a:t>薬</a:t>
+            </a:r>
+            <a:endParaRPr lang="ja-JP" sz="1050" dirty="0"/>
+          </a:p>
+        </p:txBody>
+      </p:sp>
+      <p:sp>
+        <p:nvSpPr>
+          <p:cNvPr id="7" name="Text 5"/>
+          <p:cNvSpPr/>
+          <p:nvPr/>
+        </p:nvSpPr>
+        <p:spPr>
+          <a:xfrm>
+            <a:off x="10707624" y="54864"/>
+            <a:ext cx="621792" cy="585216"/>
+          </a:xfrm>
+          <a:prstGeom prst="roundRect">
+            <a:avLst>
+              <a:gd name="adj" fmla="val 7813"/>
+            </a:avLst>
+          </a:prstGeom>
+          <a:solidFill>
+            <a:srgbClr val="D9D9D9"/>
+          </a:solidFill>
+          <a:ln/>
+        </p:spPr>
+        <p:txBody>
+          <a:bodyPr wrap="none" lIns="0" tIns="0" rIns="0" bIns="0" rtlCol="0" anchor="ctr"/>
+          <a:lstStyle/>
+          <a:p>
+            <a:pPr algn="ctr" indent="0" marL="0">
+              <a:buNone/>
+            </a:pPr>
+            <a:r>
+              <a:rPr lang="ja-JP" altLang="en-US" sz="1050" dirty="0">
+                <a:solidFill>
+                  <a:srgbClr val="404040"/>
+                </a:solidFill>
+                <a:latin typeface="メイリオ" pitchFamily="34" charset="0"/>
+                <a:ea typeface="メイリオ" pitchFamily="34" charset="-122"/>
+                <a:cs typeface="メイリオ" pitchFamily="34" charset="-120"/>
+              </a:rPr>
+              <a:t>区域</a:t>
+            </a:r>
+            <a:endParaRPr lang="ja-JP" sz="1050" dirty="0"/>
+          </a:p>
+          <a:p>
+            <a:pPr algn="ctr" indent="0" marL="0">
+              <a:buNone/>
+            </a:pPr>
+            <a:r>
+              <a:rPr lang="ja-JP" altLang="en-US" sz="1050" dirty="0">
+                <a:solidFill>
+                  <a:srgbClr val="404040"/>
+                </a:solidFill>
+                <a:latin typeface="メイリオ" pitchFamily="34" charset="0"/>
+                <a:ea typeface="メイリオ" pitchFamily="34" charset="-122"/>
+                <a:cs typeface="メイリオ" pitchFamily="34" charset="-120"/>
+              </a:rPr>
+              <a:t>麻酔</a:t>
+            </a:r>
+            <a:endParaRPr lang="ja-JP" sz="1050" dirty="0"/>
+          </a:p>
+        </p:txBody>
+      </p:sp>
+      <p:sp>
+        <p:nvSpPr>
+          <p:cNvPr id="8" name="Text 6"/>
+          <p:cNvSpPr/>
+          <p:nvPr/>
+        </p:nvSpPr>
+        <p:spPr>
+          <a:xfrm>
+            <a:off x="11384280" y="54864"/>
+            <a:ext cx="621792" cy="585216"/>
+          </a:xfrm>
+          <a:prstGeom prst="roundRect">
+            <a:avLst>
+              <a:gd name="adj" fmla="val 7813"/>
+            </a:avLst>
+          </a:prstGeom>
+          <a:solidFill>
+            <a:srgbClr val="00A8AA"/>
+          </a:solidFill>
+          <a:ln/>
+        </p:spPr>
+        <p:txBody>
+          <a:bodyPr wrap="none" lIns="0" tIns="0" rIns="0" bIns="0" rtlCol="0" anchor="ctr"/>
+          <a:lstStyle/>
+          <a:p>
+            <a:pPr algn="ctr" indent="0" marL="0">
+              <a:buNone/>
+            </a:pPr>
+            <a:r>
+              <a:rPr lang="ja-JP" altLang="en-US" sz="1050" b="1" dirty="0">
+                <a:solidFill>
+                  <a:srgbClr val="FFFFFF"/>
+                </a:solidFill>
+                <a:latin typeface="メイリオ" pitchFamily="34" charset="0"/>
+                <a:ea typeface="メイリオ" pitchFamily="34" charset="-122"/>
+                <a:cs typeface="メイリオ" pitchFamily="34" charset="-120"/>
+              </a:rPr>
+              <a:t>まとめ</a:t>
+            </a:r>
+            <a:endParaRPr lang="ja-JP" sz="1050" dirty="0"/>
+          </a:p>
+        </p:txBody>
+      </p:sp>
+      <p:sp>
+        <p:nvSpPr>
+          <p:cNvPr id="9" name="Text 7"/>
+          <p:cNvSpPr txBox="1"/>
+          <p:nvPr/>
+        </p:nvSpPr>
+        <p:spPr>
+          <a:xfrm>
+            <a:off x="11247120" y="6446520"/>
+            <a:ext cx="731520" cy="320040"/>
+          </a:xfrm>
+          <a:prstGeom prst="rect">
+            <a:avLst/>
+          </a:prstGeom>
+          <a:noFill/>
+          <a:ln/>
+        </p:spPr>
+        <p:txBody>
+          <a:bodyPr wrap="square" lIns="0" tIns="0" rIns="0" bIns="0" rtlCol="0" anchor="b"/>
+          <a:lstStyle/>
+          <a:p>
+            <a:pPr algn="r" indent="0" marL="0">
+              <a:buNone/>
+            </a:pPr>
+            <a:r>
+              <a:rPr lang="ja-JP" altLang="en-US" sz="1200" dirty="0">
+                <a:solidFill>
+                  <a:srgbClr val="7F7F7F"/>
+                </a:solidFill>
+                <a:latin typeface="メイリオ" pitchFamily="34" charset="0"/>
+                <a:ea typeface="メイリオ" pitchFamily="34" charset="-122"/>
+                <a:cs typeface="メイリオ" pitchFamily="34" charset="-120"/>
+              </a:rPr>
+              <a:t>9</a:t>
+            </a:r>
+            <a:endParaRPr lang="ja-JP" sz="1200" dirty="0"/>
+          </a:p>
+        </p:txBody>
+      </p:sp>
+      <p:sp>
+        <p:nvSpPr>
+          <p:cNvPr id="10" name="Text 8"/>
+          <p:cNvSpPr txBox="1"/>
+          <p:nvPr/>
+        </p:nvSpPr>
+        <p:spPr>
+          <a:xfrm>
+            <a:off x="502920" y="5943600"/>
+            <a:ext cx="10607040" cy="777240"/>
+          </a:xfrm>
+          <a:prstGeom prst="rect">
+            <a:avLst/>
+          </a:prstGeom>
+          <a:noFill/>
+          <a:ln/>
+        </p:spPr>
+        <p:txBody>
+          <a:bodyPr wrap="square" lIns="0" tIns="0" rIns="0" bIns="0" rtlCol="0" anchor="b"/>
+          <a:lstStyle/>
+          <a:p>
+            <a:pPr algn="l" indent="0" marL="0">
+              <a:buNone/>
+            </a:pPr>
+            <a:r>
+              <a:rPr lang="ja-JP" altLang="en-US" sz="1600" dirty="0">
+                <a:solidFill>
+                  <a:srgbClr val="595959"/>
+                </a:solidFill>
+                <a:latin typeface="メイリオ" pitchFamily="34" charset="0"/>
+                <a:ea typeface="メイリオ" pitchFamily="34" charset="-122"/>
+                <a:cs typeface="メイリオ" pitchFamily="34" charset="-120"/>
+              </a:rPr>
+              <a:t>日本循環器学会／日本不整脈心電学会 2020 年改訂版 不整脈薬物治療ガイドライン</a:t>
+            </a:r>
+            <a:endParaRPr lang="ja-JP" sz="1600" dirty="0"/>
+          </a:p>
+          <a:p>
+            <a:pPr algn="l" indent="0" marL="0">
+              <a:buNone/>
+            </a:pPr>
+            <a:r>
+              <a:rPr lang="ja-JP" altLang="en-US" sz="1600" dirty="0">
+                <a:solidFill>
+                  <a:srgbClr val="595959"/>
+                </a:solidFill>
+                <a:latin typeface="メイリオ" pitchFamily="34" charset="0"/>
+                <a:ea typeface="メイリオ" pitchFamily="34" charset="-122"/>
+                <a:cs typeface="メイリオ" pitchFamily="34" charset="-120"/>
+              </a:rPr>
+              <a:t>Douketis JD, et al. Chest 2022;162:e207-e243 / Kopp SL, et al. Reg Anesth Pain Med 2025</a:t>
+            </a:r>
+            <a:endParaRPr lang="ja-JP" sz="1600" dirty="0"/>
+          </a:p>
+        </p:txBody>
+      </p:sp>
+      <p:sp>
+        <p:nvSpPr>
+          <p:cNvPr id="11" name="Text 9"/>
+          <p:cNvSpPr txBox="1"/>
+          <p:nvPr/>
+        </p:nvSpPr>
+        <p:spPr>
+          <a:xfrm>
+            <a:off x="502920" y="1691640"/>
+            <a:ext cx="11155680" cy="4197096"/>
+          </a:xfrm>
+          <a:prstGeom prst="rect">
+            <a:avLst/>
+          </a:prstGeom>
+          <a:noFill/>
+          <a:ln/>
+        </p:spPr>
+        <p:txBody>
+          <a:bodyPr wrap="square" lIns="0" tIns="0" rIns="0" bIns="0" rtlCol="0" anchor="ctr"/>
+          <a:lstStyle/>
+          <a:p>
+            <a:pPr algn="l" marL="355600" indent="-355600">
+              <a:spcAft>
+                <a:spcPts val="2800"/>
+              </a:spcAft>
+              <a:buSzPct val="100000"/>
+              <a:buChar char="•"/>
+            </a:pPr>
+            <a:r>
+              <a:rPr lang="ja-JP" altLang="en-US" sz="2400" dirty="0">
+                <a:solidFill>
+                  <a:srgbClr val="262626"/>
+                </a:solidFill>
+                <a:latin typeface="メイリオ" pitchFamily="34" charset="0"/>
+                <a:ea typeface="メイリオ" pitchFamily="34" charset="-122"/>
+                <a:cs typeface="メイリオ" pitchFamily="34" charset="-120"/>
+              </a:rPr>
+              <a:t>休薬は</a:t>
+            </a:r>
+            <a:r>
+              <a:rPr lang="ja-JP" altLang="en-US" sz="2400" b="1" dirty="0">
+                <a:solidFill>
+                  <a:srgbClr val="0072B2"/>
+                </a:solidFill>
+                <a:latin typeface="メイリオ" pitchFamily="34" charset="0"/>
+                <a:ea typeface="メイリオ" pitchFamily="34" charset="-122"/>
+                <a:cs typeface="メイリオ" pitchFamily="34" charset="-120"/>
+              </a:rPr>
+              <a:t>出血リスク × 血栓リスク</a:t>
+            </a:r>
+            <a:r>
+              <a:rPr lang="ja-JP" altLang="en-US" sz="2400" dirty="0">
+                <a:solidFill>
+                  <a:srgbClr val="262626"/>
+                </a:solidFill>
+                <a:latin typeface="メイリオ" pitchFamily="34" charset="0"/>
+                <a:ea typeface="メイリオ" pitchFamily="34" charset="-122"/>
+                <a:cs typeface="メイリオ" pitchFamily="34" charset="-120"/>
+              </a:rPr>
+              <a:t>で決める。止血できる手技は続ける</a:t>
+            </a:r>
+            <a:endParaRPr lang="ja-JP" sz="2400" dirty="0"/>
+          </a:p>
+          <a:p>
+            <a:pPr algn="l" marL="355600" indent="-355600">
+              <a:spcAft>
+                <a:spcPts val="2800"/>
+              </a:spcAft>
+              <a:buSzPct val="100000"/>
+              <a:buChar char="•"/>
+            </a:pPr>
+            <a:r>
+              <a:rPr lang="ja-JP" altLang="en-US" sz="2400" dirty="0">
+                <a:solidFill>
+                  <a:srgbClr val="262626"/>
+                </a:solidFill>
+                <a:latin typeface="メイリオ" pitchFamily="34" charset="0"/>
+                <a:ea typeface="メイリオ" pitchFamily="34" charset="-122"/>
+                <a:cs typeface="メイリオ" pitchFamily="34" charset="-120"/>
+              </a:rPr>
+              <a:t>ワルファリン 5 日、DOAC 1〜2 日。</a:t>
+            </a:r>
+            <a:r>
+              <a:rPr lang="ja-JP" altLang="en-US" sz="2400" b="1" dirty="0">
+                <a:solidFill>
+                  <a:srgbClr val="D55E00"/>
+                </a:solidFill>
+                <a:latin typeface="メイリオ" pitchFamily="34" charset="0"/>
+                <a:ea typeface="メイリオ" pitchFamily="34" charset="-122"/>
+                <a:cs typeface="メイリオ" pitchFamily="34" charset="-120"/>
+              </a:rPr>
+              <a:t>ブリッジは原則しない</a:t>
+            </a:r>
+            <a:endParaRPr lang="ja-JP" sz="2400" dirty="0"/>
+          </a:p>
+          <a:p>
+            <a:pPr algn="l" marL="355600" indent="-355600">
+              <a:spcAft>
+                <a:spcPts val="2800"/>
+              </a:spcAft>
+              <a:buSzPct val="100000"/>
+              <a:buChar char="•"/>
+            </a:pPr>
+            <a:r>
+              <a:rPr lang="ja-JP" altLang="en-US" sz="2400" dirty="0">
+                <a:solidFill>
+                  <a:srgbClr val="262626"/>
+                </a:solidFill>
+                <a:latin typeface="メイリオ" pitchFamily="34" charset="0"/>
+                <a:ea typeface="メイリオ" pitchFamily="34" charset="-122"/>
+                <a:cs typeface="メイリオ" pitchFamily="34" charset="-120"/>
+              </a:rPr>
+              <a:t>アスピリンは原則続ける。P2Y12 阻害薬の中止は </a:t>
+            </a:r>
+            <a:r>
+              <a:rPr lang="ja-JP" altLang="en-US" sz="2400" b="1" dirty="0">
+                <a:solidFill>
+                  <a:srgbClr val="0072B2"/>
+                </a:solidFill>
+                <a:latin typeface="メイリオ" pitchFamily="34" charset="0"/>
+                <a:ea typeface="メイリオ" pitchFamily="34" charset="-122"/>
+                <a:cs typeface="メイリオ" pitchFamily="34" charset="-120"/>
+              </a:rPr>
+              <a:t>PCI 施行医と</a:t>
+            </a:r>
+            <a:endParaRPr lang="ja-JP" sz="2400" dirty="0"/>
+          </a:p>
+          <a:p>
+            <a:pPr algn="l" marL="355600" indent="-355600">
+              <a:spcAft>
+                <a:spcPts val="2800"/>
+              </a:spcAft>
+              <a:buSzPct val="100000"/>
+              <a:buChar char="•"/>
+            </a:pPr>
+            <a:r>
+              <a:rPr lang="ja-JP" altLang="en-US" sz="2400" dirty="0">
+                <a:solidFill>
+                  <a:srgbClr val="262626"/>
+                </a:solidFill>
+                <a:latin typeface="メイリオ" pitchFamily="34" charset="0"/>
+                <a:ea typeface="メイリオ" pitchFamily="34" charset="-122"/>
+                <a:cs typeface="メイリオ" pitchFamily="34" charset="-120"/>
+              </a:rPr>
+              <a:t>区域麻酔は手術より長い：</a:t>
+            </a:r>
+            <a:r>
+              <a:rPr lang="ja-JP" altLang="en-US" sz="2400" b="1" dirty="0">
+                <a:solidFill>
+                  <a:srgbClr val="D55E00"/>
+                </a:solidFill>
+                <a:latin typeface="メイリオ" pitchFamily="34" charset="0"/>
+                <a:ea typeface="メイリオ" pitchFamily="34" charset="-122"/>
+                <a:cs typeface="メイリオ" pitchFamily="34" charset="-120"/>
+              </a:rPr>
+              <a:t>高用量 DOAC 72 時間</a:t>
+            </a:r>
+            <a:r>
+              <a:rPr lang="ja-JP" altLang="en-US" sz="2400" dirty="0">
+                <a:solidFill>
+                  <a:srgbClr val="262626"/>
+                </a:solidFill>
+                <a:latin typeface="メイリオ" pitchFamily="34" charset="0"/>
+                <a:ea typeface="メイリオ" pitchFamily="34" charset="-122"/>
+                <a:cs typeface="メイリオ" pitchFamily="34" charset="-120"/>
+              </a:rPr>
+              <a:t>（ASRA 第 5 版）</a:t>
+            </a:r>
+            <a:endParaRPr lang="ja-JP" sz="2400" dirty="0"/>
+          </a:p>
+          <a:p>
+            <a:pPr algn="l" marL="355600" indent="-355600">
+              <a:spcAft>
+                <a:spcPts val="2800"/>
+              </a:spcAft>
+              <a:buSzPct val="100000"/>
+              <a:buChar char="•"/>
+            </a:pPr>
+            <a:r>
+              <a:rPr lang="ja-JP" altLang="en-US" sz="2400" dirty="0">
+                <a:solidFill>
+                  <a:srgbClr val="262626"/>
+                </a:solidFill>
+                <a:latin typeface="メイリオ" pitchFamily="34" charset="0"/>
+                <a:ea typeface="メイリオ" pitchFamily="34" charset="-122"/>
+                <a:cs typeface="メイリオ" pitchFamily="34" charset="-120"/>
+              </a:rPr>
+              <a:t>最終内服の日時・再開の条件・相談相手を記録する。</a:t>
+            </a:r>
+            <a:r>
+              <a:rPr lang="ja-JP" altLang="en-US" sz="2400" b="1" dirty="0">
+                <a:solidFill>
+                  <a:srgbClr val="D55E00"/>
+                </a:solidFill>
+                <a:latin typeface="メイリオ" pitchFamily="34" charset="0"/>
+                <a:ea typeface="メイリオ" pitchFamily="34" charset="-122"/>
+                <a:cs typeface="メイリオ" pitchFamily="34" charset="-120"/>
+              </a:rPr>
+              <a:t>緊急は中和薬</a:t>
+            </a:r>
+            <a:endParaRPr lang="ja-JP" sz="2400" dirty="0"/>
+          </a:p>
+        </p:txBody>
+      </p:sp>
+    </p:spTree>
+  </p:cSld>
+  <p:clrMapOvr>
+    <a:masterClrMapping/>
+  </p:clrMapOvr>
+</p:sld>
+</file>
+
 <file path=ppt/slides/slide2.xml><?xml version="1.0" encoding="utf-8"?>
 <p:sld xmlns:a="http://schemas.openxmlformats.org/drawingml/2006/main" xmlns:r="http://schemas.openxmlformats.org/officeDocument/2006/relationships" xmlns:p="http://schemas.openxmlformats.org/presentationml/2006/main">
   <p:cSld name="Slide 2">
@@ -6598,16 +7348,16 @@
         </p:nvGraphicFramePr>
         <p:xfrm>
           <a:off x="502920" y="1664208"/>
-          <a:ext cx="11183112" cy="914400"/>
+          <a:ext cx="11155680" cy="914400"/>
         </p:xfrm>
         <a:graphic>
           <a:graphicData uri="http://schemas.openxmlformats.org/drawingml/2006/table">
             <a:tbl>
               <a:tblPr/>
               <a:tblGrid>
-                <a:gridCol w="2345436"/>
-                <a:gridCol w="3822192"/>
-                <a:gridCol w="5015484"/>
+                <a:gridCol w="2688336"/>
+                <a:gridCol w="3931920"/>
+                <a:gridCol w="4535424"/>
               </a:tblGrid>
               <a:tr h="411480">
                 <a:tc>
@@ -7283,7 +8033,7 @@
                           <a:ea typeface="メイリオ" pitchFamily="34" charset="-122"/>
                           <a:cs typeface="メイリオ" pitchFamily="34" charset="-120"/>
                         </a:rPr>
-                        <a:t>DAPT 中の待機手術は延期が第一。</a:t>
+                        <a:t>DAPT 中の待機手術は</a:t>
                       </a:r>
                       <a:endParaRPr lang="en-US" sz="2200" dirty="0">
                         <a:latin typeface="メイリオ" charset="0"/>
@@ -7307,7 +8057,7 @@
                           <a:ea typeface="メイリオ" pitchFamily="34" charset="-122"/>
                           <a:cs typeface="メイリオ" pitchFamily="34" charset="-120"/>
                         </a:rPr>
-                        <a:t>PCI 施行医に相談</a:t>
+                        <a:t>延期が第一。PCI 施行医に相談</a:t>
                       </a:r>
                       <a:endParaRPr lang="en-US" sz="2200" dirty="0">
                         <a:latin typeface="メイリオ" charset="0"/>
@@ -7961,7 +8711,7 @@
                 <a:ea typeface="メイリオ" pitchFamily="34" charset="-122"/>
                 <a:cs typeface="メイリオ" pitchFamily="34" charset="-120"/>
               </a:rPr>
-              <a:t>区域麻酔は長く休む</a:t>
+              <a:t>区域麻酔は長く休む①</a:t>
             </a:r>
             <a:endParaRPr lang="ja-JP" sz="4400" dirty="0"/>
           </a:p>
@@ -8350,18 +9100,18 @@
         </p:nvGraphicFramePr>
         <p:xfrm>
           <a:off x="502920" y="1664208"/>
-          <a:ext cx="11183112" cy="914400"/>
+          <a:ext cx="11155680" cy="914400"/>
         </p:xfrm>
         <a:graphic>
           <a:graphicData uri="http://schemas.openxmlformats.org/drawingml/2006/table">
             <a:tbl>
               <a:tblPr/>
               <a:tblGrid>
-                <a:gridCol w="2139696"/>
-                <a:gridCol w="5710428"/>
-                <a:gridCol w="3332988"/>
+                <a:gridCol w="2660904"/>
+                <a:gridCol w="5120640"/>
+                <a:gridCol w="3374136"/>
               </a:tblGrid>
-              <a:tr h="356616">
+              <a:tr h="749808">
                 <a:tc>
                   <a:txBody>
                     <a:bodyPr/>
@@ -8369,12 +9119,12 @@
                     <a:p>
                       <a:pPr algn="l" indent="0" marL="0">
                         <a:lnSpc>
-                          <a:spcPts val="2160"/>
+                          <a:spcPts val="2640"/>
                         </a:lnSpc>
                         <a:buNone/>
                       </a:pPr>
                       <a:r>
-                        <a:rPr lang="ja-JP" altLang="en-US" sz="1800" b="1" dirty="0">
+                        <a:rPr lang="ja-JP" altLang="en-US" sz="2200" b="1" dirty="0">
                           <a:solidFill>
                             <a:srgbClr val="262626"/>
                           </a:solidFill>
@@ -8384,7 +9134,7 @@
                         </a:rPr>
                         <a:t>薬</a:t>
                       </a:r>
-                      <a:endParaRPr lang="en-US" sz="1800" dirty="0">
+                      <a:endParaRPr lang="en-US" sz="2200" dirty="0">
                         <a:latin typeface="メイリオ" charset="0"/>
                         <a:ea typeface="メイリオ" charset="0"/>
                         <a:cs typeface="メイリオ" charset="0"/>
@@ -8440,12 +9190,12 @@
                     <a:p>
                       <a:pPr algn="l" indent="0" marL="0">
                         <a:lnSpc>
-                          <a:spcPts val="2160"/>
+                          <a:spcPts val="2640"/>
                         </a:lnSpc>
                         <a:buNone/>
                       </a:pPr>
                       <a:r>
-                        <a:rPr lang="ja-JP" altLang="en-US" sz="1800" b="1" dirty="0">
+                        <a:rPr lang="ja-JP" altLang="en-US" sz="2200" b="1" dirty="0">
                           <a:solidFill>
                             <a:srgbClr val="262626"/>
                           </a:solidFill>
@@ -8453,9 +9203,33 @@
                           <a:ea typeface="メイリオ" pitchFamily="34" charset="-122"/>
                           <a:cs typeface="メイリオ" pitchFamily="34" charset="-120"/>
                         </a:rPr>
-                        <a:t>脊髄幹麻酔・深部ブロックの前（ASRA 第 5 版）</a:t>
+                        <a:t>脊髄幹麻酔・深部ブロックの前</a:t>
                       </a:r>
-                      <a:endParaRPr lang="en-US" sz="1800" dirty="0">
+                      <a:endParaRPr lang="en-US" sz="2200" dirty="0">
+                        <a:latin typeface="メイリオ" charset="0"/>
+                        <a:ea typeface="メイリオ" charset="0"/>
+                        <a:cs typeface="メイリオ" charset="0"/>
+                      </a:endParaRPr>
+                    </a:p>
+                    <a:p>
+                      <a:pPr algn="l" indent="0" marL="0">
+                        <a:lnSpc>
+                          <a:spcPts val="2640"/>
+                        </a:lnSpc>
+                        <a:buNone/>
+                      </a:pPr>
+                      <a:r>
+                        <a:rPr lang="ja-JP" altLang="en-US" sz="2200" b="1" dirty="0">
+                          <a:solidFill>
+                            <a:srgbClr val="262626"/>
+                          </a:solidFill>
+                          <a:latin typeface="メイリオ" pitchFamily="34" charset="0"/>
+                          <a:ea typeface="メイリオ" pitchFamily="34" charset="-122"/>
+                          <a:cs typeface="メイリオ" pitchFamily="34" charset="-120"/>
+                        </a:rPr>
+                        <a:t>（ASRA 第 5 版）</a:t>
+                      </a:r>
+                      <a:endParaRPr lang="en-US" sz="2200" dirty="0">
                         <a:latin typeface="メイリオ" charset="0"/>
                         <a:ea typeface="メイリオ" charset="0"/>
                         <a:cs typeface="メイリオ" charset="0"/>
@@ -8511,12 +9285,12 @@
                     <a:p>
                       <a:pPr algn="l" indent="0" marL="0">
                         <a:lnSpc>
-                          <a:spcPts val="2160"/>
+                          <a:spcPts val="2640"/>
                         </a:lnSpc>
                         <a:buNone/>
                       </a:pPr>
                       <a:r>
-                        <a:rPr lang="ja-JP" altLang="en-US" sz="1800" b="1" dirty="0">
+                        <a:rPr lang="ja-JP" altLang="en-US" sz="2200" b="1" dirty="0">
                           <a:solidFill>
                             <a:srgbClr val="262626"/>
                           </a:solidFill>
@@ -8524,9 +9298,33 @@
                           <a:ea typeface="メイリオ" pitchFamily="34" charset="-122"/>
                           <a:cs typeface="メイリオ" pitchFamily="34" charset="-120"/>
                         </a:rPr>
-                        <a:t>カテーテル抜去後の再開</a:t>
+                        <a:t>カテーテル</a:t>
                       </a:r>
-                      <a:endParaRPr lang="en-US" sz="1800" dirty="0">
+                      <a:endParaRPr lang="en-US" sz="2200" dirty="0">
+                        <a:latin typeface="メイリオ" charset="0"/>
+                        <a:ea typeface="メイリオ" charset="0"/>
+                        <a:cs typeface="メイリオ" charset="0"/>
+                      </a:endParaRPr>
+                    </a:p>
+                    <a:p>
+                      <a:pPr algn="l" indent="0" marL="0">
+                        <a:lnSpc>
+                          <a:spcPts val="2640"/>
+                        </a:lnSpc>
+                        <a:buNone/>
+                      </a:pPr>
+                      <a:r>
+                        <a:rPr lang="ja-JP" altLang="en-US" sz="2200" b="1" dirty="0">
+                          <a:solidFill>
+                            <a:srgbClr val="262626"/>
+                          </a:solidFill>
+                          <a:latin typeface="メイリオ" pitchFamily="34" charset="0"/>
+                          <a:ea typeface="メイリオ" pitchFamily="34" charset="-122"/>
+                          <a:cs typeface="メイリオ" pitchFamily="34" charset="-120"/>
+                        </a:rPr>
+                        <a:t>抜去後の再開</a:t>
+                      </a:r>
+                      <a:endParaRPr lang="en-US" sz="2200" dirty="0">
                         <a:latin typeface="メイリオ" charset="0"/>
                         <a:ea typeface="メイリオ" charset="0"/>
                         <a:cs typeface="メイリオ" charset="0"/>
@@ -8576,7 +9374,7 @@
                   </a:tcPr>
                 </a:tc>
               </a:tr>
-              <a:tr h="630936">
+              <a:tr h="749808">
                 <a:tc>
                   <a:txBody>
                     <a:bodyPr/>
@@ -8584,12 +9382,12 @@
                     <a:p>
                       <a:pPr algn="l" indent="0" marL="0">
                         <a:lnSpc>
-                          <a:spcPts val="2160"/>
+                          <a:spcPts val="2640"/>
                         </a:lnSpc>
                         <a:buNone/>
                       </a:pPr>
                       <a:r>
-                        <a:rPr lang="ja-JP" altLang="en-US" sz="1800" b="1" dirty="0">
+                        <a:rPr lang="ja-JP" altLang="en-US" sz="2200" b="1" dirty="0">
                           <a:solidFill>
                             <a:srgbClr val="262626"/>
                           </a:solidFill>
@@ -8599,7 +9397,7 @@
                         </a:rPr>
                         <a:t>ワルファリン</a:t>
                       </a:r>
-                      <a:endParaRPr lang="en-US" sz="1800" dirty="0">
+                      <a:endParaRPr lang="en-US" sz="2200" dirty="0">
                         <a:latin typeface="メイリオ" charset="0"/>
                         <a:ea typeface="メイリオ" charset="0"/>
                         <a:cs typeface="メイリオ" charset="0"/>
@@ -8652,12 +9450,12 @@
                     <a:p>
                       <a:pPr algn="l" indent="0" marL="0">
                         <a:lnSpc>
-                          <a:spcPts val="2160"/>
+                          <a:spcPts val="2640"/>
                         </a:lnSpc>
                         <a:buNone/>
                       </a:pPr>
                       <a:r>
-                        <a:rPr lang="ja-JP" altLang="en-US" sz="1800" dirty="0">
+                        <a:rPr lang="ja-JP" altLang="en-US" sz="2200" dirty="0">
                           <a:solidFill>
                             <a:srgbClr val="262626"/>
                           </a:solidFill>
@@ -8667,7 +9465,7 @@
                         </a:rPr>
                         <a:t>約 5 日。INR 正常化</a:t>
                       </a:r>
-                      <a:endParaRPr lang="en-US" sz="1800" dirty="0">
+                      <a:endParaRPr lang="en-US" sz="2200" dirty="0">
                         <a:latin typeface="メイリオ" charset="0"/>
                         <a:ea typeface="メイリオ" charset="0"/>
                         <a:cs typeface="メイリオ" charset="0"/>
@@ -8720,12 +9518,12 @@
                     <a:p>
                       <a:pPr algn="l" indent="0" marL="0">
                         <a:lnSpc>
-                          <a:spcPts val="2160"/>
+                          <a:spcPts val="2640"/>
                         </a:lnSpc>
                         <a:buNone/>
                       </a:pPr>
                       <a:r>
-                        <a:rPr lang="ja-JP" altLang="en-US" sz="1800" dirty="0">
+                        <a:rPr lang="ja-JP" altLang="en-US" sz="2200" dirty="0">
                           <a:solidFill>
                             <a:srgbClr val="262626"/>
                           </a:solidFill>
@@ -8735,7 +9533,7 @@
                         </a:rPr>
                         <a:t>抜去は INR 1.5 未満。</a:t>
                       </a:r>
-                      <a:endParaRPr lang="en-US" sz="1800" dirty="0">
+                      <a:endParaRPr lang="en-US" sz="2200" dirty="0">
                         <a:latin typeface="メイリオ" charset="0"/>
                         <a:ea typeface="メイリオ" charset="0"/>
                         <a:cs typeface="メイリオ" charset="0"/>
@@ -8744,12 +9542,12 @@
                     <a:p>
                       <a:pPr algn="l" indent="0" marL="0">
                         <a:lnSpc>
-                          <a:spcPts val="2160"/>
+                          <a:spcPts val="2640"/>
                         </a:lnSpc>
                         <a:buNone/>
                       </a:pPr>
                       <a:r>
-                        <a:rPr lang="ja-JP" altLang="en-US" sz="1800" dirty="0">
+                        <a:rPr lang="ja-JP" altLang="en-US" sz="2200" dirty="0">
                           <a:solidFill>
                             <a:srgbClr val="262626"/>
                           </a:solidFill>
@@ -8759,7 +9557,7 @@
                         </a:rPr>
                         <a:t>抜去後すぐ</a:t>
                       </a:r>
-                      <a:endParaRPr lang="en-US" sz="1800" dirty="0">
+                      <a:endParaRPr lang="en-US" sz="2200" dirty="0">
                         <a:latin typeface="メイリオ" charset="0"/>
                         <a:ea typeface="メイリオ" charset="0"/>
                         <a:cs typeface="メイリオ" charset="0"/>
@@ -8806,7 +9604,7 @@
                   </a:tcPr>
                 </a:tc>
               </a:tr>
-              <a:tr h="356616">
+              <a:tr h="411480">
                 <a:tc>
                   <a:txBody>
                     <a:bodyPr/>
@@ -8814,12 +9612,12 @@
                     <a:p>
                       <a:pPr algn="l" indent="0" marL="0">
                         <a:lnSpc>
-                          <a:spcPts val="2160"/>
+                          <a:spcPts val="2640"/>
                         </a:lnSpc>
                         <a:buNone/>
                       </a:pPr>
                       <a:r>
-                        <a:rPr lang="ja-JP" altLang="en-US" sz="1800" b="1" dirty="0">
+                        <a:rPr lang="ja-JP" altLang="en-US" sz="2200" b="1" dirty="0">
                           <a:solidFill>
                             <a:srgbClr val="262626"/>
                           </a:solidFill>
@@ -8829,7 +9627,7 @@
                         </a:rPr>
                         <a:t>抗 Xa 薬 高用量</a:t>
                       </a:r>
-                      <a:endParaRPr lang="en-US" sz="1800" dirty="0">
+                      <a:endParaRPr lang="en-US" sz="2200" dirty="0">
                         <a:latin typeface="メイリオ" charset="0"/>
                         <a:ea typeface="メイリオ" charset="0"/>
                         <a:cs typeface="メイリオ" charset="0"/>
@@ -8882,12 +9680,12 @@
                     <a:p>
                       <a:pPr algn="l" indent="0" marL="0">
                         <a:lnSpc>
-                          <a:spcPts val="2160"/>
+                          <a:spcPts val="2640"/>
                         </a:lnSpc>
                         <a:buNone/>
                       </a:pPr>
                       <a:r>
-                        <a:rPr lang="ja-JP" altLang="en-US" sz="1800" b="1" dirty="0">
+                        <a:rPr lang="ja-JP" altLang="en-US" sz="2200" b="1" dirty="0">
                           <a:solidFill>
                             <a:srgbClr val="D55E00"/>
                           </a:solidFill>
@@ -8897,7 +9695,7 @@
                         </a:rPr>
                         <a:t>72 時間以上</a:t>
                       </a:r>
-                      <a:endParaRPr lang="en-US" sz="1800" dirty="0">
+                      <a:endParaRPr lang="en-US" sz="2200" dirty="0">
                         <a:latin typeface="メイリオ" charset="0"/>
                         <a:ea typeface="メイリオ" charset="0"/>
                         <a:cs typeface="メイリオ" charset="0"/>
@@ -8950,12 +9748,12 @@
                     <a:p>
                       <a:pPr algn="l" indent="0" marL="0">
                         <a:lnSpc>
-                          <a:spcPts val="2160"/>
+                          <a:spcPts val="2640"/>
                         </a:lnSpc>
                         <a:buNone/>
                       </a:pPr>
                       <a:r>
-                        <a:rPr lang="ja-JP" altLang="en-US" sz="1800" dirty="0">
+                        <a:rPr lang="ja-JP" altLang="en-US" sz="2200" dirty="0">
                           <a:solidFill>
                             <a:srgbClr val="262626"/>
                           </a:solidFill>
@@ -8965,7 +9763,7 @@
                         </a:rPr>
                         <a:t>24 時間後</a:t>
                       </a:r>
-                      <a:endParaRPr lang="en-US" sz="1800" dirty="0">
+                      <a:endParaRPr lang="en-US" sz="2200" dirty="0">
                         <a:latin typeface="メイリオ" charset="0"/>
                         <a:ea typeface="メイリオ" charset="0"/>
                         <a:cs typeface="メイリオ" charset="0"/>
@@ -9012,7 +9810,7 @@
                   </a:tcPr>
                 </a:tc>
               </a:tr>
-              <a:tr h="630936">
+              <a:tr h="749808">
                 <a:tc>
                   <a:txBody>
                     <a:bodyPr/>
@@ -9020,12 +9818,12 @@
                     <a:p>
                       <a:pPr algn="l" indent="0" marL="0">
                         <a:lnSpc>
-                          <a:spcPts val="2160"/>
+                          <a:spcPts val="2640"/>
                         </a:lnSpc>
                         <a:buNone/>
                       </a:pPr>
                       <a:r>
-                        <a:rPr lang="ja-JP" altLang="en-US" sz="1800" b="1" dirty="0">
+                        <a:rPr lang="ja-JP" altLang="en-US" sz="2200" b="1" dirty="0">
                           <a:solidFill>
                             <a:srgbClr val="262626"/>
                           </a:solidFill>
@@ -9035,7 +9833,7 @@
                         </a:rPr>
                         <a:t>抗 Xa 薬 低用量</a:t>
                       </a:r>
-                      <a:endParaRPr lang="en-US" sz="1800" dirty="0">
+                      <a:endParaRPr lang="en-US" sz="2200" dirty="0">
                         <a:latin typeface="メイリオ" charset="0"/>
                         <a:ea typeface="メイリオ" charset="0"/>
                         <a:cs typeface="メイリオ" charset="0"/>
@@ -9044,12 +9842,12 @@
                     <a:p>
                       <a:pPr algn="l" indent="0" marL="0">
                         <a:lnSpc>
-                          <a:spcPts val="2160"/>
+                          <a:spcPts val="2640"/>
                         </a:lnSpc>
                         <a:buNone/>
                       </a:pPr>
                       <a:r>
-                        <a:rPr lang="ja-JP" altLang="en-US" sz="1800" b="1" dirty="0">
+                        <a:rPr lang="ja-JP" altLang="en-US" sz="2200" b="1" dirty="0">
                           <a:solidFill>
                             <a:srgbClr val="262626"/>
                           </a:solidFill>
@@ -9059,7 +9857,7 @@
                         </a:rPr>
                         <a:t>（VTE 予防量）</a:t>
                       </a:r>
-                      <a:endParaRPr lang="en-US" sz="1800" dirty="0">
+                      <a:endParaRPr lang="en-US" sz="2200" dirty="0">
                         <a:latin typeface="メイリオ" charset="0"/>
                         <a:ea typeface="メイリオ" charset="0"/>
                         <a:cs typeface="メイリオ" charset="0"/>
@@ -9112,12 +9910,12 @@
                     <a:p>
                       <a:pPr algn="l" indent="0" marL="0">
                         <a:lnSpc>
-                          <a:spcPts val="2160"/>
+                          <a:spcPts val="2640"/>
                         </a:lnSpc>
                         <a:buNone/>
                       </a:pPr>
                       <a:r>
-                        <a:rPr lang="ja-JP" altLang="en-US" sz="1800" dirty="0">
+                        <a:rPr lang="ja-JP" altLang="en-US" sz="2200" dirty="0">
                           <a:solidFill>
                             <a:srgbClr val="262626"/>
                           </a:solidFill>
@@ -9127,7 +9925,7 @@
                         </a:rPr>
                         <a:t>リバーロキサバン 24 時間、</a:t>
                       </a:r>
-                      <a:endParaRPr lang="en-US" sz="1800" dirty="0">
+                      <a:endParaRPr lang="en-US" sz="2200" dirty="0">
                         <a:latin typeface="メイリオ" charset="0"/>
                         <a:ea typeface="メイリオ" charset="0"/>
                         <a:cs typeface="メイリオ" charset="0"/>
@@ -9136,12 +9934,12 @@
                     <a:p>
                       <a:pPr algn="l" indent="0" marL="0">
                         <a:lnSpc>
-                          <a:spcPts val="2160"/>
+                          <a:spcPts val="2640"/>
                         </a:lnSpc>
                         <a:buNone/>
                       </a:pPr>
                       <a:r>
-                        <a:rPr lang="ja-JP" altLang="en-US" sz="1800" dirty="0">
+                        <a:rPr lang="ja-JP" altLang="en-US" sz="2200" dirty="0">
                           <a:solidFill>
                             <a:srgbClr val="262626"/>
                           </a:solidFill>
@@ -9151,7 +9949,7 @@
                         </a:rPr>
                         <a:t>アピキサバン 36 時間</a:t>
                       </a:r>
-                      <a:endParaRPr lang="en-US" sz="1800" dirty="0">
+                      <a:endParaRPr lang="en-US" sz="2200" dirty="0">
                         <a:latin typeface="メイリオ" charset="0"/>
                         <a:ea typeface="メイリオ" charset="0"/>
                         <a:cs typeface="メイリオ" charset="0"/>
@@ -9204,12 +10002,12 @@
                     <a:p>
                       <a:pPr algn="l" indent="0" marL="0">
                         <a:lnSpc>
-                          <a:spcPts val="2160"/>
+                          <a:spcPts val="2640"/>
                         </a:lnSpc>
                         <a:buNone/>
                       </a:pPr>
                       <a:r>
-                        <a:rPr lang="ja-JP" altLang="en-US" sz="1800" dirty="0">
+                        <a:rPr lang="ja-JP" altLang="en-US" sz="2200" dirty="0">
                           <a:solidFill>
                             <a:srgbClr val="262626"/>
                           </a:solidFill>
@@ -9219,7 +10017,7 @@
                         </a:rPr>
                         <a:t>6 時間後</a:t>
                       </a:r>
-                      <a:endParaRPr lang="en-US" sz="1800" dirty="0">
+                      <a:endParaRPr lang="en-US" sz="2200" dirty="0">
                         <a:latin typeface="メイリオ" charset="0"/>
                         <a:ea typeface="メイリオ" charset="0"/>
                         <a:cs typeface="メイリオ" charset="0"/>
@@ -9266,7 +10064,7 @@
                   </a:tcPr>
                 </a:tc>
               </a:tr>
-              <a:tr h="356616">
+              <a:tr h="749808">
                 <a:tc>
                   <a:txBody>
                     <a:bodyPr/>
@@ -9274,12 +10072,12 @@
                     <a:p>
                       <a:pPr algn="l" indent="0" marL="0">
                         <a:lnSpc>
-                          <a:spcPts val="2160"/>
+                          <a:spcPts val="2640"/>
                         </a:lnSpc>
                         <a:buNone/>
                       </a:pPr>
                       <a:r>
-                        <a:rPr lang="ja-JP" altLang="en-US" sz="1800" b="1" dirty="0">
+                        <a:rPr lang="ja-JP" altLang="en-US" sz="2200" b="1" dirty="0">
                           <a:solidFill>
                             <a:srgbClr val="262626"/>
                           </a:solidFill>
@@ -9289,7 +10087,7 @@
                         </a:rPr>
                         <a:t>ダビガトラン</a:t>
                       </a:r>
-                      <a:endParaRPr lang="en-US" sz="1800" dirty="0">
+                      <a:endParaRPr lang="en-US" sz="2200" dirty="0">
                         <a:latin typeface="メイリオ" charset="0"/>
                         <a:ea typeface="メイリオ" charset="0"/>
                         <a:cs typeface="メイリオ" charset="0"/>
@@ -9342,12 +10140,12 @@
                     <a:p>
                       <a:pPr algn="l" indent="0" marL="0">
                         <a:lnSpc>
-                          <a:spcPts val="2160"/>
+                          <a:spcPts val="2640"/>
                         </a:lnSpc>
                         <a:buNone/>
                       </a:pPr>
                       <a:r>
-                        <a:rPr lang="ja-JP" altLang="en-US" sz="1800" dirty="0">
+                        <a:rPr lang="ja-JP" altLang="en-US" sz="2200" dirty="0">
                           <a:solidFill>
                             <a:srgbClr val="262626"/>
                           </a:solidFill>
@@ -9355,9 +10153,33 @@
                           <a:ea typeface="メイリオ" pitchFamily="34" charset="-122"/>
                           <a:cs typeface="メイリオ" pitchFamily="34" charset="-120"/>
                         </a:rPr>
-                        <a:t>CrCl 50 以上 72 時間、30〜49 で 120 時間</a:t>
+                        <a:t>CrCl 50 以上 72 時間、</a:t>
                       </a:r>
-                      <a:endParaRPr lang="en-US" sz="1800" dirty="0">
+                      <a:endParaRPr lang="en-US" sz="2200" dirty="0">
+                        <a:latin typeface="メイリオ" charset="0"/>
+                        <a:ea typeface="メイリオ" charset="0"/>
+                        <a:cs typeface="メイリオ" charset="0"/>
+                      </a:endParaRPr>
+                    </a:p>
+                    <a:p>
+                      <a:pPr algn="l" indent="0" marL="0">
+                        <a:lnSpc>
+                          <a:spcPts val="2640"/>
+                        </a:lnSpc>
+                        <a:buNone/>
+                      </a:pPr>
+                      <a:r>
+                        <a:rPr lang="ja-JP" altLang="en-US" sz="2200" dirty="0">
+                          <a:solidFill>
+                            <a:srgbClr val="262626"/>
+                          </a:solidFill>
+                          <a:latin typeface="メイリオ" pitchFamily="34" charset="0"/>
+                          <a:ea typeface="メイリオ" pitchFamily="34" charset="-122"/>
+                          <a:cs typeface="メイリオ" pitchFamily="34" charset="-120"/>
+                        </a:rPr>
+                        <a:t>30〜49 で 120 時間</a:t>
+                      </a:r>
+                      <a:endParaRPr lang="en-US" sz="2200" dirty="0">
                         <a:latin typeface="メイリオ" charset="0"/>
                         <a:ea typeface="メイリオ" charset="0"/>
                         <a:cs typeface="メイリオ" charset="0"/>
@@ -9410,12 +10232,12 @@
                     <a:p>
                       <a:pPr algn="l" indent="0" marL="0">
                         <a:lnSpc>
-                          <a:spcPts val="2160"/>
+                          <a:spcPts val="2640"/>
                         </a:lnSpc>
                         <a:buNone/>
                       </a:pPr>
                       <a:r>
-                        <a:rPr lang="ja-JP" altLang="en-US" sz="1800" dirty="0">
+                        <a:rPr lang="ja-JP" altLang="en-US" sz="2200" dirty="0">
                           <a:solidFill>
                             <a:srgbClr val="262626"/>
                           </a:solidFill>
@@ -9423,9 +10245,33 @@
                           <a:ea typeface="メイリオ" pitchFamily="34" charset="-122"/>
                           <a:cs typeface="メイリオ" pitchFamily="34" charset="-120"/>
                         </a:rPr>
-                        <a:t>24 時間後（国内は高用量）</a:t>
+                        <a:t>24 時間後</a:t>
                       </a:r>
-                      <a:endParaRPr lang="en-US" sz="1800" dirty="0">
+                      <a:endParaRPr lang="en-US" sz="2200" dirty="0">
+                        <a:latin typeface="メイリオ" charset="0"/>
+                        <a:ea typeface="メイリオ" charset="0"/>
+                        <a:cs typeface="メイリオ" charset="0"/>
+                      </a:endParaRPr>
+                    </a:p>
+                    <a:p>
+                      <a:pPr algn="l" indent="0" marL="0">
+                        <a:lnSpc>
+                          <a:spcPts val="2640"/>
+                        </a:lnSpc>
+                        <a:buNone/>
+                      </a:pPr>
+                      <a:r>
+                        <a:rPr lang="ja-JP" altLang="en-US" sz="2200" dirty="0">
+                          <a:solidFill>
+                            <a:srgbClr val="262626"/>
+                          </a:solidFill>
+                          <a:latin typeface="メイリオ" pitchFamily="34" charset="0"/>
+                          <a:ea typeface="メイリオ" pitchFamily="34" charset="-122"/>
+                          <a:cs typeface="メイリオ" pitchFamily="34" charset="-120"/>
+                        </a:rPr>
+                        <a:t>（国内は高用量）</a:t>
+                      </a:r>
+                      <a:endParaRPr lang="en-US" sz="2200" dirty="0">
                         <a:latin typeface="メイリオ" charset="0"/>
                         <a:ea typeface="メイリオ" charset="0"/>
                         <a:cs typeface="メイリオ" charset="0"/>
@@ -9472,724 +10318,60 @@
                   </a:tcPr>
                 </a:tc>
               </a:tr>
-              <a:tr h="356616">
-                <a:tc>
-                  <a:txBody>
-                    <a:bodyPr/>
-                    <a:lstStyle/>
-                    <a:p>
-                      <a:pPr algn="l" indent="0" marL="0">
-                        <a:lnSpc>
-                          <a:spcPts val="2160"/>
-                        </a:lnSpc>
-                        <a:buNone/>
-                      </a:pPr>
-                      <a:r>
-                        <a:rPr lang="ja-JP" altLang="en-US" sz="1800" b="1" dirty="0">
-                          <a:solidFill>
-                            <a:srgbClr val="262626"/>
-                          </a:solidFill>
-                          <a:latin typeface="メイリオ" pitchFamily="34" charset="0"/>
-                          <a:ea typeface="メイリオ" pitchFamily="34" charset="-122"/>
-                          <a:cs typeface="メイリオ" pitchFamily="34" charset="-120"/>
-                        </a:rPr>
-                        <a:t>LMWH</a:t>
-                      </a:r>
-                      <a:endParaRPr lang="en-US" sz="1800" dirty="0">
-                        <a:latin typeface="メイリオ" charset="0"/>
-                        <a:ea typeface="メイリオ" charset="0"/>
-                        <a:cs typeface="メイリオ" charset="0"/>
-                      </a:endParaRPr>
-                    </a:p>
-                  </a:txBody>
-                  <a:tcPr marL="76200" marR="76200" marT="38100" marB="38100" anchor="ctr">
-                    <a:lnL w="12700" cap="flat" cmpd="sng" algn="ctr">
-                      <a:solidFill>
-                        <a:srgbClr val="BFBFBF"/>
-                      </a:solidFill>
-                      <a:prstDash val="solid"/>
-                      <a:round/>
-                      <a:headEnd type="none" w="med" len="med"/>
-                      <a:tailEnd type="none" w="med" len="med"/>
-                    </a:lnL>
-                    <a:lnR w="12700" cap="flat" cmpd="sng" algn="ctr">
-                      <a:solidFill>
-                        <a:srgbClr val="BFBFBF"/>
-                      </a:solidFill>
-                      <a:prstDash val="solid"/>
-                      <a:round/>
-                      <a:headEnd type="none" w="med" len="med"/>
-                      <a:tailEnd type="none" w="med" len="med"/>
-                    </a:lnR>
-                    <a:lnT w="12700" cap="flat" cmpd="sng" algn="ctr">
-                      <a:solidFill>
-                        <a:srgbClr val="BFBFBF"/>
-                      </a:solidFill>
-                      <a:prstDash val="solid"/>
-                      <a:round/>
-                      <a:headEnd type="none" w="med" len="med"/>
-                      <a:tailEnd type="none" w="med" len="med"/>
-                    </a:lnT>
-                    <a:lnB w="12700" cap="flat" cmpd="sng" algn="ctr">
-                      <a:solidFill>
-                        <a:srgbClr val="BFBFBF"/>
-                      </a:solidFill>
-                      <a:prstDash val="solid"/>
-                      <a:round/>
-                      <a:headEnd type="none" w="med" len="med"/>
-                      <a:tailEnd type="none" w="med" len="med"/>
-                    </a:lnB>
-                  </a:tcPr>
-                </a:tc>
-                <a:tc>
-                  <a:txBody>
-                    <a:bodyPr/>
-                    <a:lstStyle/>
-                    <a:p>
-                      <a:pPr algn="l" indent="0" marL="0">
-                        <a:lnSpc>
-                          <a:spcPts val="2160"/>
-                        </a:lnSpc>
-                        <a:buNone/>
-                      </a:pPr>
-                      <a:r>
-                        <a:rPr lang="ja-JP" altLang="en-US" sz="1800" dirty="0">
-                          <a:solidFill>
-                            <a:srgbClr val="262626"/>
-                          </a:solidFill>
-                          <a:latin typeface="メイリオ" pitchFamily="34" charset="0"/>
-                          <a:ea typeface="メイリオ" pitchFamily="34" charset="-122"/>
-                          <a:cs typeface="メイリオ" pitchFamily="34" charset="-120"/>
-                        </a:rPr>
-                        <a:t>低用量 12 時間、高用量 24 時間</a:t>
-                      </a:r>
-                      <a:endParaRPr lang="en-US" sz="1800" dirty="0">
-                        <a:latin typeface="メイリオ" charset="0"/>
-                        <a:ea typeface="メイリオ" charset="0"/>
-                        <a:cs typeface="メイリオ" charset="0"/>
-                      </a:endParaRPr>
-                    </a:p>
-                  </a:txBody>
-                  <a:tcPr marL="76200" marR="76200" marT="38100" marB="38100" anchor="ctr">
-                    <a:lnL w="12700" cap="flat" cmpd="sng" algn="ctr">
-                      <a:solidFill>
-                        <a:srgbClr val="BFBFBF"/>
-                      </a:solidFill>
-                      <a:prstDash val="solid"/>
-                      <a:round/>
-                      <a:headEnd type="none" w="med" len="med"/>
-                      <a:tailEnd type="none" w="med" len="med"/>
-                    </a:lnL>
-                    <a:lnR w="12700" cap="flat" cmpd="sng" algn="ctr">
-                      <a:solidFill>
-                        <a:srgbClr val="BFBFBF"/>
-                      </a:solidFill>
-                      <a:prstDash val="solid"/>
-                      <a:round/>
-                      <a:headEnd type="none" w="med" len="med"/>
-                      <a:tailEnd type="none" w="med" len="med"/>
-                    </a:lnR>
-                    <a:lnT w="12700" cap="flat" cmpd="sng" algn="ctr">
-                      <a:solidFill>
-                        <a:srgbClr val="BFBFBF"/>
-                      </a:solidFill>
-                      <a:prstDash val="solid"/>
-                      <a:round/>
-                      <a:headEnd type="none" w="med" len="med"/>
-                      <a:tailEnd type="none" w="med" len="med"/>
-                    </a:lnT>
-                    <a:lnB w="12700" cap="flat" cmpd="sng" algn="ctr">
-                      <a:solidFill>
-                        <a:srgbClr val="BFBFBF"/>
-                      </a:solidFill>
-                      <a:prstDash val="solid"/>
-                      <a:round/>
-                      <a:headEnd type="none" w="med" len="med"/>
-                      <a:tailEnd type="none" w="med" len="med"/>
-                    </a:lnB>
-                  </a:tcPr>
-                </a:tc>
-                <a:tc>
-                  <a:txBody>
-                    <a:bodyPr/>
-                    <a:lstStyle/>
-                    <a:p>
-                      <a:pPr algn="l" indent="0" marL="0">
-                        <a:lnSpc>
-                          <a:spcPts val="2160"/>
-                        </a:lnSpc>
-                        <a:buNone/>
-                      </a:pPr>
-                      <a:r>
-                        <a:rPr lang="ja-JP" altLang="en-US" sz="1800" dirty="0">
-                          <a:solidFill>
-                            <a:srgbClr val="262626"/>
-                          </a:solidFill>
-                          <a:latin typeface="メイリオ" pitchFamily="34" charset="0"/>
-                          <a:ea typeface="メイリオ" pitchFamily="34" charset="-122"/>
-                          <a:cs typeface="メイリオ" pitchFamily="34" charset="-120"/>
-                        </a:rPr>
-                        <a:t>4 時間後</a:t>
-                      </a:r>
-                      <a:endParaRPr lang="en-US" sz="1800" dirty="0">
-                        <a:latin typeface="メイリオ" charset="0"/>
-                        <a:ea typeface="メイリオ" charset="0"/>
-                        <a:cs typeface="メイリオ" charset="0"/>
-                      </a:endParaRPr>
-                    </a:p>
-                  </a:txBody>
-                  <a:tcPr marL="76200" marR="76200" marT="38100" marB="38100" anchor="ctr">
-                    <a:lnL w="12700" cap="flat" cmpd="sng" algn="ctr">
-                      <a:solidFill>
-                        <a:srgbClr val="BFBFBF"/>
-                      </a:solidFill>
-                      <a:prstDash val="solid"/>
-                      <a:round/>
-                      <a:headEnd type="none" w="med" len="med"/>
-                      <a:tailEnd type="none" w="med" len="med"/>
-                    </a:lnL>
-                    <a:lnR w="12700" cap="flat" cmpd="sng" algn="ctr">
-                      <a:solidFill>
-                        <a:srgbClr val="BFBFBF"/>
-                      </a:solidFill>
-                      <a:prstDash val="solid"/>
-                      <a:round/>
-                      <a:headEnd type="none" w="med" len="med"/>
-                      <a:tailEnd type="none" w="med" len="med"/>
-                    </a:lnR>
-                    <a:lnT w="12700" cap="flat" cmpd="sng" algn="ctr">
-                      <a:solidFill>
-                        <a:srgbClr val="BFBFBF"/>
-                      </a:solidFill>
-                      <a:prstDash val="solid"/>
-                      <a:round/>
-                      <a:headEnd type="none" w="med" len="med"/>
-                      <a:tailEnd type="none" w="med" len="med"/>
-                    </a:lnT>
-                    <a:lnB w="12700" cap="flat" cmpd="sng" algn="ctr">
-                      <a:solidFill>
-                        <a:srgbClr val="BFBFBF"/>
-                      </a:solidFill>
-                      <a:prstDash val="solid"/>
-                      <a:round/>
-                      <a:headEnd type="none" w="med" len="med"/>
-                      <a:tailEnd type="none" w="med" len="med"/>
-                    </a:lnB>
-                  </a:tcPr>
-                </a:tc>
-              </a:tr>
-              <a:tr h="630936">
-                <a:tc>
-                  <a:txBody>
-                    <a:bodyPr/>
-                    <a:lstStyle/>
-                    <a:p>
-                      <a:pPr algn="l" indent="0" marL="0">
-                        <a:lnSpc>
-                          <a:spcPts val="2160"/>
-                        </a:lnSpc>
-                        <a:buNone/>
-                      </a:pPr>
-                      <a:r>
-                        <a:rPr lang="ja-JP" altLang="en-US" sz="1800" b="1" dirty="0">
-                          <a:solidFill>
-                            <a:srgbClr val="262626"/>
-                          </a:solidFill>
-                          <a:latin typeface="メイリオ" pitchFamily="34" charset="0"/>
-                          <a:ea typeface="メイリオ" pitchFamily="34" charset="-122"/>
-                          <a:cs typeface="メイリオ" pitchFamily="34" charset="-120"/>
-                        </a:rPr>
-                        <a:t>未分画ヘパリン</a:t>
-                      </a:r>
-                      <a:endParaRPr lang="en-US" sz="1800" dirty="0">
-                        <a:latin typeface="メイリオ" charset="0"/>
-                        <a:ea typeface="メイリオ" charset="0"/>
-                        <a:cs typeface="メイリオ" charset="0"/>
-                      </a:endParaRPr>
-                    </a:p>
-                  </a:txBody>
-                  <a:tcPr marL="76200" marR="76200" marT="38100" marB="38100" anchor="ctr">
-                    <a:lnL w="12700" cap="flat" cmpd="sng" algn="ctr">
-                      <a:solidFill>
-                        <a:srgbClr val="BFBFBF"/>
-                      </a:solidFill>
-                      <a:prstDash val="solid"/>
-                      <a:round/>
-                      <a:headEnd type="none" w="med" len="med"/>
-                      <a:tailEnd type="none" w="med" len="med"/>
-                    </a:lnL>
-                    <a:lnR w="12700" cap="flat" cmpd="sng" algn="ctr">
-                      <a:solidFill>
-                        <a:srgbClr val="BFBFBF"/>
-                      </a:solidFill>
-                      <a:prstDash val="solid"/>
-                      <a:round/>
-                      <a:headEnd type="none" w="med" len="med"/>
-                      <a:tailEnd type="none" w="med" len="med"/>
-                    </a:lnR>
-                    <a:lnT w="12700" cap="flat" cmpd="sng" algn="ctr">
-                      <a:solidFill>
-                        <a:srgbClr val="BFBFBF"/>
-                      </a:solidFill>
-                      <a:prstDash val="solid"/>
-                      <a:round/>
-                      <a:headEnd type="none" w="med" len="med"/>
-                      <a:tailEnd type="none" w="med" len="med"/>
-                    </a:lnT>
-                    <a:lnB w="12700" cap="flat" cmpd="sng" algn="ctr">
-                      <a:solidFill>
-                        <a:srgbClr val="BFBFBF"/>
-                      </a:solidFill>
-                      <a:prstDash val="solid"/>
-                      <a:round/>
-                      <a:headEnd type="none" w="med" len="med"/>
-                      <a:tailEnd type="none" w="med" len="med"/>
-                    </a:lnB>
-                  </a:tcPr>
-                </a:tc>
-                <a:tc>
-                  <a:txBody>
-                    <a:bodyPr/>
-                    <a:lstStyle/>
-                    <a:p>
-                      <a:pPr algn="l" indent="0" marL="0">
-                        <a:lnSpc>
-                          <a:spcPts val="2160"/>
-                        </a:lnSpc>
-                        <a:buNone/>
-                      </a:pPr>
-                      <a:r>
-                        <a:rPr lang="ja-JP" altLang="en-US" sz="1800" dirty="0">
-                          <a:solidFill>
-                            <a:srgbClr val="262626"/>
-                          </a:solidFill>
-                          <a:latin typeface="メイリオ" pitchFamily="34" charset="0"/>
-                          <a:ea typeface="メイリオ" pitchFamily="34" charset="-122"/>
-                          <a:cs typeface="メイリオ" pitchFamily="34" charset="-120"/>
-                        </a:rPr>
-                        <a:t>皮下 低用量 4〜6 時間、高用量 12〜24 時間。</a:t>
-                      </a:r>
-                      <a:endParaRPr lang="en-US" sz="1800" dirty="0">
-                        <a:latin typeface="メイリオ" charset="0"/>
-                        <a:ea typeface="メイリオ" charset="0"/>
-                        <a:cs typeface="メイリオ" charset="0"/>
-                      </a:endParaRPr>
-                    </a:p>
-                    <a:p>
-                      <a:pPr algn="l" indent="0" marL="0">
-                        <a:lnSpc>
-                          <a:spcPts val="2160"/>
-                        </a:lnSpc>
-                        <a:buNone/>
-                      </a:pPr>
-                      <a:r>
-                        <a:rPr lang="ja-JP" altLang="en-US" sz="1800" dirty="0">
-                          <a:solidFill>
-                            <a:srgbClr val="262626"/>
-                          </a:solidFill>
-                          <a:latin typeface="メイリオ" pitchFamily="34" charset="0"/>
-                          <a:ea typeface="メイリオ" pitchFamily="34" charset="-122"/>
-                          <a:cs typeface="メイリオ" pitchFamily="34" charset="-120"/>
-                        </a:rPr>
-                        <a:t>静注 4〜6 時間＋aPTT 正常</a:t>
-                      </a:r>
-                      <a:endParaRPr lang="en-US" sz="1800" dirty="0">
-                        <a:latin typeface="メイリオ" charset="0"/>
-                        <a:ea typeface="メイリオ" charset="0"/>
-                        <a:cs typeface="メイリオ" charset="0"/>
-                      </a:endParaRPr>
-                    </a:p>
-                  </a:txBody>
-                  <a:tcPr marL="76200" marR="76200" marT="38100" marB="38100" anchor="ctr">
-                    <a:lnL w="12700" cap="flat" cmpd="sng" algn="ctr">
-                      <a:solidFill>
-                        <a:srgbClr val="BFBFBF"/>
-                      </a:solidFill>
-                      <a:prstDash val="solid"/>
-                      <a:round/>
-                      <a:headEnd type="none" w="med" len="med"/>
-                      <a:tailEnd type="none" w="med" len="med"/>
-                    </a:lnL>
-                    <a:lnR w="12700" cap="flat" cmpd="sng" algn="ctr">
-                      <a:solidFill>
-                        <a:srgbClr val="BFBFBF"/>
-                      </a:solidFill>
-                      <a:prstDash val="solid"/>
-                      <a:round/>
-                      <a:headEnd type="none" w="med" len="med"/>
-                      <a:tailEnd type="none" w="med" len="med"/>
-                    </a:lnR>
-                    <a:lnT w="12700" cap="flat" cmpd="sng" algn="ctr">
-                      <a:solidFill>
-                        <a:srgbClr val="BFBFBF"/>
-                      </a:solidFill>
-                      <a:prstDash val="solid"/>
-                      <a:round/>
-                      <a:headEnd type="none" w="med" len="med"/>
-                      <a:tailEnd type="none" w="med" len="med"/>
-                    </a:lnT>
-                    <a:lnB w="12700" cap="flat" cmpd="sng" algn="ctr">
-                      <a:solidFill>
-                        <a:srgbClr val="BFBFBF"/>
-                      </a:solidFill>
-                      <a:prstDash val="solid"/>
-                      <a:round/>
-                      <a:headEnd type="none" w="med" len="med"/>
-                      <a:tailEnd type="none" w="med" len="med"/>
-                    </a:lnB>
-                  </a:tcPr>
-                </a:tc>
-                <a:tc>
-                  <a:txBody>
-                    <a:bodyPr/>
-                    <a:lstStyle/>
-                    <a:p>
-                      <a:pPr algn="l" indent="0" marL="0">
-                        <a:lnSpc>
-                          <a:spcPts val="2160"/>
-                        </a:lnSpc>
-                        <a:buNone/>
-                      </a:pPr>
-                      <a:r>
-                        <a:rPr lang="ja-JP" altLang="en-US" sz="1800" dirty="0">
-                          <a:solidFill>
-                            <a:srgbClr val="262626"/>
-                          </a:solidFill>
-                          <a:latin typeface="メイリオ" pitchFamily="34" charset="0"/>
-                          <a:ea typeface="メイリオ" pitchFamily="34" charset="-122"/>
-                          <a:cs typeface="メイリオ" pitchFamily="34" charset="-120"/>
-                        </a:rPr>
-                        <a:t>1 時間後</a:t>
-                      </a:r>
-                      <a:endParaRPr lang="en-US" sz="1800" dirty="0">
-                        <a:latin typeface="メイリオ" charset="0"/>
-                        <a:ea typeface="メイリオ" charset="0"/>
-                        <a:cs typeface="メイリオ" charset="0"/>
-                      </a:endParaRPr>
-                    </a:p>
-                  </a:txBody>
-                  <a:tcPr marL="76200" marR="76200" marT="38100" marB="38100" anchor="ctr">
-                    <a:lnL w="12700" cap="flat" cmpd="sng" algn="ctr">
-                      <a:solidFill>
-                        <a:srgbClr val="BFBFBF"/>
-                      </a:solidFill>
-                      <a:prstDash val="solid"/>
-                      <a:round/>
-                      <a:headEnd type="none" w="med" len="med"/>
-                      <a:tailEnd type="none" w="med" len="med"/>
-                    </a:lnL>
-                    <a:lnR w="12700" cap="flat" cmpd="sng" algn="ctr">
-                      <a:solidFill>
-                        <a:srgbClr val="BFBFBF"/>
-                      </a:solidFill>
-                      <a:prstDash val="solid"/>
-                      <a:round/>
-                      <a:headEnd type="none" w="med" len="med"/>
-                      <a:tailEnd type="none" w="med" len="med"/>
-                    </a:lnR>
-                    <a:lnT w="12700" cap="flat" cmpd="sng" algn="ctr">
-                      <a:solidFill>
-                        <a:srgbClr val="BFBFBF"/>
-                      </a:solidFill>
-                      <a:prstDash val="solid"/>
-                      <a:round/>
-                      <a:headEnd type="none" w="med" len="med"/>
-                      <a:tailEnd type="none" w="med" len="med"/>
-                    </a:lnT>
-                    <a:lnB w="12700" cap="flat" cmpd="sng" algn="ctr">
-                      <a:solidFill>
-                        <a:srgbClr val="BFBFBF"/>
-                      </a:solidFill>
-                      <a:prstDash val="solid"/>
-                      <a:round/>
-                      <a:headEnd type="none" w="med" len="med"/>
-                      <a:tailEnd type="none" w="med" len="med"/>
-                    </a:lnB>
-                  </a:tcPr>
-                </a:tc>
-              </a:tr>
-              <a:tr h="905256">
-                <a:tc>
-                  <a:txBody>
-                    <a:bodyPr/>
-                    <a:lstStyle/>
-                    <a:p>
-                      <a:pPr algn="l" indent="0" marL="0">
-                        <a:lnSpc>
-                          <a:spcPts val="2160"/>
-                        </a:lnSpc>
-                        <a:buNone/>
-                      </a:pPr>
-                      <a:r>
-                        <a:rPr lang="ja-JP" altLang="en-US" sz="1800" b="1" dirty="0">
-                          <a:solidFill>
-                            <a:srgbClr val="262626"/>
-                          </a:solidFill>
-                          <a:latin typeface="メイリオ" pitchFamily="34" charset="0"/>
-                          <a:ea typeface="メイリオ" pitchFamily="34" charset="-122"/>
-                          <a:cs typeface="メイリオ" pitchFamily="34" charset="-120"/>
-                        </a:rPr>
-                        <a:t>抗血小板薬</a:t>
-                      </a:r>
-                      <a:endParaRPr lang="en-US" sz="1800" dirty="0">
-                        <a:latin typeface="メイリオ" charset="0"/>
-                        <a:ea typeface="メイリオ" charset="0"/>
-                        <a:cs typeface="メイリオ" charset="0"/>
-                      </a:endParaRPr>
-                    </a:p>
-                  </a:txBody>
-                  <a:tcPr marL="76200" marR="76200" marT="38100" marB="38100" anchor="ctr">
-                    <a:lnL w="12700" cap="flat" cmpd="sng" algn="ctr">
-                      <a:solidFill>
-                        <a:srgbClr val="BFBFBF"/>
-                      </a:solidFill>
-                      <a:prstDash val="solid"/>
-                      <a:round/>
-                      <a:headEnd type="none" w="med" len="med"/>
-                      <a:tailEnd type="none" w="med" len="med"/>
-                    </a:lnL>
-                    <a:lnR w="12700" cap="flat" cmpd="sng" algn="ctr">
-                      <a:solidFill>
-                        <a:srgbClr val="BFBFBF"/>
-                      </a:solidFill>
-                      <a:prstDash val="solid"/>
-                      <a:round/>
-                      <a:headEnd type="none" w="med" len="med"/>
-                      <a:tailEnd type="none" w="med" len="med"/>
-                    </a:lnR>
-                    <a:lnT w="12700" cap="flat" cmpd="sng" algn="ctr">
-                      <a:solidFill>
-                        <a:srgbClr val="BFBFBF"/>
-                      </a:solidFill>
-                      <a:prstDash val="solid"/>
-                      <a:round/>
-                      <a:headEnd type="none" w="med" len="med"/>
-                      <a:tailEnd type="none" w="med" len="med"/>
-                    </a:lnT>
-                    <a:lnB w="12700" cap="flat" cmpd="sng" algn="ctr">
-                      <a:solidFill>
-                        <a:srgbClr val="BFBFBF"/>
-                      </a:solidFill>
-                      <a:prstDash val="solid"/>
-                      <a:round/>
-                      <a:headEnd type="none" w="med" len="med"/>
-                      <a:tailEnd type="none" w="med" len="med"/>
-                    </a:lnB>
-                  </a:tcPr>
-                </a:tc>
-                <a:tc>
-                  <a:txBody>
-                    <a:bodyPr/>
-                    <a:lstStyle/>
-                    <a:p>
-                      <a:pPr algn="l" indent="0" marL="0">
-                        <a:lnSpc>
-                          <a:spcPts val="2160"/>
-                        </a:lnSpc>
-                        <a:buNone/>
-                      </a:pPr>
-                      <a:r>
-                        <a:rPr lang="ja-JP" altLang="en-US" sz="1800" dirty="0">
-                          <a:solidFill>
-                            <a:srgbClr val="262626"/>
-                          </a:solidFill>
-                          <a:latin typeface="メイリオ" pitchFamily="34" charset="0"/>
-                          <a:ea typeface="メイリオ" pitchFamily="34" charset="-122"/>
-                          <a:cs typeface="メイリオ" pitchFamily="34" charset="-120"/>
-                        </a:rPr>
-                        <a:t>アスピリン・NSAIDs は不要。</a:t>
-                      </a:r>
-                      <a:endParaRPr lang="en-US" sz="1800" dirty="0">
-                        <a:latin typeface="メイリオ" charset="0"/>
-                        <a:ea typeface="メイリオ" charset="0"/>
-                        <a:cs typeface="メイリオ" charset="0"/>
-                      </a:endParaRPr>
-                    </a:p>
-                    <a:p>
-                      <a:pPr algn="l" indent="0" marL="0">
-                        <a:lnSpc>
-                          <a:spcPts val="2160"/>
-                        </a:lnSpc>
-                        <a:buNone/>
-                      </a:pPr>
-                      <a:r>
-                        <a:rPr lang="ja-JP" altLang="en-US" sz="1800" dirty="0">
-                          <a:solidFill>
-                            <a:srgbClr val="262626"/>
-                          </a:solidFill>
-                          <a:latin typeface="メイリオ" pitchFamily="34" charset="0"/>
-                          <a:ea typeface="メイリオ" pitchFamily="34" charset="-122"/>
-                          <a:cs typeface="メイリオ" pitchFamily="34" charset="-120"/>
-                        </a:rPr>
-                        <a:t>クロピドグレル 5〜7 日、チカグレロル 5 日、</a:t>
-                      </a:r>
-                      <a:endParaRPr lang="en-US" sz="1800" dirty="0">
-                        <a:latin typeface="メイリオ" charset="0"/>
-                        <a:ea typeface="メイリオ" charset="0"/>
-                        <a:cs typeface="メイリオ" charset="0"/>
-                      </a:endParaRPr>
-                    </a:p>
-                    <a:p>
-                      <a:pPr algn="l" indent="0" marL="0">
-                        <a:lnSpc>
-                          <a:spcPts val="2160"/>
-                        </a:lnSpc>
-                        <a:buNone/>
-                      </a:pPr>
-                      <a:r>
-                        <a:rPr lang="ja-JP" altLang="en-US" sz="1800" dirty="0">
-                          <a:solidFill>
-                            <a:srgbClr val="262626"/>
-                          </a:solidFill>
-                          <a:latin typeface="メイリオ" pitchFamily="34" charset="0"/>
-                          <a:ea typeface="メイリオ" pitchFamily="34" charset="-122"/>
-                          <a:cs typeface="メイリオ" pitchFamily="34" charset="-120"/>
-                        </a:rPr>
-                        <a:t>プラスグレル 7〜10 日</a:t>
-                      </a:r>
-                      <a:endParaRPr lang="en-US" sz="1800" dirty="0">
-                        <a:latin typeface="メイリオ" charset="0"/>
-                        <a:ea typeface="メイリオ" charset="0"/>
-                        <a:cs typeface="メイリオ" charset="0"/>
-                      </a:endParaRPr>
-                    </a:p>
-                  </a:txBody>
-                  <a:tcPr marL="76200" marR="76200" marT="38100" marB="38100" anchor="ctr">
-                    <a:lnL w="12700" cap="flat" cmpd="sng" algn="ctr">
-                      <a:solidFill>
-                        <a:srgbClr val="BFBFBF"/>
-                      </a:solidFill>
-                      <a:prstDash val="solid"/>
-                      <a:round/>
-                      <a:headEnd type="none" w="med" len="med"/>
-                      <a:tailEnd type="none" w="med" len="med"/>
-                    </a:lnL>
-                    <a:lnR w="12700" cap="flat" cmpd="sng" algn="ctr">
-                      <a:solidFill>
-                        <a:srgbClr val="BFBFBF"/>
-                      </a:solidFill>
-                      <a:prstDash val="solid"/>
-                      <a:round/>
-                      <a:headEnd type="none" w="med" len="med"/>
-                      <a:tailEnd type="none" w="med" len="med"/>
-                    </a:lnR>
-                    <a:lnT w="12700" cap="flat" cmpd="sng" algn="ctr">
-                      <a:solidFill>
-                        <a:srgbClr val="BFBFBF"/>
-                      </a:solidFill>
-                      <a:prstDash val="solid"/>
-                      <a:round/>
-                      <a:headEnd type="none" w="med" len="med"/>
-                      <a:tailEnd type="none" w="med" len="med"/>
-                    </a:lnT>
-                    <a:lnB w="12700" cap="flat" cmpd="sng" algn="ctr">
-                      <a:solidFill>
-                        <a:srgbClr val="BFBFBF"/>
-                      </a:solidFill>
-                      <a:prstDash val="solid"/>
-                      <a:round/>
-                      <a:headEnd type="none" w="med" len="med"/>
-                      <a:tailEnd type="none" w="med" len="med"/>
-                    </a:lnB>
-                  </a:tcPr>
-                </a:tc>
-                <a:tc>
-                  <a:txBody>
-                    <a:bodyPr/>
-                    <a:lstStyle/>
-                    <a:p>
-                      <a:pPr algn="l" indent="0" marL="0">
-                        <a:lnSpc>
-                          <a:spcPts val="2160"/>
-                        </a:lnSpc>
-                        <a:buNone/>
-                      </a:pPr>
-                      <a:r>
-                        <a:rPr lang="ja-JP" altLang="en-US" sz="1800" dirty="0">
-                          <a:solidFill>
-                            <a:srgbClr val="262626"/>
-                          </a:solidFill>
-                          <a:latin typeface="メイリオ" pitchFamily="34" charset="0"/>
-                          <a:ea typeface="メイリオ" pitchFamily="34" charset="-122"/>
-                          <a:cs typeface="メイリオ" pitchFamily="34" charset="-120"/>
-                        </a:rPr>
-                        <a:t>負荷なし：すぐ、</a:t>
-                      </a:r>
-                      <a:endParaRPr lang="en-US" sz="1800" dirty="0">
-                        <a:latin typeface="メイリオ" charset="0"/>
-                        <a:ea typeface="メイリオ" charset="0"/>
-                        <a:cs typeface="メイリオ" charset="0"/>
-                      </a:endParaRPr>
-                    </a:p>
-                    <a:p>
-                      <a:pPr algn="l" indent="0" marL="0">
-                        <a:lnSpc>
-                          <a:spcPts val="2160"/>
-                        </a:lnSpc>
-                        <a:buNone/>
-                      </a:pPr>
-                      <a:r>
-                        <a:rPr lang="ja-JP" altLang="en-US" sz="1800" dirty="0">
-                          <a:solidFill>
-                            <a:srgbClr val="262626"/>
-                          </a:solidFill>
-                          <a:latin typeface="メイリオ" pitchFamily="34" charset="0"/>
-                          <a:ea typeface="メイリオ" pitchFamily="34" charset="-122"/>
-                          <a:cs typeface="メイリオ" pitchFamily="34" charset="-120"/>
-                        </a:rPr>
-                        <a:t>負荷あり：6 時間後</a:t>
-                      </a:r>
-                      <a:endParaRPr lang="en-US" sz="1800" dirty="0">
-                        <a:latin typeface="メイリオ" charset="0"/>
-                        <a:ea typeface="メイリオ" charset="0"/>
-                        <a:cs typeface="メイリオ" charset="0"/>
-                      </a:endParaRPr>
-                    </a:p>
-                  </a:txBody>
-                  <a:tcPr marL="76200" marR="76200" marT="38100" marB="38100" anchor="ctr">
-                    <a:lnL w="12700" cap="flat" cmpd="sng" algn="ctr">
-                      <a:solidFill>
-                        <a:srgbClr val="BFBFBF"/>
-                      </a:solidFill>
-                      <a:prstDash val="solid"/>
-                      <a:round/>
-                      <a:headEnd type="none" w="med" len="med"/>
-                      <a:tailEnd type="none" w="med" len="med"/>
-                    </a:lnL>
-                    <a:lnR w="12700" cap="flat" cmpd="sng" algn="ctr">
-                      <a:solidFill>
-                        <a:srgbClr val="BFBFBF"/>
-                      </a:solidFill>
-                      <a:prstDash val="solid"/>
-                      <a:round/>
-                      <a:headEnd type="none" w="med" len="med"/>
-                      <a:tailEnd type="none" w="med" len="med"/>
-                    </a:lnR>
-                    <a:lnT w="12700" cap="flat" cmpd="sng" algn="ctr">
-                      <a:solidFill>
-                        <a:srgbClr val="BFBFBF"/>
-                      </a:solidFill>
-                      <a:prstDash val="solid"/>
-                      <a:round/>
-                      <a:headEnd type="none" w="med" len="med"/>
-                      <a:tailEnd type="none" w="med" len="med"/>
-                    </a:lnT>
-                    <a:lnB w="12700" cap="flat" cmpd="sng" algn="ctr">
-                      <a:solidFill>
-                        <a:srgbClr val="BFBFBF"/>
-                      </a:solidFill>
-                      <a:prstDash val="solid"/>
-                      <a:round/>
-                      <a:headEnd type="none" w="med" len="med"/>
-                      <a:tailEnd type="none" w="med" len="med"/>
-                    </a:lnB>
-                  </a:tcPr>
-                </a:tc>
-              </a:tr>
             </a:tbl>
           </a:graphicData>
         </a:graphic>
       </p:graphicFrame>
+      <p:sp>
+        <p:nvSpPr>
+          <p:cNvPr id="12" name="Text 9"/>
+          <p:cNvSpPr txBox="1"/>
+          <p:nvPr/>
+        </p:nvSpPr>
+        <p:spPr>
+          <a:xfrm>
+            <a:off x="502920" y="5362956"/>
+            <a:ext cx="11183112" cy="457200"/>
+          </a:xfrm>
+          <a:prstGeom prst="rect">
+            <a:avLst/>
+          </a:prstGeom>
+          <a:noFill/>
+          <a:ln/>
+        </p:spPr>
+        <p:txBody>
+          <a:bodyPr wrap="square" lIns="0" tIns="0" rIns="0" bIns="0" rtlCol="0" anchor="t"/>
+          <a:lstStyle/>
+          <a:p>
+            <a:pPr algn="l" indent="0" marL="0">
+              <a:buNone/>
+            </a:pPr>
+            <a:r>
+              <a:rPr lang="ja-JP" altLang="en-US" sz="2400" dirty="0">
+                <a:solidFill>
+                  <a:srgbClr val="262626"/>
+                </a:solidFill>
+                <a:latin typeface="メイリオ" pitchFamily="34" charset="0"/>
+                <a:ea typeface="メイリオ" pitchFamily="34" charset="-122"/>
+                <a:cs typeface="メイリオ" pitchFamily="34" charset="-120"/>
+              </a:rPr>
+              <a:t>低用量＝VTE 予防量。心房細動の減量用量は</a:t>
+            </a:r>
+            <a:r>
+              <a:rPr lang="ja-JP" altLang="en-US" sz="2400" b="1" dirty="0">
+                <a:solidFill>
+                  <a:srgbClr val="D55E00"/>
+                </a:solidFill>
+                <a:latin typeface="メイリオ" pitchFamily="34" charset="0"/>
+                <a:ea typeface="メイリオ" pitchFamily="34" charset="-122"/>
+                <a:cs typeface="メイリオ" pitchFamily="34" charset="-120"/>
+              </a:rPr>
+              <a:t>高用量として扱う</a:t>
+            </a:r>
+            <a:endParaRPr lang="ja-JP" sz="2400" dirty="0"/>
+          </a:p>
+        </p:txBody>
+      </p:sp>
     </p:spTree>
   </p:cSld>
   <p:clrMapOvr>
@@ -10257,7 +10439,7 @@
                 <a:ea typeface="メイリオ" pitchFamily="34" charset="-122"/>
                 <a:cs typeface="メイリオ" pitchFamily="34" charset="-120"/>
               </a:rPr>
-              <a:t>相談先と緊急時</a:t>
+              <a:t>区域麻酔は長く休む②</a:t>
             </a:r>
             <a:endParaRPr lang="ja-JP" sz="4400" dirty="0"/>
           </a:p>
@@ -10607,7 +10789,7 @@
                 <a:ea typeface="メイリオ" pitchFamily="34" charset="-122"/>
                 <a:cs typeface="メイリオ" pitchFamily="34" charset="-120"/>
               </a:rPr>
-              <a:t>日本循環器学会／日本不整脈心電学会 2020 年改訂版 不整脈薬物治療ガイドライン</a:t>
+              <a:t>Kopp SL, et al. Reg Anesth Pain Med 2025 / 日本ペインクリニック学会・日本麻酔科学会・</a:t>
             </a:r>
             <a:endParaRPr lang="ja-JP" sz="1600" dirty="0"/>
           </a:p>
@@ -10624,113 +10806,1078 @@
                 <a:ea typeface="メイリオ" pitchFamily="34" charset="-122"/>
                 <a:cs typeface="メイリオ" pitchFamily="34" charset="-120"/>
               </a:rPr>
-              <a:t>Douketis JD, et al. Chest 2022;162:e207-e243/Iwasaki YK, et al. Circ J 2025;89:1012-1073</a:t>
+              <a:t>日本区域麻酔学会「抗血栓療法中の区域麻酔・神経ブロックガイドライン 改訂第 2 版」（2026）</a:t>
             </a:r>
             <a:endParaRPr lang="ja-JP" sz="1600" dirty="0"/>
           </a:p>
         </p:txBody>
       </p:sp>
-      <p:sp>
-        <p:nvSpPr>
-          <p:cNvPr id="11" name="Text 9"/>
-          <p:cNvSpPr/>
-          <p:nvPr/>
-        </p:nvSpPr>
-        <p:spPr>
-          <a:xfrm>
-            <a:off x="502920" y="5285232"/>
-            <a:ext cx="11183112" cy="603504"/>
-          </a:xfrm>
-          <a:prstGeom prst="roundRect">
-            <a:avLst>
-              <a:gd name="adj" fmla="val 15152"/>
-            </a:avLst>
-          </a:prstGeom>
-          <a:solidFill>
-            <a:srgbClr val="FFFFFF"/>
-          </a:solidFill>
-          <a:ln w="44450">
-            <a:solidFill>
-              <a:srgbClr val="00A8AA"/>
-            </a:solidFill>
-          </a:ln>
-        </p:spPr>
-        <p:txBody>
-          <a:bodyPr wrap="square" lIns="73152" tIns="73152" rIns="73152" bIns="73152" rtlCol="0" anchor="ctr"/>
-          <a:lstStyle/>
-          <a:p>
-            <a:pPr algn="ctr" indent="0" marL="0">
-              <a:buNone/>
-            </a:pPr>
-            <a:r>
-              <a:rPr lang="ja-JP" altLang="en-US" sz="2400" b="1" dirty="0">
-                <a:solidFill>
-                  <a:srgbClr val="262626"/>
-                </a:solidFill>
-                <a:latin typeface="メイリオ" pitchFamily="34" charset="0"/>
-                <a:ea typeface="メイリオ" pitchFamily="34" charset="-122"/>
-                <a:cs typeface="メイリオ" pitchFamily="34" charset="-120"/>
-              </a:rPr>
-              <a:t>休薬・再開の判断と相談した相手を</a:t>
-            </a:r>
-            <a:r>
-              <a:rPr lang="ja-JP" altLang="en-US" sz="2400" b="1" dirty="0">
-                <a:solidFill>
-                  <a:srgbClr val="D55E00"/>
-                </a:solidFill>
-                <a:latin typeface="メイリオ" pitchFamily="34" charset="0"/>
-                <a:ea typeface="メイリオ" pitchFamily="34" charset="-122"/>
-                <a:cs typeface="メイリオ" pitchFamily="34" charset="-120"/>
-              </a:rPr>
-              <a:t>記録に残し</a:t>
-            </a:r>
-            <a:r>
-              <a:rPr lang="ja-JP" altLang="en-US" sz="2400" b="1" dirty="0">
-                <a:solidFill>
-                  <a:srgbClr val="262626"/>
-                </a:solidFill>
-                <a:latin typeface="メイリオ" pitchFamily="34" charset="0"/>
-                <a:ea typeface="メイリオ" pitchFamily="34" charset="-122"/>
-                <a:cs typeface="メイリオ" pitchFamily="34" charset="-120"/>
-              </a:rPr>
-              <a:t>、患者にも説明する</a:t>
-            </a:r>
-            <a:endParaRPr lang="ja-JP" sz="2400" dirty="0"/>
-          </a:p>
-        </p:txBody>
-      </p:sp>
-      <p:sp>
-        <p:nvSpPr>
-          <p:cNvPr id="12" name="Shape 10"/>
-          <p:cNvSpPr/>
-          <p:nvPr/>
-        </p:nvSpPr>
-        <p:spPr>
-          <a:xfrm>
-            <a:off x="502920" y="1691640"/>
-            <a:ext cx="5553151" cy="3374136"/>
-          </a:xfrm>
-          <a:prstGeom prst="roundRect">
-            <a:avLst>
-              <a:gd name="adj" fmla="val 2168"/>
-            </a:avLst>
-          </a:prstGeom>
-          <a:solidFill>
-            <a:srgbClr val="F2F2F2"/>
-          </a:solidFill>
-          <a:ln/>
-        </p:spPr>
-      </p:sp>
-      <p:sp>
-        <p:nvSpPr>
-          <p:cNvPr id="13" name="Text 11"/>
+      <p:graphicFrame>
+        <p:nvGraphicFramePr>
+          <p:cNvPr id="11" name="Table 0"/>
+          <p:cNvGraphicFramePr>
+            <a:graphicFrameLocks noGrp="1"/>
+          </p:cNvGraphicFramePr>
+          <p:nvPr>
+            <p:extLst>
+              <p:ext uri="{D42A27DB-BD31-4B8C-83A1-F6EECF244321}">
+                <p14:modId xmlns:p14="http://schemas.microsoft.com/office/powerpoint/2010/main" val="1579011935"/>
+              </p:ext>
+            </p:extLst>
+          </p:nvPr>
+        </p:nvGraphicFramePr>
+        <p:xfrm>
+          <a:off x="502920" y="1664208"/>
+          <a:ext cx="11155680" cy="914400"/>
+        </p:xfrm>
+        <a:graphic>
+          <a:graphicData uri="http://schemas.openxmlformats.org/drawingml/2006/table">
+            <a:tbl>
+              <a:tblPr/>
+              <a:tblGrid>
+                <a:gridCol w="2350008"/>
+                <a:gridCol w="6693408"/>
+                <a:gridCol w="2112264"/>
+              </a:tblGrid>
+              <a:tr h="749808">
+                <a:tc>
+                  <a:txBody>
+                    <a:bodyPr/>
+                    <a:lstStyle/>
+                    <a:p>
+                      <a:pPr algn="l" indent="0" marL="0">
+                        <a:lnSpc>
+                          <a:spcPts val="2640"/>
+                        </a:lnSpc>
+                        <a:buNone/>
+                      </a:pPr>
+                      <a:r>
+                        <a:rPr lang="ja-JP" altLang="en-US" sz="2200" b="1" dirty="0">
+                          <a:solidFill>
+                            <a:srgbClr val="262626"/>
+                          </a:solidFill>
+                          <a:latin typeface="メイリオ" pitchFamily="34" charset="0"/>
+                          <a:ea typeface="メイリオ" pitchFamily="34" charset="-122"/>
+                          <a:cs typeface="メイリオ" pitchFamily="34" charset="-120"/>
+                        </a:rPr>
+                        <a:t>薬</a:t>
+                      </a:r>
+                      <a:endParaRPr lang="en-US" sz="2200" dirty="0">
+                        <a:latin typeface="メイリオ" charset="0"/>
+                        <a:ea typeface="メイリオ" charset="0"/>
+                        <a:cs typeface="メイリオ" charset="0"/>
+                      </a:endParaRPr>
+                    </a:p>
+                  </a:txBody>
+                  <a:tcPr marL="76200" marR="76200" marT="38100" marB="38100" anchor="ctr">
+                    <a:lnL w="12700" cap="flat" cmpd="sng" algn="ctr">
+                      <a:solidFill>
+                        <a:srgbClr val="BFBFBF"/>
+                      </a:solidFill>
+                      <a:prstDash val="solid"/>
+                      <a:round/>
+                      <a:headEnd type="none" w="med" len="med"/>
+                      <a:tailEnd type="none" w="med" len="med"/>
+                    </a:lnL>
+                    <a:lnR w="12700" cap="flat" cmpd="sng" algn="ctr">
+                      <a:solidFill>
+                        <a:srgbClr val="BFBFBF"/>
+                      </a:solidFill>
+                      <a:prstDash val="solid"/>
+                      <a:round/>
+                      <a:headEnd type="none" w="med" len="med"/>
+                      <a:tailEnd type="none" w="med" len="med"/>
+                    </a:lnR>
+                    <a:lnT w="12700" cap="flat" cmpd="sng" algn="ctr">
+                      <a:solidFill>
+                        <a:srgbClr val="BFBFBF"/>
+                      </a:solidFill>
+                      <a:prstDash val="solid"/>
+                      <a:round/>
+                      <a:headEnd type="none" w="med" len="med"/>
+                      <a:tailEnd type="none" w="med" len="med"/>
+                    </a:lnT>
+                    <a:lnB w="12700" cap="flat" cmpd="sng" algn="ctr">
+                      <a:solidFill>
+                        <a:srgbClr val="BFBFBF"/>
+                      </a:solidFill>
+                      <a:prstDash val="solid"/>
+                      <a:round/>
+                      <a:headEnd type="none" w="med" len="med"/>
+                      <a:tailEnd type="none" w="med" len="med"/>
+                    </a:lnB>
+                    <a:solidFill>
+                      <a:srgbClr val="D9D9D9"/>
+                    </a:solidFill>
+                  </a:tcPr>
+                </a:tc>
+                <a:tc>
+                  <a:txBody>
+                    <a:bodyPr/>
+                    <a:lstStyle/>
+                    <a:p>
+                      <a:pPr algn="l" indent="0" marL="0">
+                        <a:lnSpc>
+                          <a:spcPts val="2640"/>
+                        </a:lnSpc>
+                        <a:buNone/>
+                      </a:pPr>
+                      <a:r>
+                        <a:rPr lang="ja-JP" altLang="en-US" sz="2200" b="1" dirty="0">
+                          <a:solidFill>
+                            <a:srgbClr val="262626"/>
+                          </a:solidFill>
+                          <a:latin typeface="メイリオ" pitchFamily="34" charset="0"/>
+                          <a:ea typeface="メイリオ" pitchFamily="34" charset="-122"/>
+                          <a:cs typeface="メイリオ" pitchFamily="34" charset="-120"/>
+                        </a:rPr>
+                        <a:t>脊髄幹麻酔・深部ブロックの前</a:t>
+                      </a:r>
+                      <a:endParaRPr lang="en-US" sz="2200" dirty="0">
+                        <a:latin typeface="メイリオ" charset="0"/>
+                        <a:ea typeface="メイリオ" charset="0"/>
+                        <a:cs typeface="メイリオ" charset="0"/>
+                      </a:endParaRPr>
+                    </a:p>
+                    <a:p>
+                      <a:pPr algn="l" indent="0" marL="0">
+                        <a:lnSpc>
+                          <a:spcPts val="2640"/>
+                        </a:lnSpc>
+                        <a:buNone/>
+                      </a:pPr>
+                      <a:r>
+                        <a:rPr lang="ja-JP" altLang="en-US" sz="2200" b="1" dirty="0">
+                          <a:solidFill>
+                            <a:srgbClr val="262626"/>
+                          </a:solidFill>
+                          <a:latin typeface="メイリオ" pitchFamily="34" charset="0"/>
+                          <a:ea typeface="メイリオ" pitchFamily="34" charset="-122"/>
+                          <a:cs typeface="メイリオ" pitchFamily="34" charset="-120"/>
+                        </a:rPr>
+                        <a:t>（ASRA 第 5 版）</a:t>
+                      </a:r>
+                      <a:endParaRPr lang="en-US" sz="2200" dirty="0">
+                        <a:latin typeface="メイリオ" charset="0"/>
+                        <a:ea typeface="メイリオ" charset="0"/>
+                        <a:cs typeface="メイリオ" charset="0"/>
+                      </a:endParaRPr>
+                    </a:p>
+                  </a:txBody>
+                  <a:tcPr marL="76200" marR="76200" marT="38100" marB="38100" anchor="ctr">
+                    <a:lnL w="12700" cap="flat" cmpd="sng" algn="ctr">
+                      <a:solidFill>
+                        <a:srgbClr val="BFBFBF"/>
+                      </a:solidFill>
+                      <a:prstDash val="solid"/>
+                      <a:round/>
+                      <a:headEnd type="none" w="med" len="med"/>
+                      <a:tailEnd type="none" w="med" len="med"/>
+                    </a:lnL>
+                    <a:lnR w="12700" cap="flat" cmpd="sng" algn="ctr">
+                      <a:solidFill>
+                        <a:srgbClr val="BFBFBF"/>
+                      </a:solidFill>
+                      <a:prstDash val="solid"/>
+                      <a:round/>
+                      <a:headEnd type="none" w="med" len="med"/>
+                      <a:tailEnd type="none" w="med" len="med"/>
+                    </a:lnR>
+                    <a:lnT w="12700" cap="flat" cmpd="sng" algn="ctr">
+                      <a:solidFill>
+                        <a:srgbClr val="BFBFBF"/>
+                      </a:solidFill>
+                      <a:prstDash val="solid"/>
+                      <a:round/>
+                      <a:headEnd type="none" w="med" len="med"/>
+                      <a:tailEnd type="none" w="med" len="med"/>
+                    </a:lnT>
+                    <a:lnB w="12700" cap="flat" cmpd="sng" algn="ctr">
+                      <a:solidFill>
+                        <a:srgbClr val="BFBFBF"/>
+                      </a:solidFill>
+                      <a:prstDash val="solid"/>
+                      <a:round/>
+                      <a:headEnd type="none" w="med" len="med"/>
+                      <a:tailEnd type="none" w="med" len="med"/>
+                    </a:lnB>
+                    <a:solidFill>
+                      <a:srgbClr val="D9D9D9"/>
+                    </a:solidFill>
+                  </a:tcPr>
+                </a:tc>
+                <a:tc>
+                  <a:txBody>
+                    <a:bodyPr/>
+                    <a:lstStyle/>
+                    <a:p>
+                      <a:pPr algn="l" indent="0" marL="0">
+                        <a:lnSpc>
+                          <a:spcPts val="2640"/>
+                        </a:lnSpc>
+                        <a:buNone/>
+                      </a:pPr>
+                      <a:r>
+                        <a:rPr lang="ja-JP" altLang="en-US" sz="2200" b="1" dirty="0">
+                          <a:solidFill>
+                            <a:srgbClr val="262626"/>
+                          </a:solidFill>
+                          <a:latin typeface="メイリオ" pitchFamily="34" charset="0"/>
+                          <a:ea typeface="メイリオ" pitchFamily="34" charset="-122"/>
+                          <a:cs typeface="メイリオ" pitchFamily="34" charset="-120"/>
+                        </a:rPr>
+                        <a:t>カテーテル</a:t>
+                      </a:r>
+                      <a:endParaRPr lang="en-US" sz="2200" dirty="0">
+                        <a:latin typeface="メイリオ" charset="0"/>
+                        <a:ea typeface="メイリオ" charset="0"/>
+                        <a:cs typeface="メイリオ" charset="0"/>
+                      </a:endParaRPr>
+                    </a:p>
+                    <a:p>
+                      <a:pPr algn="l" indent="0" marL="0">
+                        <a:lnSpc>
+                          <a:spcPts val="2640"/>
+                        </a:lnSpc>
+                        <a:buNone/>
+                      </a:pPr>
+                      <a:r>
+                        <a:rPr lang="ja-JP" altLang="en-US" sz="2200" b="1" dirty="0">
+                          <a:solidFill>
+                            <a:srgbClr val="262626"/>
+                          </a:solidFill>
+                          <a:latin typeface="メイリオ" pitchFamily="34" charset="0"/>
+                          <a:ea typeface="メイリオ" pitchFamily="34" charset="-122"/>
+                          <a:cs typeface="メイリオ" pitchFamily="34" charset="-120"/>
+                        </a:rPr>
+                        <a:t>抜去後の再開</a:t>
+                      </a:r>
+                      <a:endParaRPr lang="en-US" sz="2200" dirty="0">
+                        <a:latin typeface="メイリオ" charset="0"/>
+                        <a:ea typeface="メイリオ" charset="0"/>
+                        <a:cs typeface="メイリオ" charset="0"/>
+                      </a:endParaRPr>
+                    </a:p>
+                  </a:txBody>
+                  <a:tcPr marL="76200" marR="76200" marT="38100" marB="38100" anchor="ctr">
+                    <a:lnL w="12700" cap="flat" cmpd="sng" algn="ctr">
+                      <a:solidFill>
+                        <a:srgbClr val="BFBFBF"/>
+                      </a:solidFill>
+                      <a:prstDash val="solid"/>
+                      <a:round/>
+                      <a:headEnd type="none" w="med" len="med"/>
+                      <a:tailEnd type="none" w="med" len="med"/>
+                    </a:lnL>
+                    <a:lnR w="12700" cap="flat" cmpd="sng" algn="ctr">
+                      <a:solidFill>
+                        <a:srgbClr val="BFBFBF"/>
+                      </a:solidFill>
+                      <a:prstDash val="solid"/>
+                      <a:round/>
+                      <a:headEnd type="none" w="med" len="med"/>
+                      <a:tailEnd type="none" w="med" len="med"/>
+                    </a:lnR>
+                    <a:lnT w="12700" cap="flat" cmpd="sng" algn="ctr">
+                      <a:solidFill>
+                        <a:srgbClr val="BFBFBF"/>
+                      </a:solidFill>
+                      <a:prstDash val="solid"/>
+                      <a:round/>
+                      <a:headEnd type="none" w="med" len="med"/>
+                      <a:tailEnd type="none" w="med" len="med"/>
+                    </a:lnT>
+                    <a:lnB w="12700" cap="flat" cmpd="sng" algn="ctr">
+                      <a:solidFill>
+                        <a:srgbClr val="BFBFBF"/>
+                      </a:solidFill>
+                      <a:prstDash val="solid"/>
+                      <a:round/>
+                      <a:headEnd type="none" w="med" len="med"/>
+                      <a:tailEnd type="none" w="med" len="med"/>
+                    </a:lnB>
+                    <a:solidFill>
+                      <a:srgbClr val="D9D9D9"/>
+                    </a:solidFill>
+                  </a:tcPr>
+                </a:tc>
+              </a:tr>
+              <a:tr h="411480">
+                <a:tc>
+                  <a:txBody>
+                    <a:bodyPr/>
+                    <a:lstStyle/>
+                    <a:p>
+                      <a:pPr algn="l" indent="0" marL="0">
+                        <a:lnSpc>
+                          <a:spcPts val="2640"/>
+                        </a:lnSpc>
+                        <a:buNone/>
+                      </a:pPr>
+                      <a:r>
+                        <a:rPr lang="ja-JP" altLang="en-US" sz="2200" b="1" dirty="0">
+                          <a:solidFill>
+                            <a:srgbClr val="262626"/>
+                          </a:solidFill>
+                          <a:latin typeface="メイリオ" pitchFamily="34" charset="0"/>
+                          <a:ea typeface="メイリオ" pitchFamily="34" charset="-122"/>
+                          <a:cs typeface="メイリオ" pitchFamily="34" charset="-120"/>
+                        </a:rPr>
+                        <a:t>LMWH</a:t>
+                      </a:r>
+                      <a:endParaRPr lang="en-US" sz="2200" dirty="0">
+                        <a:latin typeface="メイリオ" charset="0"/>
+                        <a:ea typeface="メイリオ" charset="0"/>
+                        <a:cs typeface="メイリオ" charset="0"/>
+                      </a:endParaRPr>
+                    </a:p>
+                  </a:txBody>
+                  <a:tcPr marL="76200" marR="76200" marT="38100" marB="38100" anchor="ctr">
+                    <a:lnL w="12700" cap="flat" cmpd="sng" algn="ctr">
+                      <a:solidFill>
+                        <a:srgbClr val="BFBFBF"/>
+                      </a:solidFill>
+                      <a:prstDash val="solid"/>
+                      <a:round/>
+                      <a:headEnd type="none" w="med" len="med"/>
+                      <a:tailEnd type="none" w="med" len="med"/>
+                    </a:lnL>
+                    <a:lnR w="12700" cap="flat" cmpd="sng" algn="ctr">
+                      <a:solidFill>
+                        <a:srgbClr val="BFBFBF"/>
+                      </a:solidFill>
+                      <a:prstDash val="solid"/>
+                      <a:round/>
+                      <a:headEnd type="none" w="med" len="med"/>
+                      <a:tailEnd type="none" w="med" len="med"/>
+                    </a:lnR>
+                    <a:lnT w="12700" cap="flat" cmpd="sng" algn="ctr">
+                      <a:solidFill>
+                        <a:srgbClr val="BFBFBF"/>
+                      </a:solidFill>
+                      <a:prstDash val="solid"/>
+                      <a:round/>
+                      <a:headEnd type="none" w="med" len="med"/>
+                      <a:tailEnd type="none" w="med" len="med"/>
+                    </a:lnT>
+                    <a:lnB w="12700" cap="flat" cmpd="sng" algn="ctr">
+                      <a:solidFill>
+                        <a:srgbClr val="BFBFBF"/>
+                      </a:solidFill>
+                      <a:prstDash val="solid"/>
+                      <a:round/>
+                      <a:headEnd type="none" w="med" len="med"/>
+                      <a:tailEnd type="none" w="med" len="med"/>
+                    </a:lnB>
+                  </a:tcPr>
+                </a:tc>
+                <a:tc>
+                  <a:txBody>
+                    <a:bodyPr/>
+                    <a:lstStyle/>
+                    <a:p>
+                      <a:pPr algn="l" indent="0" marL="0">
+                        <a:lnSpc>
+                          <a:spcPts val="2640"/>
+                        </a:lnSpc>
+                        <a:buNone/>
+                      </a:pPr>
+                      <a:r>
+                        <a:rPr lang="ja-JP" altLang="en-US" sz="2200" dirty="0">
+                          <a:solidFill>
+                            <a:srgbClr val="262626"/>
+                          </a:solidFill>
+                          <a:latin typeface="メイリオ" pitchFamily="34" charset="0"/>
+                          <a:ea typeface="メイリオ" pitchFamily="34" charset="-122"/>
+                          <a:cs typeface="メイリオ" pitchFamily="34" charset="-120"/>
+                        </a:rPr>
+                        <a:t>低用量 12 時間、高用量 24 時間</a:t>
+                      </a:r>
+                      <a:endParaRPr lang="en-US" sz="2200" dirty="0">
+                        <a:latin typeface="メイリオ" charset="0"/>
+                        <a:ea typeface="メイリオ" charset="0"/>
+                        <a:cs typeface="メイリオ" charset="0"/>
+                      </a:endParaRPr>
+                    </a:p>
+                  </a:txBody>
+                  <a:tcPr marL="76200" marR="76200" marT="38100" marB="38100" anchor="ctr">
+                    <a:lnL w="12700" cap="flat" cmpd="sng" algn="ctr">
+                      <a:solidFill>
+                        <a:srgbClr val="BFBFBF"/>
+                      </a:solidFill>
+                      <a:prstDash val="solid"/>
+                      <a:round/>
+                      <a:headEnd type="none" w="med" len="med"/>
+                      <a:tailEnd type="none" w="med" len="med"/>
+                    </a:lnL>
+                    <a:lnR w="12700" cap="flat" cmpd="sng" algn="ctr">
+                      <a:solidFill>
+                        <a:srgbClr val="BFBFBF"/>
+                      </a:solidFill>
+                      <a:prstDash val="solid"/>
+                      <a:round/>
+                      <a:headEnd type="none" w="med" len="med"/>
+                      <a:tailEnd type="none" w="med" len="med"/>
+                    </a:lnR>
+                    <a:lnT w="12700" cap="flat" cmpd="sng" algn="ctr">
+                      <a:solidFill>
+                        <a:srgbClr val="BFBFBF"/>
+                      </a:solidFill>
+                      <a:prstDash val="solid"/>
+                      <a:round/>
+                      <a:headEnd type="none" w="med" len="med"/>
+                      <a:tailEnd type="none" w="med" len="med"/>
+                    </a:lnT>
+                    <a:lnB w="12700" cap="flat" cmpd="sng" algn="ctr">
+                      <a:solidFill>
+                        <a:srgbClr val="BFBFBF"/>
+                      </a:solidFill>
+                      <a:prstDash val="solid"/>
+                      <a:round/>
+                      <a:headEnd type="none" w="med" len="med"/>
+                      <a:tailEnd type="none" w="med" len="med"/>
+                    </a:lnB>
+                  </a:tcPr>
+                </a:tc>
+                <a:tc>
+                  <a:txBody>
+                    <a:bodyPr/>
+                    <a:lstStyle/>
+                    <a:p>
+                      <a:pPr algn="l" indent="0" marL="0">
+                        <a:lnSpc>
+                          <a:spcPts val="2640"/>
+                        </a:lnSpc>
+                        <a:buNone/>
+                      </a:pPr>
+                      <a:r>
+                        <a:rPr lang="ja-JP" altLang="en-US" sz="2200" dirty="0">
+                          <a:solidFill>
+                            <a:srgbClr val="262626"/>
+                          </a:solidFill>
+                          <a:latin typeface="メイリオ" pitchFamily="34" charset="0"/>
+                          <a:ea typeface="メイリオ" pitchFamily="34" charset="-122"/>
+                          <a:cs typeface="メイリオ" pitchFamily="34" charset="-120"/>
+                        </a:rPr>
+                        <a:t>4 時間後</a:t>
+                      </a:r>
+                      <a:endParaRPr lang="en-US" sz="2200" dirty="0">
+                        <a:latin typeface="メイリオ" charset="0"/>
+                        <a:ea typeface="メイリオ" charset="0"/>
+                        <a:cs typeface="メイリオ" charset="0"/>
+                      </a:endParaRPr>
+                    </a:p>
+                  </a:txBody>
+                  <a:tcPr marL="76200" marR="76200" marT="38100" marB="38100" anchor="ctr">
+                    <a:lnL w="12700" cap="flat" cmpd="sng" algn="ctr">
+                      <a:solidFill>
+                        <a:srgbClr val="BFBFBF"/>
+                      </a:solidFill>
+                      <a:prstDash val="solid"/>
+                      <a:round/>
+                      <a:headEnd type="none" w="med" len="med"/>
+                      <a:tailEnd type="none" w="med" len="med"/>
+                    </a:lnL>
+                    <a:lnR w="12700" cap="flat" cmpd="sng" algn="ctr">
+                      <a:solidFill>
+                        <a:srgbClr val="BFBFBF"/>
+                      </a:solidFill>
+                      <a:prstDash val="solid"/>
+                      <a:round/>
+                      <a:headEnd type="none" w="med" len="med"/>
+                      <a:tailEnd type="none" w="med" len="med"/>
+                    </a:lnR>
+                    <a:lnT w="12700" cap="flat" cmpd="sng" algn="ctr">
+                      <a:solidFill>
+                        <a:srgbClr val="BFBFBF"/>
+                      </a:solidFill>
+                      <a:prstDash val="solid"/>
+                      <a:round/>
+                      <a:headEnd type="none" w="med" len="med"/>
+                      <a:tailEnd type="none" w="med" len="med"/>
+                    </a:lnT>
+                    <a:lnB w="12700" cap="flat" cmpd="sng" algn="ctr">
+                      <a:solidFill>
+                        <a:srgbClr val="BFBFBF"/>
+                      </a:solidFill>
+                      <a:prstDash val="solid"/>
+                      <a:round/>
+                      <a:headEnd type="none" w="med" len="med"/>
+                      <a:tailEnd type="none" w="med" len="med"/>
+                    </a:lnB>
+                  </a:tcPr>
+                </a:tc>
+              </a:tr>
+              <a:tr h="749808">
+                <a:tc>
+                  <a:txBody>
+                    <a:bodyPr/>
+                    <a:lstStyle/>
+                    <a:p>
+                      <a:pPr algn="l" indent="0" marL="0">
+                        <a:lnSpc>
+                          <a:spcPts val="2640"/>
+                        </a:lnSpc>
+                        <a:buNone/>
+                      </a:pPr>
+                      <a:r>
+                        <a:rPr lang="ja-JP" altLang="en-US" sz="2200" b="1" dirty="0">
+                          <a:solidFill>
+                            <a:srgbClr val="262626"/>
+                          </a:solidFill>
+                          <a:latin typeface="メイリオ" pitchFamily="34" charset="0"/>
+                          <a:ea typeface="メイリオ" pitchFamily="34" charset="-122"/>
+                          <a:cs typeface="メイリオ" pitchFamily="34" charset="-120"/>
+                        </a:rPr>
+                        <a:t>未分画ヘパリン</a:t>
+                      </a:r>
+                      <a:endParaRPr lang="en-US" sz="2200" dirty="0">
+                        <a:latin typeface="メイリオ" charset="0"/>
+                        <a:ea typeface="メイリオ" charset="0"/>
+                        <a:cs typeface="メイリオ" charset="0"/>
+                      </a:endParaRPr>
+                    </a:p>
+                  </a:txBody>
+                  <a:tcPr marL="76200" marR="76200" marT="38100" marB="38100" anchor="ctr">
+                    <a:lnL w="12700" cap="flat" cmpd="sng" algn="ctr">
+                      <a:solidFill>
+                        <a:srgbClr val="BFBFBF"/>
+                      </a:solidFill>
+                      <a:prstDash val="solid"/>
+                      <a:round/>
+                      <a:headEnd type="none" w="med" len="med"/>
+                      <a:tailEnd type="none" w="med" len="med"/>
+                    </a:lnL>
+                    <a:lnR w="12700" cap="flat" cmpd="sng" algn="ctr">
+                      <a:solidFill>
+                        <a:srgbClr val="BFBFBF"/>
+                      </a:solidFill>
+                      <a:prstDash val="solid"/>
+                      <a:round/>
+                      <a:headEnd type="none" w="med" len="med"/>
+                      <a:tailEnd type="none" w="med" len="med"/>
+                    </a:lnR>
+                    <a:lnT w="12700" cap="flat" cmpd="sng" algn="ctr">
+                      <a:solidFill>
+                        <a:srgbClr val="BFBFBF"/>
+                      </a:solidFill>
+                      <a:prstDash val="solid"/>
+                      <a:round/>
+                      <a:headEnd type="none" w="med" len="med"/>
+                      <a:tailEnd type="none" w="med" len="med"/>
+                    </a:lnT>
+                    <a:lnB w="12700" cap="flat" cmpd="sng" algn="ctr">
+                      <a:solidFill>
+                        <a:srgbClr val="BFBFBF"/>
+                      </a:solidFill>
+                      <a:prstDash val="solid"/>
+                      <a:round/>
+                      <a:headEnd type="none" w="med" len="med"/>
+                      <a:tailEnd type="none" w="med" len="med"/>
+                    </a:lnB>
+                  </a:tcPr>
+                </a:tc>
+                <a:tc>
+                  <a:txBody>
+                    <a:bodyPr/>
+                    <a:lstStyle/>
+                    <a:p>
+                      <a:pPr algn="l" indent="0" marL="0">
+                        <a:lnSpc>
+                          <a:spcPts val="2640"/>
+                        </a:lnSpc>
+                        <a:buNone/>
+                      </a:pPr>
+                      <a:r>
+                        <a:rPr lang="ja-JP" altLang="en-US" sz="2200" dirty="0">
+                          <a:solidFill>
+                            <a:srgbClr val="262626"/>
+                          </a:solidFill>
+                          <a:latin typeface="メイリオ" pitchFamily="34" charset="0"/>
+                          <a:ea typeface="メイリオ" pitchFamily="34" charset="-122"/>
+                          <a:cs typeface="メイリオ" pitchFamily="34" charset="-120"/>
+                        </a:rPr>
+                        <a:t>皮下 低用量 4〜6 時間、高用量 12〜24 時間。</a:t>
+                      </a:r>
+                      <a:endParaRPr lang="en-US" sz="2200" dirty="0">
+                        <a:latin typeface="メイリオ" charset="0"/>
+                        <a:ea typeface="メイリオ" charset="0"/>
+                        <a:cs typeface="メイリオ" charset="0"/>
+                      </a:endParaRPr>
+                    </a:p>
+                    <a:p>
+                      <a:pPr algn="l" indent="0" marL="0">
+                        <a:lnSpc>
+                          <a:spcPts val="2640"/>
+                        </a:lnSpc>
+                        <a:buNone/>
+                      </a:pPr>
+                      <a:r>
+                        <a:rPr lang="ja-JP" altLang="en-US" sz="2200" dirty="0">
+                          <a:solidFill>
+                            <a:srgbClr val="262626"/>
+                          </a:solidFill>
+                          <a:latin typeface="メイリオ" pitchFamily="34" charset="0"/>
+                          <a:ea typeface="メイリオ" pitchFamily="34" charset="-122"/>
+                          <a:cs typeface="メイリオ" pitchFamily="34" charset="-120"/>
+                        </a:rPr>
+                        <a:t>静注 4〜6 時間＋aPTT 正常</a:t>
+                      </a:r>
+                      <a:endParaRPr lang="en-US" sz="2200" dirty="0">
+                        <a:latin typeface="メイリオ" charset="0"/>
+                        <a:ea typeface="メイリオ" charset="0"/>
+                        <a:cs typeface="メイリオ" charset="0"/>
+                      </a:endParaRPr>
+                    </a:p>
+                  </a:txBody>
+                  <a:tcPr marL="76200" marR="76200" marT="38100" marB="38100" anchor="ctr">
+                    <a:lnL w="12700" cap="flat" cmpd="sng" algn="ctr">
+                      <a:solidFill>
+                        <a:srgbClr val="BFBFBF"/>
+                      </a:solidFill>
+                      <a:prstDash val="solid"/>
+                      <a:round/>
+                      <a:headEnd type="none" w="med" len="med"/>
+                      <a:tailEnd type="none" w="med" len="med"/>
+                    </a:lnL>
+                    <a:lnR w="12700" cap="flat" cmpd="sng" algn="ctr">
+                      <a:solidFill>
+                        <a:srgbClr val="BFBFBF"/>
+                      </a:solidFill>
+                      <a:prstDash val="solid"/>
+                      <a:round/>
+                      <a:headEnd type="none" w="med" len="med"/>
+                      <a:tailEnd type="none" w="med" len="med"/>
+                    </a:lnR>
+                    <a:lnT w="12700" cap="flat" cmpd="sng" algn="ctr">
+                      <a:solidFill>
+                        <a:srgbClr val="BFBFBF"/>
+                      </a:solidFill>
+                      <a:prstDash val="solid"/>
+                      <a:round/>
+                      <a:headEnd type="none" w="med" len="med"/>
+                      <a:tailEnd type="none" w="med" len="med"/>
+                    </a:lnT>
+                    <a:lnB w="12700" cap="flat" cmpd="sng" algn="ctr">
+                      <a:solidFill>
+                        <a:srgbClr val="BFBFBF"/>
+                      </a:solidFill>
+                      <a:prstDash val="solid"/>
+                      <a:round/>
+                      <a:headEnd type="none" w="med" len="med"/>
+                      <a:tailEnd type="none" w="med" len="med"/>
+                    </a:lnB>
+                  </a:tcPr>
+                </a:tc>
+                <a:tc>
+                  <a:txBody>
+                    <a:bodyPr/>
+                    <a:lstStyle/>
+                    <a:p>
+                      <a:pPr algn="l" indent="0" marL="0">
+                        <a:lnSpc>
+                          <a:spcPts val="2640"/>
+                        </a:lnSpc>
+                        <a:buNone/>
+                      </a:pPr>
+                      <a:r>
+                        <a:rPr lang="ja-JP" altLang="en-US" sz="2200" dirty="0">
+                          <a:solidFill>
+                            <a:srgbClr val="262626"/>
+                          </a:solidFill>
+                          <a:latin typeface="メイリオ" pitchFamily="34" charset="0"/>
+                          <a:ea typeface="メイリオ" pitchFamily="34" charset="-122"/>
+                          <a:cs typeface="メイリオ" pitchFamily="34" charset="-120"/>
+                        </a:rPr>
+                        <a:t>1 時間後</a:t>
+                      </a:r>
+                      <a:endParaRPr lang="en-US" sz="2200" dirty="0">
+                        <a:latin typeface="メイリオ" charset="0"/>
+                        <a:ea typeface="メイリオ" charset="0"/>
+                        <a:cs typeface="メイリオ" charset="0"/>
+                      </a:endParaRPr>
+                    </a:p>
+                  </a:txBody>
+                  <a:tcPr marL="76200" marR="76200" marT="38100" marB="38100" anchor="ctr">
+                    <a:lnL w="12700" cap="flat" cmpd="sng" algn="ctr">
+                      <a:solidFill>
+                        <a:srgbClr val="BFBFBF"/>
+                      </a:solidFill>
+                      <a:prstDash val="solid"/>
+                      <a:round/>
+                      <a:headEnd type="none" w="med" len="med"/>
+                      <a:tailEnd type="none" w="med" len="med"/>
+                    </a:lnL>
+                    <a:lnR w="12700" cap="flat" cmpd="sng" algn="ctr">
+                      <a:solidFill>
+                        <a:srgbClr val="BFBFBF"/>
+                      </a:solidFill>
+                      <a:prstDash val="solid"/>
+                      <a:round/>
+                      <a:headEnd type="none" w="med" len="med"/>
+                      <a:tailEnd type="none" w="med" len="med"/>
+                    </a:lnR>
+                    <a:lnT w="12700" cap="flat" cmpd="sng" algn="ctr">
+                      <a:solidFill>
+                        <a:srgbClr val="BFBFBF"/>
+                      </a:solidFill>
+                      <a:prstDash val="solid"/>
+                      <a:round/>
+                      <a:headEnd type="none" w="med" len="med"/>
+                      <a:tailEnd type="none" w="med" len="med"/>
+                    </a:lnT>
+                    <a:lnB w="12700" cap="flat" cmpd="sng" algn="ctr">
+                      <a:solidFill>
+                        <a:srgbClr val="BFBFBF"/>
+                      </a:solidFill>
+                      <a:prstDash val="solid"/>
+                      <a:round/>
+                      <a:headEnd type="none" w="med" len="med"/>
+                      <a:tailEnd type="none" w="med" len="med"/>
+                    </a:lnB>
+                  </a:tcPr>
+                </a:tc>
+              </a:tr>
+              <a:tr h="1417320">
+                <a:tc>
+                  <a:txBody>
+                    <a:bodyPr/>
+                    <a:lstStyle/>
+                    <a:p>
+                      <a:pPr algn="l" indent="0" marL="0">
+                        <a:lnSpc>
+                          <a:spcPts val="2640"/>
+                        </a:lnSpc>
+                        <a:buNone/>
+                      </a:pPr>
+                      <a:r>
+                        <a:rPr lang="ja-JP" altLang="en-US" sz="2200" b="1" dirty="0">
+                          <a:solidFill>
+                            <a:srgbClr val="262626"/>
+                          </a:solidFill>
+                          <a:latin typeface="メイリオ" pitchFamily="34" charset="0"/>
+                          <a:ea typeface="メイリオ" pitchFamily="34" charset="-122"/>
+                          <a:cs typeface="メイリオ" pitchFamily="34" charset="-120"/>
+                        </a:rPr>
+                        <a:t>抗血小板薬</a:t>
+                      </a:r>
+                      <a:endParaRPr lang="en-US" sz="2200" dirty="0">
+                        <a:latin typeface="メイリオ" charset="0"/>
+                        <a:ea typeface="メイリオ" charset="0"/>
+                        <a:cs typeface="メイリオ" charset="0"/>
+                      </a:endParaRPr>
+                    </a:p>
+                  </a:txBody>
+                  <a:tcPr marL="76200" marR="76200" marT="38100" marB="38100" anchor="ctr">
+                    <a:lnL w="12700" cap="flat" cmpd="sng" algn="ctr">
+                      <a:solidFill>
+                        <a:srgbClr val="BFBFBF"/>
+                      </a:solidFill>
+                      <a:prstDash val="solid"/>
+                      <a:round/>
+                      <a:headEnd type="none" w="med" len="med"/>
+                      <a:tailEnd type="none" w="med" len="med"/>
+                    </a:lnL>
+                    <a:lnR w="12700" cap="flat" cmpd="sng" algn="ctr">
+                      <a:solidFill>
+                        <a:srgbClr val="BFBFBF"/>
+                      </a:solidFill>
+                      <a:prstDash val="solid"/>
+                      <a:round/>
+                      <a:headEnd type="none" w="med" len="med"/>
+                      <a:tailEnd type="none" w="med" len="med"/>
+                    </a:lnR>
+                    <a:lnT w="12700" cap="flat" cmpd="sng" algn="ctr">
+                      <a:solidFill>
+                        <a:srgbClr val="BFBFBF"/>
+                      </a:solidFill>
+                      <a:prstDash val="solid"/>
+                      <a:round/>
+                      <a:headEnd type="none" w="med" len="med"/>
+                      <a:tailEnd type="none" w="med" len="med"/>
+                    </a:lnT>
+                    <a:lnB w="12700" cap="flat" cmpd="sng" algn="ctr">
+                      <a:solidFill>
+                        <a:srgbClr val="BFBFBF"/>
+                      </a:solidFill>
+                      <a:prstDash val="solid"/>
+                      <a:round/>
+                      <a:headEnd type="none" w="med" len="med"/>
+                      <a:tailEnd type="none" w="med" len="med"/>
+                    </a:lnB>
+                  </a:tcPr>
+                </a:tc>
+                <a:tc>
+                  <a:txBody>
+                    <a:bodyPr/>
+                    <a:lstStyle/>
+                    <a:p>
+                      <a:pPr algn="l" indent="0" marL="0">
+                        <a:lnSpc>
+                          <a:spcPts val="2640"/>
+                        </a:lnSpc>
+                        <a:buNone/>
+                      </a:pPr>
+                      <a:r>
+                        <a:rPr lang="ja-JP" altLang="en-US" sz="2200" dirty="0">
+                          <a:solidFill>
+                            <a:srgbClr val="262626"/>
+                          </a:solidFill>
+                          <a:latin typeface="メイリオ" pitchFamily="34" charset="0"/>
+                          <a:ea typeface="メイリオ" pitchFamily="34" charset="-122"/>
+                          <a:cs typeface="メイリオ" pitchFamily="34" charset="-120"/>
+                        </a:rPr>
+                        <a:t>アスピリン・NSAIDs は不要。</a:t>
+                      </a:r>
+                      <a:endParaRPr lang="en-US" sz="2200" dirty="0">
+                        <a:latin typeface="メイリオ" charset="0"/>
+                        <a:ea typeface="メイリオ" charset="0"/>
+                        <a:cs typeface="メイリオ" charset="0"/>
+                      </a:endParaRPr>
+                    </a:p>
+                    <a:p>
+                      <a:pPr algn="l" indent="0" marL="0">
+                        <a:lnSpc>
+                          <a:spcPts val="2640"/>
+                        </a:lnSpc>
+                        <a:buNone/>
+                      </a:pPr>
+                      <a:r>
+                        <a:rPr lang="ja-JP" altLang="en-US" sz="2200" dirty="0">
+                          <a:solidFill>
+                            <a:srgbClr val="262626"/>
+                          </a:solidFill>
+                          <a:latin typeface="メイリオ" pitchFamily="34" charset="0"/>
+                          <a:ea typeface="メイリオ" pitchFamily="34" charset="-122"/>
+                          <a:cs typeface="メイリオ" pitchFamily="34" charset="-120"/>
+                        </a:rPr>
+                        <a:t>クロピドグレル 5〜7 日、チカグレロル 5 日、</a:t>
+                      </a:r>
+                      <a:endParaRPr lang="en-US" sz="2200" dirty="0">
+                        <a:latin typeface="メイリオ" charset="0"/>
+                        <a:ea typeface="メイリオ" charset="0"/>
+                        <a:cs typeface="メイリオ" charset="0"/>
+                      </a:endParaRPr>
+                    </a:p>
+                    <a:p>
+                      <a:pPr algn="l" indent="0" marL="0">
+                        <a:lnSpc>
+                          <a:spcPts val="2640"/>
+                        </a:lnSpc>
+                        <a:buNone/>
+                      </a:pPr>
+                      <a:r>
+                        <a:rPr lang="ja-JP" altLang="en-US" sz="2200" dirty="0">
+                          <a:solidFill>
+                            <a:srgbClr val="262626"/>
+                          </a:solidFill>
+                          <a:latin typeface="メイリオ" pitchFamily="34" charset="0"/>
+                          <a:ea typeface="メイリオ" pitchFamily="34" charset="-122"/>
+                          <a:cs typeface="メイリオ" pitchFamily="34" charset="-120"/>
+                        </a:rPr>
+                        <a:t>プラスグレル 7〜10 日</a:t>
+                      </a:r>
+                      <a:endParaRPr lang="en-US" sz="2200" dirty="0">
+                        <a:latin typeface="メイリオ" charset="0"/>
+                        <a:ea typeface="メイリオ" charset="0"/>
+                        <a:cs typeface="メイリオ" charset="0"/>
+                      </a:endParaRPr>
+                    </a:p>
+                  </a:txBody>
+                  <a:tcPr marL="76200" marR="76200" marT="38100" marB="38100" anchor="ctr">
+                    <a:lnL w="12700" cap="flat" cmpd="sng" algn="ctr">
+                      <a:solidFill>
+                        <a:srgbClr val="BFBFBF"/>
+                      </a:solidFill>
+                      <a:prstDash val="solid"/>
+                      <a:round/>
+                      <a:headEnd type="none" w="med" len="med"/>
+                      <a:tailEnd type="none" w="med" len="med"/>
+                    </a:lnL>
+                    <a:lnR w="12700" cap="flat" cmpd="sng" algn="ctr">
+                      <a:solidFill>
+                        <a:srgbClr val="BFBFBF"/>
+                      </a:solidFill>
+                      <a:prstDash val="solid"/>
+                      <a:round/>
+                      <a:headEnd type="none" w="med" len="med"/>
+                      <a:tailEnd type="none" w="med" len="med"/>
+                    </a:lnR>
+                    <a:lnT w="12700" cap="flat" cmpd="sng" algn="ctr">
+                      <a:solidFill>
+                        <a:srgbClr val="BFBFBF"/>
+                      </a:solidFill>
+                      <a:prstDash val="solid"/>
+                      <a:round/>
+                      <a:headEnd type="none" w="med" len="med"/>
+                      <a:tailEnd type="none" w="med" len="med"/>
+                    </a:lnT>
+                    <a:lnB w="12700" cap="flat" cmpd="sng" algn="ctr">
+                      <a:solidFill>
+                        <a:srgbClr val="BFBFBF"/>
+                      </a:solidFill>
+                      <a:prstDash val="solid"/>
+                      <a:round/>
+                      <a:headEnd type="none" w="med" len="med"/>
+                      <a:tailEnd type="none" w="med" len="med"/>
+                    </a:lnB>
+                  </a:tcPr>
+                </a:tc>
+                <a:tc>
+                  <a:txBody>
+                    <a:bodyPr/>
+                    <a:lstStyle/>
+                    <a:p>
+                      <a:pPr algn="l" indent="0" marL="0">
+                        <a:lnSpc>
+                          <a:spcPts val="2640"/>
+                        </a:lnSpc>
+                        <a:buNone/>
+                      </a:pPr>
+                      <a:r>
+                        <a:rPr lang="ja-JP" altLang="en-US" sz="2200" dirty="0">
+                          <a:solidFill>
+                            <a:srgbClr val="262626"/>
+                          </a:solidFill>
+                          <a:latin typeface="メイリオ" pitchFamily="34" charset="0"/>
+                          <a:ea typeface="メイリオ" pitchFamily="34" charset="-122"/>
+                          <a:cs typeface="メイリオ" pitchFamily="34" charset="-120"/>
+                        </a:rPr>
+                        <a:t>負荷なし：</a:t>
+                      </a:r>
+                      <a:endParaRPr lang="en-US" sz="2200" dirty="0">
+                        <a:latin typeface="メイリオ" charset="0"/>
+                        <a:ea typeface="メイリオ" charset="0"/>
+                        <a:cs typeface="メイリオ" charset="0"/>
+                      </a:endParaRPr>
+                    </a:p>
+                    <a:p>
+                      <a:pPr algn="l" indent="0" marL="0">
+                        <a:lnSpc>
+                          <a:spcPts val="2640"/>
+                        </a:lnSpc>
+                        <a:buNone/>
+                      </a:pPr>
+                      <a:r>
+                        <a:rPr lang="ja-JP" altLang="en-US" sz="2200" dirty="0">
+                          <a:solidFill>
+                            <a:srgbClr val="262626"/>
+                          </a:solidFill>
+                          <a:latin typeface="メイリオ" pitchFamily="34" charset="0"/>
+                          <a:ea typeface="メイリオ" pitchFamily="34" charset="-122"/>
+                          <a:cs typeface="メイリオ" pitchFamily="34" charset="-120"/>
+                        </a:rPr>
+                        <a:t>すぐ、</a:t>
+                      </a:r>
+                      <a:endParaRPr lang="en-US" sz="2200" dirty="0">
+                        <a:latin typeface="メイリオ" charset="0"/>
+                        <a:ea typeface="メイリオ" charset="0"/>
+                        <a:cs typeface="メイリオ" charset="0"/>
+                      </a:endParaRPr>
+                    </a:p>
+                    <a:p>
+                      <a:pPr algn="l" indent="0" marL="0">
+                        <a:lnSpc>
+                          <a:spcPts val="2640"/>
+                        </a:lnSpc>
+                        <a:buNone/>
+                      </a:pPr>
+                      <a:r>
+                        <a:rPr lang="ja-JP" altLang="en-US" sz="2200" dirty="0">
+                          <a:solidFill>
+                            <a:srgbClr val="262626"/>
+                          </a:solidFill>
+                          <a:latin typeface="メイリオ" pitchFamily="34" charset="0"/>
+                          <a:ea typeface="メイリオ" pitchFamily="34" charset="-122"/>
+                          <a:cs typeface="メイリオ" pitchFamily="34" charset="-120"/>
+                        </a:rPr>
+                        <a:t>負荷あり：</a:t>
+                      </a:r>
+                      <a:endParaRPr lang="en-US" sz="2200" dirty="0">
+                        <a:latin typeface="メイリオ" charset="0"/>
+                        <a:ea typeface="メイリオ" charset="0"/>
+                        <a:cs typeface="メイリオ" charset="0"/>
+                      </a:endParaRPr>
+                    </a:p>
+                    <a:p>
+                      <a:pPr algn="l" indent="0" marL="0">
+                        <a:lnSpc>
+                          <a:spcPts val="2640"/>
+                        </a:lnSpc>
+                        <a:buNone/>
+                      </a:pPr>
+                      <a:r>
+                        <a:rPr lang="ja-JP" altLang="en-US" sz="2200" dirty="0">
+                          <a:solidFill>
+                            <a:srgbClr val="262626"/>
+                          </a:solidFill>
+                          <a:latin typeface="メイリオ" pitchFamily="34" charset="0"/>
+                          <a:ea typeface="メイリオ" pitchFamily="34" charset="-122"/>
+                          <a:cs typeface="メイリオ" pitchFamily="34" charset="-120"/>
+                        </a:rPr>
+                        <a:t>6 時間後</a:t>
+                      </a:r>
+                      <a:endParaRPr lang="en-US" sz="2200" dirty="0">
+                        <a:latin typeface="メイリオ" charset="0"/>
+                        <a:ea typeface="メイリオ" charset="0"/>
+                        <a:cs typeface="メイリオ" charset="0"/>
+                      </a:endParaRPr>
+                    </a:p>
+                  </a:txBody>
+                  <a:tcPr marL="76200" marR="76200" marT="38100" marB="38100" anchor="ctr">
+                    <a:lnL w="12700" cap="flat" cmpd="sng" algn="ctr">
+                      <a:solidFill>
+                        <a:srgbClr val="BFBFBF"/>
+                      </a:solidFill>
+                      <a:prstDash val="solid"/>
+                      <a:round/>
+                      <a:headEnd type="none" w="med" len="med"/>
+                      <a:tailEnd type="none" w="med" len="med"/>
+                    </a:lnL>
+                    <a:lnR w="12700" cap="flat" cmpd="sng" algn="ctr">
+                      <a:solidFill>
+                        <a:srgbClr val="BFBFBF"/>
+                      </a:solidFill>
+                      <a:prstDash val="solid"/>
+                      <a:round/>
+                      <a:headEnd type="none" w="med" len="med"/>
+                      <a:tailEnd type="none" w="med" len="med"/>
+                    </a:lnR>
+                    <a:lnT w="12700" cap="flat" cmpd="sng" algn="ctr">
+                      <a:solidFill>
+                        <a:srgbClr val="BFBFBF"/>
+                      </a:solidFill>
+                      <a:prstDash val="solid"/>
+                      <a:round/>
+                      <a:headEnd type="none" w="med" len="med"/>
+                      <a:tailEnd type="none" w="med" len="med"/>
+                    </a:lnT>
+                    <a:lnB w="12700" cap="flat" cmpd="sng" algn="ctr">
+                      <a:solidFill>
+                        <a:srgbClr val="BFBFBF"/>
+                      </a:solidFill>
+                      <a:prstDash val="solid"/>
+                      <a:round/>
+                      <a:headEnd type="none" w="med" len="med"/>
+                      <a:tailEnd type="none" w="med" len="med"/>
+                    </a:lnB>
+                  </a:tcPr>
+                </a:tc>
+              </a:tr>
+            </a:tbl>
+          </a:graphicData>
+        </a:graphic>
+      </p:graphicFrame>
+      <p:sp>
+        <p:nvSpPr>
+          <p:cNvPr id="12" name="Text 9"/>
           <p:cNvSpPr txBox="1"/>
           <p:nvPr/>
         </p:nvSpPr>
         <p:spPr>
           <a:xfrm>
-            <a:off x="594360" y="1764792"/>
-            <a:ext cx="5370271" cy="374904"/>
+            <a:off x="502920" y="5303520"/>
+            <a:ext cx="11183112" cy="457200"/>
           </a:xfrm>
           <a:prstGeom prst="rect">
             <a:avLst/>
@@ -10746,46 +11893,7 @@
               <a:buNone/>
             </a:pPr>
             <a:r>
-              <a:rPr lang="ja-JP" altLang="en-US" sz="2200" b="1" dirty="0">
-                <a:solidFill>
-                  <a:srgbClr val="0072B2"/>
-                </a:solidFill>
-                <a:latin typeface="メイリオ" pitchFamily="34" charset="0"/>
-                <a:ea typeface="メイリオ" pitchFamily="34" charset="-122"/>
-                <a:cs typeface="メイリオ" pitchFamily="34" charset="-120"/>
-              </a:rPr>
-              <a:t>誰に相談するか</a:t>
-            </a:r>
-            <a:endParaRPr lang="ja-JP" sz="2200" dirty="0"/>
-          </a:p>
-        </p:txBody>
-      </p:sp>
-      <p:sp>
-        <p:nvSpPr>
-          <p:cNvPr id="14" name="Text 12"/>
-          <p:cNvSpPr txBox="1"/>
-          <p:nvPr/>
-        </p:nvSpPr>
-        <p:spPr>
-          <a:xfrm>
-            <a:off x="594360" y="2155241"/>
-            <a:ext cx="320040" cy="374904"/>
-          </a:xfrm>
-          <a:prstGeom prst="rect">
-            <a:avLst/>
-          </a:prstGeom>
-          <a:noFill/>
-          <a:ln/>
-        </p:spPr>
-        <p:txBody>
-          <a:bodyPr wrap="square" lIns="0" tIns="0" rIns="0" bIns="0" rtlCol="0" anchor="t"/>
-          <a:lstStyle/>
-          <a:p>
-            <a:pPr algn="l" indent="0" marL="0">
-              <a:buNone/>
-            </a:pPr>
-            <a:r>
-              <a:rPr lang="ja-JP" altLang="en-US" sz="2200" dirty="0">
+              <a:rPr lang="ja-JP" altLang="en-US" sz="2400" dirty="0">
                 <a:solidFill>
                   <a:srgbClr val="262626"/>
                 </a:solidFill>
@@ -10793,511 +11901,10 @@
                 <a:ea typeface="メイリオ" pitchFamily="34" charset="-122"/>
                 <a:cs typeface="メイリオ" pitchFamily="34" charset="-120"/>
               </a:rPr>
-              <a:t>•</a:t>
-            </a:r>
-            <a:endParaRPr lang="ja-JP" sz="2200" dirty="0"/>
-          </a:p>
-        </p:txBody>
-      </p:sp>
-      <p:sp>
-        <p:nvSpPr>
-          <p:cNvPr id="15" name="Text 13"/>
-          <p:cNvSpPr txBox="1"/>
-          <p:nvPr/>
-        </p:nvSpPr>
-        <p:spPr>
-          <a:xfrm>
-            <a:off x="850392" y="2155241"/>
-            <a:ext cx="5114239" cy="374904"/>
-          </a:xfrm>
-          <a:prstGeom prst="rect">
-            <a:avLst/>
-          </a:prstGeom>
-          <a:noFill/>
-          <a:ln/>
-        </p:spPr>
-        <p:txBody>
-          <a:bodyPr wrap="square" lIns="0" tIns="0" rIns="0" bIns="0" rtlCol="0" anchor="t"/>
-          <a:lstStyle/>
-          <a:p>
-            <a:pPr algn="l" indent="0" marL="0">
-              <a:buNone/>
-            </a:pPr>
-            <a:r>
-              <a:rPr lang="ja-JP" altLang="en-US" sz="2200" dirty="0">
-                <a:solidFill>
-                  <a:srgbClr val="262626"/>
-                </a:solidFill>
-                <a:latin typeface="メイリオ" pitchFamily="34" charset="0"/>
-                <a:ea typeface="メイリオ" pitchFamily="34" charset="-122"/>
-                <a:cs typeface="メイリオ" pitchFamily="34" charset="-120"/>
-              </a:rPr>
-              <a:t>抗凝固薬の処方医（診療所・内科）</a:t>
-            </a:r>
-            <a:endParaRPr lang="ja-JP" sz="2200" dirty="0"/>
-          </a:p>
-        </p:txBody>
-      </p:sp>
-      <p:sp>
-        <p:nvSpPr>
-          <p:cNvPr id="16" name="Text 14"/>
-          <p:cNvSpPr txBox="1"/>
-          <p:nvPr/>
-        </p:nvSpPr>
-        <p:spPr>
-          <a:xfrm>
-            <a:off x="594360" y="2593238"/>
-            <a:ext cx="320040" cy="374904"/>
-          </a:xfrm>
-          <a:prstGeom prst="rect">
-            <a:avLst/>
-          </a:prstGeom>
-          <a:noFill/>
-          <a:ln/>
-        </p:spPr>
-        <p:txBody>
-          <a:bodyPr wrap="square" lIns="0" tIns="0" rIns="0" bIns="0" rtlCol="0" anchor="t"/>
-          <a:lstStyle/>
-          <a:p>
-            <a:pPr algn="l" indent="0" marL="0">
-              <a:buNone/>
-            </a:pPr>
-            <a:r>
-              <a:rPr lang="ja-JP" altLang="en-US" sz="2200" dirty="0">
-                <a:solidFill>
-                  <a:srgbClr val="262626"/>
-                </a:solidFill>
-                <a:latin typeface="メイリオ" pitchFamily="34" charset="0"/>
-                <a:ea typeface="メイリオ" pitchFamily="34" charset="-122"/>
-                <a:cs typeface="メイリオ" pitchFamily="34" charset="-120"/>
-              </a:rPr>
-              <a:t>•</a:t>
-            </a:r>
-            <a:endParaRPr lang="ja-JP" sz="2200" dirty="0"/>
-          </a:p>
-        </p:txBody>
-      </p:sp>
-      <p:sp>
-        <p:nvSpPr>
-          <p:cNvPr id="17" name="Text 15"/>
-          <p:cNvSpPr txBox="1"/>
-          <p:nvPr/>
-        </p:nvSpPr>
-        <p:spPr>
-          <a:xfrm>
-            <a:off x="850392" y="2593238"/>
-            <a:ext cx="5114239" cy="374904"/>
-          </a:xfrm>
-          <a:prstGeom prst="rect">
-            <a:avLst/>
-          </a:prstGeom>
-          <a:noFill/>
-          <a:ln/>
-        </p:spPr>
-        <p:txBody>
-          <a:bodyPr wrap="square" lIns="0" tIns="0" rIns="0" bIns="0" rtlCol="0" anchor="t"/>
-          <a:lstStyle/>
-          <a:p>
-            <a:pPr algn="l" indent="0" marL="0">
-              <a:buNone/>
-            </a:pPr>
-            <a:r>
-              <a:rPr lang="ja-JP" altLang="en-US" sz="2200" b="1" dirty="0">
-                <a:solidFill>
-                  <a:srgbClr val="262626"/>
-                </a:solidFill>
-                <a:latin typeface="メイリオ" pitchFamily="34" charset="0"/>
-                <a:ea typeface="メイリオ" pitchFamily="34" charset="-122"/>
-                <a:cs typeface="メイリオ" pitchFamily="34" charset="-120"/>
-              </a:rPr>
-              <a:t>ステント後：</a:t>
-            </a:r>
-            <a:endParaRPr lang="ja-JP" sz="2200" dirty="0"/>
-          </a:p>
-        </p:txBody>
-      </p:sp>
-      <p:sp>
-        <p:nvSpPr>
-          <p:cNvPr id="18" name="Text 16"/>
-          <p:cNvSpPr txBox="1"/>
-          <p:nvPr/>
-        </p:nvSpPr>
-        <p:spPr>
-          <a:xfrm>
-            <a:off x="850392" y="2928823"/>
-            <a:ext cx="5114239" cy="374904"/>
-          </a:xfrm>
-          <a:prstGeom prst="rect">
-            <a:avLst/>
-          </a:prstGeom>
-          <a:noFill/>
-          <a:ln/>
-        </p:spPr>
-        <p:txBody>
-          <a:bodyPr wrap="square" lIns="0" tIns="0" rIns="0" bIns="0" rtlCol="0" anchor="t"/>
-          <a:lstStyle/>
-          <a:p>
-            <a:pPr algn="l" indent="0" marL="0">
-              <a:buNone/>
-            </a:pPr>
-            <a:r>
-              <a:rPr lang="ja-JP" altLang="en-US" sz="2200" dirty="0">
-                <a:solidFill>
-                  <a:srgbClr val="262626"/>
-                </a:solidFill>
-                <a:latin typeface="メイリオ" pitchFamily="34" charset="0"/>
-                <a:ea typeface="メイリオ" pitchFamily="34" charset="-122"/>
-                <a:cs typeface="メイリオ" pitchFamily="34" charset="-120"/>
-              </a:rPr>
-              <a:t>PCI 施行医・循環器内科</a:t>
-            </a:r>
-            <a:endParaRPr lang="ja-JP" sz="2200" dirty="0"/>
-          </a:p>
-        </p:txBody>
-      </p:sp>
-      <p:sp>
-        <p:nvSpPr>
-          <p:cNvPr id="19" name="Text 17"/>
-          <p:cNvSpPr txBox="1"/>
-          <p:nvPr/>
-        </p:nvSpPr>
-        <p:spPr>
-          <a:xfrm>
-            <a:off x="594360" y="3367735"/>
-            <a:ext cx="320040" cy="374904"/>
-          </a:xfrm>
-          <a:prstGeom prst="rect">
-            <a:avLst/>
-          </a:prstGeom>
-          <a:noFill/>
-          <a:ln/>
-        </p:spPr>
-        <p:txBody>
-          <a:bodyPr wrap="square" lIns="0" tIns="0" rIns="0" bIns="0" rtlCol="0" anchor="t"/>
-          <a:lstStyle/>
-          <a:p>
-            <a:pPr algn="l" indent="0" marL="0">
-              <a:buNone/>
-            </a:pPr>
-            <a:r>
-              <a:rPr lang="ja-JP" altLang="en-US" sz="2200" dirty="0">
-                <a:solidFill>
-                  <a:srgbClr val="262626"/>
-                </a:solidFill>
-                <a:latin typeface="メイリオ" pitchFamily="34" charset="0"/>
-                <a:ea typeface="メイリオ" pitchFamily="34" charset="-122"/>
-                <a:cs typeface="メイリオ" pitchFamily="34" charset="-120"/>
-              </a:rPr>
-              <a:t>•</a:t>
-            </a:r>
-            <a:endParaRPr lang="ja-JP" sz="2200" dirty="0"/>
-          </a:p>
-        </p:txBody>
-      </p:sp>
-      <p:sp>
-        <p:nvSpPr>
-          <p:cNvPr id="20" name="Text 18"/>
-          <p:cNvSpPr txBox="1"/>
-          <p:nvPr/>
-        </p:nvSpPr>
-        <p:spPr>
-          <a:xfrm>
-            <a:off x="850392" y="3367735"/>
-            <a:ext cx="5114239" cy="374904"/>
-          </a:xfrm>
-          <a:prstGeom prst="rect">
-            <a:avLst/>
-          </a:prstGeom>
-          <a:noFill/>
-          <a:ln/>
-        </p:spPr>
-        <p:txBody>
-          <a:bodyPr wrap="square" lIns="0" tIns="0" rIns="0" bIns="0" rtlCol="0" anchor="t"/>
-          <a:lstStyle/>
-          <a:p>
-            <a:pPr algn="l" indent="0" marL="0">
-              <a:buNone/>
-            </a:pPr>
-            <a:r>
-              <a:rPr lang="ja-JP" altLang="en-US" sz="2200" b="1" dirty="0">
-                <a:solidFill>
-                  <a:srgbClr val="262626"/>
-                </a:solidFill>
-                <a:latin typeface="メイリオ" pitchFamily="34" charset="0"/>
-                <a:ea typeface="メイリオ" pitchFamily="34" charset="-122"/>
-                <a:cs typeface="メイリオ" pitchFamily="34" charset="-120"/>
-              </a:rPr>
-              <a:t>機械弁：</a:t>
-            </a:r>
-            <a:r>
-              <a:rPr lang="ja-JP" altLang="en-US" sz="2200" dirty="0">
-                <a:solidFill>
-                  <a:srgbClr val="262626"/>
-                </a:solidFill>
-                <a:latin typeface="メイリオ" pitchFamily="34" charset="0"/>
-                <a:ea typeface="メイリオ" pitchFamily="34" charset="-122"/>
-                <a:cs typeface="メイリオ" pitchFamily="34" charset="-120"/>
-              </a:rPr>
-              <a:t>循環器内科・心臓血管外科</a:t>
-            </a:r>
-            <a:endParaRPr lang="ja-JP" sz="2200" dirty="0"/>
-          </a:p>
-        </p:txBody>
-      </p:sp>
-      <p:sp>
-        <p:nvSpPr>
-          <p:cNvPr id="21" name="Text 19"/>
-          <p:cNvSpPr txBox="1"/>
-          <p:nvPr/>
-        </p:nvSpPr>
-        <p:spPr>
-          <a:xfrm>
-            <a:off x="594360" y="3805733"/>
-            <a:ext cx="320040" cy="374904"/>
-          </a:xfrm>
-          <a:prstGeom prst="rect">
-            <a:avLst/>
-          </a:prstGeom>
-          <a:noFill/>
-          <a:ln/>
-        </p:spPr>
-        <p:txBody>
-          <a:bodyPr wrap="square" lIns="0" tIns="0" rIns="0" bIns="0" rtlCol="0" anchor="t"/>
-          <a:lstStyle/>
-          <a:p>
-            <a:pPr algn="l" indent="0" marL="0">
-              <a:buNone/>
-            </a:pPr>
-            <a:r>
-              <a:rPr lang="ja-JP" altLang="en-US" sz="2200" dirty="0">
-                <a:solidFill>
-                  <a:srgbClr val="262626"/>
-                </a:solidFill>
-                <a:latin typeface="メイリオ" pitchFamily="34" charset="0"/>
-                <a:ea typeface="メイリオ" pitchFamily="34" charset="-122"/>
-                <a:cs typeface="メイリオ" pitchFamily="34" charset="-120"/>
-              </a:rPr>
-              <a:t>•</a:t>
-            </a:r>
-            <a:endParaRPr lang="ja-JP" sz="2200" dirty="0"/>
-          </a:p>
-        </p:txBody>
-      </p:sp>
-      <p:sp>
-        <p:nvSpPr>
-          <p:cNvPr id="22" name="Text 20"/>
-          <p:cNvSpPr txBox="1"/>
-          <p:nvPr/>
-        </p:nvSpPr>
-        <p:spPr>
-          <a:xfrm>
-            <a:off x="850392" y="3805733"/>
-            <a:ext cx="5114239" cy="374904"/>
-          </a:xfrm>
-          <a:prstGeom prst="rect">
-            <a:avLst/>
-          </a:prstGeom>
-          <a:noFill/>
-          <a:ln/>
-        </p:spPr>
-        <p:txBody>
-          <a:bodyPr wrap="square" lIns="0" tIns="0" rIns="0" bIns="0" rtlCol="0" anchor="t"/>
-          <a:lstStyle/>
-          <a:p>
-            <a:pPr algn="l" indent="0" marL="0">
-              <a:buNone/>
-            </a:pPr>
-            <a:r>
-              <a:rPr lang="ja-JP" altLang="en-US" sz="2200" b="1" dirty="0">
-                <a:solidFill>
-                  <a:srgbClr val="262626"/>
-                </a:solidFill>
-                <a:latin typeface="メイリオ" pitchFamily="34" charset="0"/>
-                <a:ea typeface="メイリオ" pitchFamily="34" charset="-122"/>
-                <a:cs typeface="メイリオ" pitchFamily="34" charset="-120"/>
-              </a:rPr>
-              <a:t>3 か月以内の静脈血栓塞栓症：</a:t>
-            </a:r>
-            <a:endParaRPr lang="ja-JP" sz="2200" dirty="0"/>
-          </a:p>
-        </p:txBody>
-      </p:sp>
-      <p:sp>
-        <p:nvSpPr>
-          <p:cNvPr id="23" name="Text 21"/>
-          <p:cNvSpPr txBox="1"/>
-          <p:nvPr/>
-        </p:nvSpPr>
-        <p:spPr>
-          <a:xfrm>
-            <a:off x="850392" y="4141318"/>
-            <a:ext cx="5114239" cy="374904"/>
-          </a:xfrm>
-          <a:prstGeom prst="rect">
-            <a:avLst/>
-          </a:prstGeom>
-          <a:noFill/>
-          <a:ln/>
-        </p:spPr>
-        <p:txBody>
-          <a:bodyPr wrap="square" lIns="0" tIns="0" rIns="0" bIns="0" rtlCol="0" anchor="t"/>
-          <a:lstStyle/>
-          <a:p>
-            <a:pPr algn="l" indent="0" marL="0">
-              <a:buNone/>
-            </a:pPr>
-            <a:r>
-              <a:rPr lang="ja-JP" altLang="en-US" sz="2200" dirty="0">
-                <a:solidFill>
-                  <a:srgbClr val="262626"/>
-                </a:solidFill>
-                <a:latin typeface="メイリオ" pitchFamily="34" charset="0"/>
-                <a:ea typeface="メイリオ" pitchFamily="34" charset="-122"/>
-                <a:cs typeface="メイリオ" pitchFamily="34" charset="-120"/>
-              </a:rPr>
-              <a:t>延期を主科と</a:t>
-            </a:r>
-            <a:endParaRPr lang="ja-JP" sz="2200" dirty="0"/>
-          </a:p>
-        </p:txBody>
-      </p:sp>
-      <p:sp>
-        <p:nvSpPr>
-          <p:cNvPr id="24" name="Text 22"/>
-          <p:cNvSpPr txBox="1"/>
-          <p:nvPr/>
-        </p:nvSpPr>
-        <p:spPr>
-          <a:xfrm>
-            <a:off x="594360" y="4580230"/>
-            <a:ext cx="320040" cy="374904"/>
-          </a:xfrm>
-          <a:prstGeom prst="rect">
-            <a:avLst/>
-          </a:prstGeom>
-          <a:noFill/>
-          <a:ln/>
-        </p:spPr>
-        <p:txBody>
-          <a:bodyPr wrap="square" lIns="0" tIns="0" rIns="0" bIns="0" rtlCol="0" anchor="t"/>
-          <a:lstStyle/>
-          <a:p>
-            <a:pPr algn="l" indent="0" marL="0">
-              <a:buNone/>
-            </a:pPr>
-            <a:r>
-              <a:rPr lang="ja-JP" altLang="en-US" sz="2200" dirty="0">
-                <a:solidFill>
-                  <a:srgbClr val="262626"/>
-                </a:solidFill>
-                <a:latin typeface="メイリオ" pitchFamily="34" charset="0"/>
-                <a:ea typeface="メイリオ" pitchFamily="34" charset="-122"/>
-                <a:cs typeface="メイリオ" pitchFamily="34" charset="-120"/>
-              </a:rPr>
-              <a:t>•</a:t>
-            </a:r>
-            <a:endParaRPr lang="ja-JP" sz="2200" dirty="0"/>
-          </a:p>
-        </p:txBody>
-      </p:sp>
-      <p:sp>
-        <p:nvSpPr>
-          <p:cNvPr id="25" name="Text 23"/>
-          <p:cNvSpPr txBox="1"/>
-          <p:nvPr/>
-        </p:nvSpPr>
-        <p:spPr>
-          <a:xfrm>
-            <a:off x="850392" y="4580230"/>
-            <a:ext cx="5114239" cy="374904"/>
-          </a:xfrm>
-          <a:prstGeom prst="rect">
-            <a:avLst/>
-          </a:prstGeom>
-          <a:noFill/>
-          <a:ln/>
-        </p:spPr>
-        <p:txBody>
-          <a:bodyPr wrap="square" lIns="0" tIns="0" rIns="0" bIns="0" rtlCol="0" anchor="t"/>
-          <a:lstStyle/>
-          <a:p>
-            <a:pPr algn="l" indent="0" marL="0">
-              <a:buNone/>
-            </a:pPr>
-            <a:r>
-              <a:rPr lang="ja-JP" altLang="en-US" sz="2200" dirty="0">
-                <a:solidFill>
-                  <a:srgbClr val="262626"/>
-                </a:solidFill>
-                <a:latin typeface="メイリオ" pitchFamily="34" charset="0"/>
-                <a:ea typeface="メイリオ" pitchFamily="34" charset="-122"/>
-                <a:cs typeface="メイリオ" pitchFamily="34" charset="-120"/>
-              </a:rPr>
-              <a:t>迷ったら</a:t>
-            </a:r>
-            <a:r>
-              <a:rPr lang="ja-JP" altLang="en-US" sz="2200" b="1" dirty="0">
-                <a:solidFill>
-                  <a:srgbClr val="0072B2"/>
-                </a:solidFill>
-                <a:latin typeface="メイリオ" pitchFamily="34" charset="0"/>
-                <a:ea typeface="メイリオ" pitchFamily="34" charset="-122"/>
-                <a:cs typeface="メイリオ" pitchFamily="34" charset="-120"/>
-              </a:rPr>
-              <a:t>上級の麻酔科医に電話</a:t>
-            </a:r>
-            <a:endParaRPr lang="ja-JP" sz="2200" dirty="0"/>
-          </a:p>
-        </p:txBody>
-      </p:sp>
-      <p:sp>
-        <p:nvSpPr>
-          <p:cNvPr id="26" name="Shape 24"/>
-          <p:cNvSpPr/>
-          <p:nvPr/>
-        </p:nvSpPr>
-        <p:spPr>
-          <a:xfrm>
-            <a:off x="6275527" y="1691640"/>
-            <a:ext cx="5409590" cy="3374136"/>
-          </a:xfrm>
-          <a:prstGeom prst="roundRect">
-            <a:avLst>
-              <a:gd name="adj" fmla="val 2168"/>
-            </a:avLst>
-          </a:prstGeom>
-          <a:solidFill>
-            <a:srgbClr val="F2F2F2"/>
-          </a:solidFill>
-          <a:ln/>
-        </p:spPr>
-      </p:sp>
-      <p:sp>
-        <p:nvSpPr>
-          <p:cNvPr id="27" name="Text 25"/>
-          <p:cNvSpPr txBox="1"/>
-          <p:nvPr/>
-        </p:nvSpPr>
-        <p:spPr>
-          <a:xfrm>
-            <a:off x="6366967" y="1764792"/>
-            <a:ext cx="5226710" cy="374904"/>
-          </a:xfrm>
-          <a:prstGeom prst="rect">
-            <a:avLst/>
-          </a:prstGeom>
-          <a:noFill/>
-          <a:ln/>
-        </p:spPr>
-        <p:txBody>
-          <a:bodyPr wrap="square" lIns="0" tIns="0" rIns="0" bIns="0" rtlCol="0" anchor="t"/>
-          <a:lstStyle/>
-          <a:p>
-            <a:pPr algn="l" indent="0" marL="0">
-              <a:buNone/>
-            </a:pPr>
-            <a:r>
-              <a:rPr lang="ja-JP" altLang="en-US" sz="2200" b="1" dirty="0">
+              <a:t>抜去も穿刺と同じ基準。</a:t>
+            </a:r>
+            <a:r>
+              <a:rPr lang="ja-JP" altLang="en-US" sz="2400" b="1" dirty="0">
                 <a:solidFill>
                   <a:srgbClr val="D55E00"/>
                 </a:solidFill>
@@ -11305,477 +11912,9 @@
                 <a:ea typeface="メイリオ" pitchFamily="34" charset="-122"/>
                 <a:cs typeface="メイリオ" pitchFamily="34" charset="-120"/>
               </a:rPr>
-              <a:t>緊急手術</a:t>
-            </a:r>
-            <a:endParaRPr lang="ja-JP" sz="2200" dirty="0"/>
-          </a:p>
-        </p:txBody>
-      </p:sp>
-      <p:sp>
-        <p:nvSpPr>
-          <p:cNvPr id="28" name="Text 26"/>
-          <p:cNvSpPr txBox="1"/>
-          <p:nvPr/>
-        </p:nvSpPr>
-        <p:spPr>
-          <a:xfrm>
-            <a:off x="6366967" y="2155241"/>
-            <a:ext cx="320040" cy="374904"/>
-          </a:xfrm>
-          <a:prstGeom prst="rect">
-            <a:avLst/>
-          </a:prstGeom>
-          <a:noFill/>
-          <a:ln/>
-        </p:spPr>
-        <p:txBody>
-          <a:bodyPr wrap="square" lIns="0" tIns="0" rIns="0" bIns="0" rtlCol="0" anchor="t"/>
-          <a:lstStyle/>
-          <a:p>
-            <a:pPr algn="l" indent="0" marL="0">
-              <a:buNone/>
-            </a:pPr>
-            <a:r>
-              <a:rPr lang="ja-JP" altLang="en-US" sz="2200" dirty="0">
-                <a:solidFill>
-                  <a:srgbClr val="262626"/>
-                </a:solidFill>
-                <a:latin typeface="メイリオ" pitchFamily="34" charset="0"/>
-                <a:ea typeface="メイリオ" pitchFamily="34" charset="-122"/>
-                <a:cs typeface="メイリオ" pitchFamily="34" charset="-120"/>
-              </a:rPr>
-              <a:t>•</a:t>
-            </a:r>
-            <a:endParaRPr lang="ja-JP" sz="2200" dirty="0"/>
-          </a:p>
-        </p:txBody>
-      </p:sp>
-      <p:sp>
-        <p:nvSpPr>
-          <p:cNvPr id="29" name="Text 27"/>
-          <p:cNvSpPr txBox="1"/>
-          <p:nvPr/>
-        </p:nvSpPr>
-        <p:spPr>
-          <a:xfrm>
-            <a:off x="6622999" y="2155241"/>
-            <a:ext cx="4970678" cy="374904"/>
-          </a:xfrm>
-          <a:prstGeom prst="rect">
-            <a:avLst/>
-          </a:prstGeom>
-          <a:noFill/>
-          <a:ln/>
-        </p:spPr>
-        <p:txBody>
-          <a:bodyPr wrap="square" lIns="0" tIns="0" rIns="0" bIns="0" rtlCol="0" anchor="t"/>
-          <a:lstStyle/>
-          <a:p>
-            <a:pPr algn="l" indent="0" marL="0">
-              <a:buNone/>
-            </a:pPr>
-            <a:r>
-              <a:rPr lang="ja-JP" altLang="en-US" sz="2200" dirty="0">
-                <a:solidFill>
-                  <a:srgbClr val="262626"/>
-                </a:solidFill>
-                <a:latin typeface="メイリオ" pitchFamily="34" charset="0"/>
-                <a:ea typeface="メイリオ" pitchFamily="34" charset="-122"/>
-                <a:cs typeface="メイリオ" pitchFamily="34" charset="-120"/>
-              </a:rPr>
-              <a:t>休薬表は使えない。</a:t>
-            </a:r>
-            <a:endParaRPr lang="ja-JP" sz="2200" dirty="0"/>
-          </a:p>
-        </p:txBody>
-      </p:sp>
-      <p:sp>
-        <p:nvSpPr>
-          <p:cNvPr id="30" name="Text 28"/>
-          <p:cNvSpPr txBox="1"/>
-          <p:nvPr/>
-        </p:nvSpPr>
-        <p:spPr>
-          <a:xfrm>
-            <a:off x="6622999" y="2489911"/>
-            <a:ext cx="4970678" cy="374904"/>
-          </a:xfrm>
-          <a:prstGeom prst="rect">
-            <a:avLst/>
-          </a:prstGeom>
-          <a:noFill/>
-          <a:ln/>
-        </p:spPr>
-        <p:txBody>
-          <a:bodyPr wrap="square" lIns="0" tIns="0" rIns="0" bIns="0" rtlCol="0" anchor="t"/>
-          <a:lstStyle/>
-          <a:p>
-            <a:pPr algn="l" indent="0" marL="0">
-              <a:buNone/>
-            </a:pPr>
-            <a:r>
-              <a:rPr lang="ja-JP" altLang="en-US" sz="2200" dirty="0">
-                <a:solidFill>
-                  <a:srgbClr val="262626"/>
-                </a:solidFill>
-                <a:latin typeface="メイリオ" pitchFamily="34" charset="0"/>
-                <a:ea typeface="メイリオ" pitchFamily="34" charset="-122"/>
-                <a:cs typeface="メイリオ" pitchFamily="34" charset="-120"/>
-              </a:rPr>
-              <a:t>最終内服の時刻を聞く</a:t>
-            </a:r>
-            <a:endParaRPr lang="ja-JP" sz="2200" dirty="0"/>
-          </a:p>
-        </p:txBody>
-      </p:sp>
-      <p:sp>
-        <p:nvSpPr>
-          <p:cNvPr id="31" name="Text 29"/>
-          <p:cNvSpPr txBox="1"/>
-          <p:nvPr/>
-        </p:nvSpPr>
-        <p:spPr>
-          <a:xfrm>
-            <a:off x="6366967" y="2928823"/>
-            <a:ext cx="320040" cy="374904"/>
-          </a:xfrm>
-          <a:prstGeom prst="rect">
-            <a:avLst/>
-          </a:prstGeom>
-          <a:noFill/>
-          <a:ln/>
-        </p:spPr>
-        <p:txBody>
-          <a:bodyPr wrap="square" lIns="0" tIns="0" rIns="0" bIns="0" rtlCol="0" anchor="t"/>
-          <a:lstStyle/>
-          <a:p>
-            <a:pPr algn="l" indent="0" marL="0">
-              <a:buNone/>
-            </a:pPr>
-            <a:r>
-              <a:rPr lang="ja-JP" altLang="en-US" sz="2200" dirty="0">
-                <a:solidFill>
-                  <a:srgbClr val="262626"/>
-                </a:solidFill>
-                <a:latin typeface="メイリオ" pitchFamily="34" charset="0"/>
-                <a:ea typeface="メイリオ" pitchFamily="34" charset="-122"/>
-                <a:cs typeface="メイリオ" pitchFamily="34" charset="-120"/>
-              </a:rPr>
-              <a:t>•</a:t>
-            </a:r>
-            <a:endParaRPr lang="ja-JP" sz="2200" dirty="0"/>
-          </a:p>
-        </p:txBody>
-      </p:sp>
-      <p:sp>
-        <p:nvSpPr>
-          <p:cNvPr id="32" name="Text 30"/>
-          <p:cNvSpPr txBox="1"/>
-          <p:nvPr/>
-        </p:nvSpPr>
-        <p:spPr>
-          <a:xfrm>
-            <a:off x="6622999" y="2928823"/>
-            <a:ext cx="4970678" cy="374904"/>
-          </a:xfrm>
-          <a:prstGeom prst="rect">
-            <a:avLst/>
-          </a:prstGeom>
-          <a:noFill/>
-          <a:ln/>
-        </p:spPr>
-        <p:txBody>
-          <a:bodyPr wrap="square" lIns="0" tIns="0" rIns="0" bIns="0" rtlCol="0" anchor="t"/>
-          <a:lstStyle/>
-          <a:p>
-            <a:pPr algn="l" indent="0" marL="0">
-              <a:buNone/>
-            </a:pPr>
-            <a:r>
-              <a:rPr lang="ja-JP" altLang="en-US" sz="2200" b="1" dirty="0">
-                <a:solidFill>
-                  <a:srgbClr val="262626"/>
-                </a:solidFill>
-                <a:latin typeface="メイリオ" pitchFamily="34" charset="0"/>
-                <a:ea typeface="メイリオ" pitchFamily="34" charset="-122"/>
-                <a:cs typeface="メイリオ" pitchFamily="34" charset="-120"/>
-              </a:rPr>
-              <a:t>中和薬の在庫：</a:t>
-            </a:r>
-            <a:endParaRPr lang="ja-JP" sz="2200" dirty="0"/>
-          </a:p>
-        </p:txBody>
-      </p:sp>
-      <p:sp>
-        <p:nvSpPr>
-          <p:cNvPr id="33" name="Text 31"/>
-          <p:cNvSpPr txBox="1"/>
-          <p:nvPr/>
-        </p:nvSpPr>
-        <p:spPr>
-          <a:xfrm>
-            <a:off x="6622999" y="3264408"/>
-            <a:ext cx="4970678" cy="374904"/>
-          </a:xfrm>
-          <a:prstGeom prst="rect">
-            <a:avLst/>
-          </a:prstGeom>
-          <a:noFill/>
-          <a:ln/>
-        </p:spPr>
-        <p:txBody>
-          <a:bodyPr wrap="square" lIns="0" tIns="0" rIns="0" bIns="0" rtlCol="0" anchor="t"/>
-          <a:lstStyle/>
-          <a:p>
-            <a:pPr algn="l" indent="0" marL="0">
-              <a:buNone/>
-            </a:pPr>
-            <a:r>
-              <a:rPr lang="ja-JP" altLang="en-US" sz="2200" dirty="0">
-                <a:solidFill>
-                  <a:srgbClr val="262626"/>
-                </a:solidFill>
-                <a:latin typeface="メイリオ" pitchFamily="34" charset="0"/>
-                <a:ea typeface="メイリオ" pitchFamily="34" charset="-122"/>
-                <a:cs typeface="メイリオ" pitchFamily="34" charset="-120"/>
-              </a:rPr>
-              <a:t>ビタミン K、PCC、イダルシズマブ</a:t>
-            </a:r>
-            <a:endParaRPr lang="ja-JP" sz="2200" dirty="0"/>
-          </a:p>
-        </p:txBody>
-      </p:sp>
-      <p:sp>
-        <p:nvSpPr>
-          <p:cNvPr id="34" name="Text 32"/>
-          <p:cNvSpPr txBox="1"/>
-          <p:nvPr/>
-        </p:nvSpPr>
-        <p:spPr>
-          <a:xfrm>
-            <a:off x="6366967" y="3702406"/>
-            <a:ext cx="320040" cy="374904"/>
-          </a:xfrm>
-          <a:prstGeom prst="rect">
-            <a:avLst/>
-          </a:prstGeom>
-          <a:noFill/>
-          <a:ln/>
-        </p:spPr>
-        <p:txBody>
-          <a:bodyPr wrap="square" lIns="0" tIns="0" rIns="0" bIns="0" rtlCol="0" anchor="t"/>
-          <a:lstStyle/>
-          <a:p>
-            <a:pPr algn="l" indent="0" marL="0">
-              <a:buNone/>
-            </a:pPr>
-            <a:r>
-              <a:rPr lang="ja-JP" altLang="en-US" sz="2200" dirty="0">
-                <a:solidFill>
-                  <a:srgbClr val="262626"/>
-                </a:solidFill>
-                <a:latin typeface="メイリオ" pitchFamily="34" charset="0"/>
-                <a:ea typeface="メイリオ" pitchFamily="34" charset="-122"/>
-                <a:cs typeface="メイリオ" pitchFamily="34" charset="-120"/>
-              </a:rPr>
-              <a:t>•</a:t>
-            </a:r>
-            <a:endParaRPr lang="ja-JP" sz="2200" dirty="0"/>
-          </a:p>
-        </p:txBody>
-      </p:sp>
-      <p:sp>
-        <p:nvSpPr>
-          <p:cNvPr id="35" name="Text 33"/>
-          <p:cNvSpPr txBox="1"/>
-          <p:nvPr/>
-        </p:nvSpPr>
-        <p:spPr>
-          <a:xfrm>
-            <a:off x="6622999" y="3702406"/>
-            <a:ext cx="4970678" cy="374904"/>
-          </a:xfrm>
-          <a:prstGeom prst="rect">
-            <a:avLst/>
-          </a:prstGeom>
-          <a:noFill/>
-          <a:ln/>
-        </p:spPr>
-        <p:txBody>
-          <a:bodyPr wrap="square" lIns="0" tIns="0" rIns="0" bIns="0" rtlCol="0" anchor="t"/>
-          <a:lstStyle/>
-          <a:p>
-            <a:pPr algn="l" indent="0" marL="0">
-              <a:buNone/>
-            </a:pPr>
-            <a:r>
-              <a:rPr lang="ja-JP" altLang="en-US" sz="2200" dirty="0">
-                <a:solidFill>
-                  <a:srgbClr val="262626"/>
-                </a:solidFill>
-                <a:latin typeface="メイリオ" pitchFamily="34" charset="0"/>
-                <a:ea typeface="メイリオ" pitchFamily="34" charset="-122"/>
-                <a:cs typeface="メイリオ" pitchFamily="34" charset="-120"/>
-              </a:rPr>
-              <a:t>脊髄幹麻酔を避けて全身麻酔に</a:t>
-            </a:r>
-            <a:endParaRPr lang="ja-JP" sz="2200" dirty="0"/>
-          </a:p>
-        </p:txBody>
-      </p:sp>
-      <p:sp>
-        <p:nvSpPr>
-          <p:cNvPr id="36" name="Text 34"/>
-          <p:cNvSpPr txBox="1"/>
-          <p:nvPr/>
-        </p:nvSpPr>
-        <p:spPr>
-          <a:xfrm>
-            <a:off x="6366967" y="4141318"/>
-            <a:ext cx="320040" cy="374904"/>
-          </a:xfrm>
-          <a:prstGeom prst="rect">
-            <a:avLst/>
-          </a:prstGeom>
-          <a:noFill/>
-          <a:ln/>
-        </p:spPr>
-        <p:txBody>
-          <a:bodyPr wrap="square" lIns="0" tIns="0" rIns="0" bIns="0" rtlCol="0" anchor="t"/>
-          <a:lstStyle/>
-          <a:p>
-            <a:pPr algn="l" indent="0" marL="0">
-              <a:buNone/>
-            </a:pPr>
-            <a:r>
-              <a:rPr lang="ja-JP" altLang="en-US" sz="2200" dirty="0">
-                <a:solidFill>
-                  <a:srgbClr val="262626"/>
-                </a:solidFill>
-                <a:latin typeface="メイリオ" pitchFamily="34" charset="0"/>
-                <a:ea typeface="メイリオ" pitchFamily="34" charset="-122"/>
-                <a:cs typeface="メイリオ" pitchFamily="34" charset="-120"/>
-              </a:rPr>
-              <a:t>•</a:t>
-            </a:r>
-            <a:endParaRPr lang="ja-JP" sz="2200" dirty="0"/>
-          </a:p>
-        </p:txBody>
-      </p:sp>
-      <p:sp>
-        <p:nvSpPr>
-          <p:cNvPr id="37" name="Text 35"/>
-          <p:cNvSpPr txBox="1"/>
-          <p:nvPr/>
-        </p:nvSpPr>
-        <p:spPr>
-          <a:xfrm>
-            <a:off x="6622999" y="4141318"/>
-            <a:ext cx="4970678" cy="374904"/>
-          </a:xfrm>
-          <a:prstGeom prst="rect">
-            <a:avLst/>
-          </a:prstGeom>
-          <a:noFill/>
-          <a:ln/>
-        </p:spPr>
-        <p:txBody>
-          <a:bodyPr wrap="square" lIns="0" tIns="0" rIns="0" bIns="0" rtlCol="0" anchor="t"/>
-          <a:lstStyle/>
-          <a:p>
-            <a:pPr algn="l" indent="0" marL="0">
-              <a:buNone/>
-            </a:pPr>
-            <a:r>
-              <a:rPr lang="ja-JP" altLang="en-US" sz="2200" dirty="0">
-                <a:solidFill>
-                  <a:srgbClr val="262626"/>
-                </a:solidFill>
-                <a:latin typeface="メイリオ" pitchFamily="34" charset="0"/>
-                <a:ea typeface="メイリオ" pitchFamily="34" charset="-122"/>
-                <a:cs typeface="メイリオ" pitchFamily="34" charset="-120"/>
-              </a:rPr>
-              <a:t>血液製剤の準備（→ 4-4）</a:t>
-            </a:r>
-            <a:endParaRPr lang="ja-JP" sz="2200" dirty="0"/>
-          </a:p>
-        </p:txBody>
-      </p:sp>
-      <p:sp>
-        <p:nvSpPr>
-          <p:cNvPr id="38" name="Text 36"/>
-          <p:cNvSpPr txBox="1"/>
-          <p:nvPr/>
-        </p:nvSpPr>
-        <p:spPr>
-          <a:xfrm>
-            <a:off x="6366967" y="4580230"/>
-            <a:ext cx="320040" cy="374904"/>
-          </a:xfrm>
-          <a:prstGeom prst="rect">
-            <a:avLst/>
-          </a:prstGeom>
-          <a:noFill/>
-          <a:ln/>
-        </p:spPr>
-        <p:txBody>
-          <a:bodyPr wrap="square" lIns="0" tIns="0" rIns="0" bIns="0" rtlCol="0" anchor="t"/>
-          <a:lstStyle/>
-          <a:p>
-            <a:pPr algn="l" indent="0" marL="0">
-              <a:buNone/>
-            </a:pPr>
-            <a:r>
-              <a:rPr lang="ja-JP" altLang="en-US" sz="2200" dirty="0">
-                <a:solidFill>
-                  <a:srgbClr val="262626"/>
-                </a:solidFill>
-                <a:latin typeface="メイリオ" pitchFamily="34" charset="0"/>
-                <a:ea typeface="メイリオ" pitchFamily="34" charset="-122"/>
-                <a:cs typeface="メイリオ" pitchFamily="34" charset="-120"/>
-              </a:rPr>
-              <a:t>•</a:t>
-            </a:r>
-            <a:endParaRPr lang="ja-JP" sz="2200" dirty="0"/>
-          </a:p>
-        </p:txBody>
-      </p:sp>
-      <p:sp>
-        <p:nvSpPr>
-          <p:cNvPr id="39" name="Text 37"/>
-          <p:cNvSpPr txBox="1"/>
-          <p:nvPr/>
-        </p:nvSpPr>
-        <p:spPr>
-          <a:xfrm>
-            <a:off x="6622999" y="4580230"/>
-            <a:ext cx="4970678" cy="374904"/>
-          </a:xfrm>
-          <a:prstGeom prst="rect">
-            <a:avLst/>
-          </a:prstGeom>
-          <a:noFill/>
-          <a:ln/>
-        </p:spPr>
-        <p:txBody>
-          <a:bodyPr wrap="square" lIns="0" tIns="0" rIns="0" bIns="0" rtlCol="0" anchor="t"/>
-          <a:lstStyle/>
-          <a:p>
-            <a:pPr algn="l" indent="0" marL="0">
-              <a:buNone/>
-            </a:pPr>
-            <a:r>
-              <a:rPr lang="ja-JP" altLang="en-US" sz="2200" dirty="0">
-                <a:solidFill>
-                  <a:srgbClr val="262626"/>
-                </a:solidFill>
-                <a:latin typeface="メイリオ" pitchFamily="34" charset="0"/>
-                <a:ea typeface="メイリオ" pitchFamily="34" charset="-122"/>
-                <a:cs typeface="メイリオ" pitchFamily="34" charset="-120"/>
-              </a:rPr>
-              <a:t>DOAC は CrCl で残り方が違う</a:t>
-            </a:r>
-            <a:endParaRPr lang="ja-JP" sz="2200" dirty="0"/>
+              <a:t>抜去前の休薬と再開時刻を指示に書く</a:t>
+            </a:r>
+            <a:endParaRPr lang="ja-JP" sz="2400" dirty="0"/>
           </a:p>
         </p:txBody>
       </p:sp>
@@ -11846,7 +11985,7 @@
                 <a:ea typeface="メイリオ" pitchFamily="34" charset="-122"/>
                 <a:cs typeface="メイリオ" pitchFamily="34" charset="-120"/>
               </a:rPr>
-              <a:t>術前指示の書き方</a:t>
+              <a:t>相談先と緊急時</a:t>
             </a:r>
             <a:endParaRPr lang="ja-JP" sz="4400" dirty="0"/>
           </a:p>
@@ -12196,7 +12335,7 @@
                 <a:ea typeface="メイリオ" pitchFamily="34" charset="-122"/>
                 <a:cs typeface="メイリオ" pitchFamily="34" charset="-120"/>
               </a:rPr>
-              <a:t>Kopp SL, et al. Reg Anesth Pain Med 2025/Douketis JD, et al. JAMA Intern Med</a:t>
+              <a:t>日本循環器学会／日本不整脈心電学会 2020 年改訂版 不整脈薬物治療ガイドライン</a:t>
             </a:r>
             <a:endParaRPr lang="ja-JP" sz="1600" dirty="0"/>
           </a:p>
@@ -12213,7 +12352,7 @@
                 <a:ea typeface="メイリオ" pitchFamily="34" charset="-122"/>
                 <a:cs typeface="メイリオ" pitchFamily="34" charset="-120"/>
               </a:rPr>
-              <a:t>2019;179:1469-78/日本循環器学会／日本不整脈心電学会 2020 年改訂版不整脈薬物治療ガイドライン</a:t>
+              <a:t>Douketis JD, et al. Chest 2022;162:e207-e243/Iwasaki YK, et al. Circ J 2025;89:1012-1073</a:t>
             </a:r>
             <a:endParaRPr lang="ja-JP" sz="1600" dirty="0"/>
           </a:p>
@@ -12221,18 +12360,87 @@
       </p:sp>
       <p:sp>
         <p:nvSpPr>
-          <p:cNvPr id="11" name="Shape 9"/>
+          <p:cNvPr id="11" name="Text 9"/>
           <p:cNvSpPr/>
           <p:nvPr/>
         </p:nvSpPr>
         <p:spPr>
           <a:xfrm>
-            <a:off x="502920" y="1664208"/>
-            <a:ext cx="11183112" cy="3538728"/>
+            <a:off x="502920" y="5285232"/>
+            <a:ext cx="11183112" cy="603504"/>
           </a:xfrm>
           <a:prstGeom prst="roundRect">
             <a:avLst>
-              <a:gd name="adj" fmla="val 2067"/>
+              <a:gd name="adj" fmla="val 15152"/>
+            </a:avLst>
+          </a:prstGeom>
+          <a:solidFill>
+            <a:srgbClr val="FFFFFF"/>
+          </a:solidFill>
+          <a:ln w="44450">
+            <a:solidFill>
+              <a:srgbClr val="00A8AA"/>
+            </a:solidFill>
+          </a:ln>
+        </p:spPr>
+        <p:txBody>
+          <a:bodyPr wrap="square" lIns="73152" tIns="73152" rIns="73152" bIns="73152" rtlCol="0" anchor="ctr"/>
+          <a:lstStyle/>
+          <a:p>
+            <a:pPr algn="ctr" indent="0" marL="0">
+              <a:buNone/>
+            </a:pPr>
+            <a:r>
+              <a:rPr lang="ja-JP" altLang="en-US" sz="2400" b="1" dirty="0">
+                <a:solidFill>
+                  <a:srgbClr val="262626"/>
+                </a:solidFill>
+                <a:latin typeface="メイリオ" pitchFamily="34" charset="0"/>
+                <a:ea typeface="メイリオ" pitchFamily="34" charset="-122"/>
+                <a:cs typeface="メイリオ" pitchFamily="34" charset="-120"/>
+              </a:rPr>
+              <a:t>休薬・再開の判断と相談した相手を</a:t>
+            </a:r>
+            <a:r>
+              <a:rPr lang="ja-JP" altLang="en-US" sz="2400" b="1" dirty="0">
+                <a:solidFill>
+                  <a:srgbClr val="D55E00"/>
+                </a:solidFill>
+                <a:latin typeface="メイリオ" pitchFamily="34" charset="0"/>
+                <a:ea typeface="メイリオ" pitchFamily="34" charset="-122"/>
+                <a:cs typeface="メイリオ" pitchFamily="34" charset="-120"/>
+              </a:rPr>
+              <a:t>記録に残し</a:t>
+            </a:r>
+            <a:r>
+              <a:rPr lang="ja-JP" altLang="en-US" sz="2400" b="1" dirty="0">
+                <a:solidFill>
+                  <a:srgbClr val="262626"/>
+                </a:solidFill>
+                <a:latin typeface="メイリオ" pitchFamily="34" charset="0"/>
+                <a:ea typeface="メイリオ" pitchFamily="34" charset="-122"/>
+                <a:cs typeface="メイリオ" pitchFamily="34" charset="-120"/>
+              </a:rPr>
+              <a:t>、患者にも説明する</a:t>
+            </a:r>
+            <a:endParaRPr lang="ja-JP" sz="2400" dirty="0"/>
+          </a:p>
+        </p:txBody>
+      </p:sp>
+      <p:sp>
+        <p:nvSpPr>
+          <p:cNvPr id="12" name="Shape 10"/>
+          <p:cNvSpPr/>
+          <p:nvPr/>
+        </p:nvSpPr>
+        <p:spPr>
+          <a:xfrm>
+            <a:off x="502920" y="1691640"/>
+            <a:ext cx="5553151" cy="3374136"/>
+          </a:xfrm>
+          <a:prstGeom prst="roundRect">
+            <a:avLst>
+              <a:gd name="adj" fmla="val 2168"/>
             </a:avLst>
           </a:prstGeom>
           <a:solidFill>
@@ -12243,14 +12451,14 @@
       </p:sp>
       <p:sp>
         <p:nvSpPr>
-          <p:cNvPr id="12" name="Text 10"/>
+          <p:cNvPr id="13" name="Text 11"/>
           <p:cNvSpPr txBox="1"/>
           <p:nvPr/>
         </p:nvSpPr>
         <p:spPr>
           <a:xfrm>
-            <a:off x="585216" y="1755648"/>
-            <a:ext cx="11018520" cy="374904"/>
+            <a:off x="594360" y="1764792"/>
+            <a:ext cx="5370271" cy="374904"/>
           </a:xfrm>
           <a:prstGeom prst="rect">
             <a:avLst/>
@@ -12274,29 +12482,7 @@
                 <a:ea typeface="メイリオ" pitchFamily="34" charset="-122"/>
                 <a:cs typeface="メイリオ" pitchFamily="34" charset="-120"/>
               </a:rPr>
-              <a:t>患者 A（心房細動）</a:t>
-            </a:r>
-            <a:r>
-              <a:rPr lang="ja-JP" altLang="en-US" sz="2200" b="1" dirty="0">
-                <a:solidFill>
-                  <a:srgbClr val="262626"/>
-                </a:solidFill>
-                <a:latin typeface="メイリオ" pitchFamily="34" charset="0"/>
-                <a:ea typeface="メイリオ" pitchFamily="34" charset="-122"/>
-                <a:cs typeface="メイリオ" pitchFamily="34" charset="-120"/>
-              </a:rPr>
-              <a:t>エリキュース 5 mg 1 日 2 回</a:t>
-            </a:r>
-            <a:r>
-              <a:rPr lang="ja-JP" altLang="en-US" sz="2200" dirty="0">
-                <a:solidFill>
-                  <a:srgbClr val="262626"/>
-                </a:solidFill>
-                <a:latin typeface="メイリオ" pitchFamily="34" charset="0"/>
-                <a:ea typeface="メイリオ" pitchFamily="34" charset="-122"/>
-                <a:cs typeface="メイリオ" pitchFamily="34" charset="-120"/>
-              </a:rPr>
-              <a:t>：最終内服は</a:t>
+              <a:t>誰に相談するか</a:t>
             </a:r>
             <a:endParaRPr lang="ja-JP" sz="2200" dirty="0"/>
           </a:p>
@@ -12304,14 +12490,14 @@
       </p:sp>
       <p:sp>
         <p:nvSpPr>
-          <p:cNvPr id="13" name="Text 11"/>
+          <p:cNvPr id="14" name="Text 12"/>
           <p:cNvSpPr txBox="1"/>
           <p:nvPr/>
         </p:nvSpPr>
         <p:spPr>
           <a:xfrm>
-            <a:off x="896112" y="2127809"/>
-            <a:ext cx="10707624" cy="374904"/>
+            <a:off x="594360" y="2155241"/>
+            <a:ext cx="320040" cy="374904"/>
           </a:xfrm>
           <a:prstGeom prst="rect">
             <a:avLst/>
@@ -12335,7 +12521,7 @@
                 <a:ea typeface="メイリオ" pitchFamily="34" charset="-122"/>
                 <a:cs typeface="メイリオ" pitchFamily="34" charset="-120"/>
               </a:rPr>
-              <a:t>手術 4 日前の夜（◯/◯ 20 時）。脊髄くも膜下麻酔の予定のため</a:t>
+              <a:t>•</a:t>
             </a:r>
             <a:endParaRPr lang="ja-JP" sz="2200" dirty="0"/>
           </a:p>
@@ -12343,14 +12529,14 @@
       </p:sp>
       <p:sp>
         <p:nvSpPr>
-          <p:cNvPr id="14" name="Text 12"/>
+          <p:cNvPr id="15" name="Text 13"/>
           <p:cNvSpPr txBox="1"/>
           <p:nvPr/>
         </p:nvSpPr>
         <p:spPr>
           <a:xfrm>
-            <a:off x="896112" y="2462479"/>
-            <a:ext cx="10707624" cy="374904"/>
+            <a:off x="850392" y="2155241"/>
+            <a:ext cx="5114239" cy="374904"/>
           </a:xfrm>
           <a:prstGeom prst="rect">
             <a:avLst/>
@@ -12366,17 +12552,6 @@
               <a:buNone/>
             </a:pPr>
             <a:r>
-              <a:rPr lang="ja-JP" altLang="en-US" sz="2200" b="1" dirty="0">
-                <a:solidFill>
-                  <a:srgbClr val="D55E00"/>
-                </a:solidFill>
-                <a:latin typeface="メイリオ" pitchFamily="34" charset="0"/>
-                <a:ea typeface="メイリオ" pitchFamily="34" charset="-122"/>
-                <a:cs typeface="メイリオ" pitchFamily="34" charset="-120"/>
-              </a:rPr>
-              <a:t>72 時間以上</a:t>
-            </a:r>
-            <a:r>
               <a:rPr lang="ja-JP" altLang="en-US" sz="2200" dirty="0">
                 <a:solidFill>
                   <a:srgbClr val="262626"/>
@@ -12385,7 +12560,7 @@
                 <a:ea typeface="メイリオ" pitchFamily="34" charset="-122"/>
                 <a:cs typeface="メイリオ" pitchFamily="34" charset="-120"/>
               </a:rPr>
-              <a:t>あける（9 時入室で約 85 時間）。ブリッジなし</a:t>
+              <a:t>抗凝固薬の処方医（診療所・内科）</a:t>
             </a:r>
             <a:endParaRPr lang="ja-JP" sz="2200" dirty="0"/>
           </a:p>
@@ -12393,14 +12568,14 @@
       </p:sp>
       <p:sp>
         <p:nvSpPr>
-          <p:cNvPr id="15" name="Text 13"/>
+          <p:cNvPr id="16" name="Text 14"/>
           <p:cNvSpPr txBox="1"/>
           <p:nvPr/>
         </p:nvSpPr>
         <p:spPr>
           <a:xfrm>
-            <a:off x="585216" y="2852928"/>
-            <a:ext cx="11018520" cy="374904"/>
+            <a:off x="594360" y="2593238"/>
+            <a:ext cx="320040" cy="374904"/>
           </a:xfrm>
           <a:prstGeom prst="rect">
             <a:avLst/>
@@ -12416,7 +12591,7 @@
               <a:buNone/>
             </a:pPr>
             <a:r>
-              <a:rPr lang="ja-JP" altLang="en-US" sz="2200" b="1" dirty="0">
+              <a:rPr lang="ja-JP" altLang="en-US" sz="2200" dirty="0">
                 <a:solidFill>
                   <a:srgbClr val="262626"/>
                 </a:solidFill>
@@ -12424,45 +12599,11 @@
                 <a:ea typeface="メイリオ" pitchFamily="34" charset="-122"/>
                 <a:cs typeface="メイリオ" pitchFamily="34" charset="-120"/>
               </a:rPr>
-              <a:t>再開：</a:t>
-            </a:r>
-            <a:r>
-              <a:rPr lang="ja-JP" altLang="en-US" sz="2200" dirty="0">
-                <a:solidFill>
-                  <a:srgbClr val="262626"/>
-                </a:solidFill>
-                <a:latin typeface="メイリオ" pitchFamily="34" charset="0"/>
-                <a:ea typeface="メイリオ" pitchFamily="34" charset="-122"/>
-                <a:cs typeface="メイリオ" pitchFamily="34" charset="-120"/>
-              </a:rPr>
-              <a:t>術後 2 日目の夜、止血を確認してから。処方医（◯◯内科）に連絡済み</a:t>
+              <a:t>•</a:t>
             </a:r>
             <a:endParaRPr lang="ja-JP" sz="2200" dirty="0"/>
           </a:p>
         </p:txBody>
-      </p:sp>
-      <p:sp>
-        <p:nvSpPr>
-          <p:cNvPr id="16" name="Shape 14"/>
-          <p:cNvSpPr/>
-          <p:nvPr/>
-        </p:nvSpPr>
-        <p:spPr>
-          <a:xfrm>
-            <a:off x="585216" y="3266237"/>
-            <a:ext cx="11018520" cy="0"/>
-          </a:xfrm>
-          <a:prstGeom prst="line">
-            <a:avLst/>
-          </a:prstGeom>
-          <a:noFill/>
-          <a:ln w="12700">
-            <a:solidFill>
-              <a:srgbClr val="BFBFBF"/>
-            </a:solidFill>
-            <a:prstDash val="solid"/>
-          </a:ln>
-        </p:spPr>
       </p:sp>
       <p:sp>
         <p:nvSpPr>
@@ -12472,8 +12613,8 @@
         </p:nvSpPr>
         <p:spPr>
           <a:xfrm>
-            <a:off x="585216" y="3343961"/>
-            <a:ext cx="11018520" cy="374904"/>
+            <a:off x="850392" y="2593238"/>
+            <a:ext cx="5114239" cy="374904"/>
           </a:xfrm>
           <a:prstGeom prst="rect">
             <a:avLst/>
@@ -12491,35 +12632,13 @@
             <a:r>
               <a:rPr lang="ja-JP" altLang="en-US" sz="2200" b="1" dirty="0">
                 <a:solidFill>
-                  <a:srgbClr val="0072B2"/>
-                </a:solidFill>
-                <a:latin typeface="メイリオ" pitchFamily="34" charset="0"/>
-                <a:ea typeface="メイリオ" pitchFamily="34" charset="-122"/>
-                <a:cs typeface="メイリオ" pitchFamily="34" charset="-120"/>
-              </a:rPr>
-              <a:t>患者 B（ステント留置 2 年前）</a:t>
-            </a:r>
-            <a:r>
-              <a:rPr lang="ja-JP" altLang="en-US" sz="2200" b="1" dirty="0">
-                <a:solidFill>
                   <a:srgbClr val="262626"/>
                 </a:solidFill>
                 <a:latin typeface="メイリオ" pitchFamily="34" charset="0"/>
                 <a:ea typeface="メイリオ" pitchFamily="34" charset="-122"/>
                 <a:cs typeface="メイリオ" pitchFamily="34" charset="-120"/>
               </a:rPr>
-              <a:t>バイアスピリン 100 mg</a:t>
-            </a:r>
-            <a:r>
-              <a:rPr lang="ja-JP" altLang="en-US" sz="2200" dirty="0">
-                <a:solidFill>
-                  <a:srgbClr val="262626"/>
-                </a:solidFill>
-                <a:latin typeface="メイリオ" pitchFamily="34" charset="0"/>
-                <a:ea typeface="メイリオ" pitchFamily="34" charset="-122"/>
-                <a:cs typeface="メイリオ" pitchFamily="34" charset="-120"/>
-              </a:rPr>
-              <a:t>：継続</a:t>
+              <a:t>ステント後：</a:t>
             </a:r>
             <a:endParaRPr lang="ja-JP" sz="2200" dirty="0"/>
           </a:p>
@@ -12533,8 +12652,8 @@
         </p:nvSpPr>
         <p:spPr>
           <a:xfrm>
-            <a:off x="585216" y="3733495"/>
-            <a:ext cx="11018520" cy="374904"/>
+            <a:off x="850392" y="2928823"/>
+            <a:ext cx="5114239" cy="374904"/>
           </a:xfrm>
           <a:prstGeom prst="rect">
             <a:avLst/>
@@ -12550,7 +12669,7 @@
               <a:buNone/>
             </a:pPr>
             <a:r>
-              <a:rPr lang="ja-JP" altLang="en-US" sz="2200" b="1" dirty="0">
+              <a:rPr lang="ja-JP" altLang="en-US" sz="2200" dirty="0">
                 <a:solidFill>
                   <a:srgbClr val="262626"/>
                 </a:solidFill>
@@ -12558,18 +12677,7 @@
                 <a:ea typeface="メイリオ" pitchFamily="34" charset="-122"/>
                 <a:cs typeface="メイリオ" pitchFamily="34" charset="-120"/>
               </a:rPr>
-              <a:t>クロピドグレル 75 mg</a:t>
-            </a:r>
-            <a:r>
-              <a:rPr lang="ja-JP" altLang="en-US" sz="2200" dirty="0">
-                <a:solidFill>
-                  <a:srgbClr val="262626"/>
-                </a:solidFill>
-                <a:latin typeface="メイリオ" pitchFamily="34" charset="0"/>
-                <a:ea typeface="メイリオ" pitchFamily="34" charset="-122"/>
-                <a:cs typeface="メイリオ" pitchFamily="34" charset="-120"/>
-              </a:rPr>
-              <a:t>：PCI 施行医（循環器 ◯◯医師）と相談し、</a:t>
+              <a:t>PCI 施行医・循環器内科</a:t>
             </a:r>
             <a:endParaRPr lang="ja-JP" sz="2200" dirty="0"/>
           </a:p>
@@ -12583,8 +12691,8 @@
         </p:nvSpPr>
         <p:spPr>
           <a:xfrm>
-            <a:off x="896112" y="4105656"/>
-            <a:ext cx="10707624" cy="374904"/>
+            <a:off x="594360" y="3367735"/>
+            <a:ext cx="320040" cy="374904"/>
           </a:xfrm>
           <a:prstGeom prst="rect">
             <a:avLst/>
@@ -12608,7 +12716,7 @@
                 <a:ea typeface="メイリオ" pitchFamily="34" charset="-122"/>
                 <a:cs typeface="メイリオ" pitchFamily="34" charset="-120"/>
               </a:rPr>
-              <a:t>最終内服は手術 7 日前の朝（◯/◯ 8 時）。</a:t>
+              <a:t>•</a:t>
             </a:r>
             <a:endParaRPr lang="ja-JP" sz="2200" dirty="0"/>
           </a:p>
@@ -12622,8 +12730,8 @@
         </p:nvSpPr>
         <p:spPr>
           <a:xfrm>
-            <a:off x="896112" y="4441241"/>
-            <a:ext cx="10707624" cy="374904"/>
+            <a:off x="850392" y="3367735"/>
+            <a:ext cx="5114239" cy="374904"/>
           </a:xfrm>
           <a:prstGeom prst="rect">
             <a:avLst/>
@@ -12639,6 +12747,17 @@
               <a:buNone/>
             </a:pPr>
             <a:r>
+              <a:rPr lang="ja-JP" altLang="en-US" sz="2200" b="1" dirty="0">
+                <a:solidFill>
+                  <a:srgbClr val="262626"/>
+                </a:solidFill>
+                <a:latin typeface="メイリオ" pitchFamily="34" charset="0"/>
+                <a:ea typeface="メイリオ" pitchFamily="34" charset="-122"/>
+                <a:cs typeface="メイリオ" pitchFamily="34" charset="-120"/>
+              </a:rPr>
+              <a:t>機械弁：</a:t>
+            </a:r>
+            <a:r>
               <a:rPr lang="ja-JP" altLang="en-US" sz="2200" dirty="0">
                 <a:solidFill>
                   <a:srgbClr val="262626"/>
@@ -12647,29 +12766,7 @@
                 <a:ea typeface="メイリオ" pitchFamily="34" charset="-122"/>
                 <a:cs typeface="メイリオ" pitchFamily="34" charset="-120"/>
               </a:rPr>
-              <a:t>脊髄くも膜下麻酔のため </a:t>
-            </a:r>
-            <a:r>
-              <a:rPr lang="ja-JP" altLang="en-US" sz="2200" b="1" dirty="0">
-                <a:solidFill>
-                  <a:srgbClr val="D55E00"/>
-                </a:solidFill>
-                <a:latin typeface="メイリオ" pitchFamily="34" charset="0"/>
-                <a:ea typeface="メイリオ" pitchFamily="34" charset="-122"/>
-                <a:cs typeface="メイリオ" pitchFamily="34" charset="-120"/>
-              </a:rPr>
-              <a:t>7 日以上</a:t>
-            </a:r>
-            <a:r>
-              <a:rPr lang="ja-JP" altLang="en-US" sz="2200" dirty="0">
-                <a:solidFill>
-                  <a:srgbClr val="262626"/>
-                </a:solidFill>
-                <a:latin typeface="メイリオ" pitchFamily="34" charset="0"/>
-                <a:ea typeface="メイリオ" pitchFamily="34" charset="-122"/>
-                <a:cs typeface="メイリオ" pitchFamily="34" charset="-120"/>
-              </a:rPr>
-              <a:t>あける。再開は止血を確認してから</a:t>
+              <a:t>循環器内科・心臓血管外科</a:t>
             </a:r>
             <a:endParaRPr lang="ja-JP" sz="2200" dirty="0"/>
           </a:p>
@@ -12683,8 +12780,8 @@
         </p:nvSpPr>
         <p:spPr>
           <a:xfrm>
-            <a:off x="896112" y="4775911"/>
-            <a:ext cx="10707624" cy="374904"/>
+            <a:off x="594360" y="3805733"/>
+            <a:ext cx="320040" cy="374904"/>
           </a:xfrm>
           <a:prstGeom prst="rect">
             <a:avLst/>
@@ -12708,7 +12805,7 @@
                 <a:ea typeface="メイリオ" pitchFamily="34" charset="-122"/>
                 <a:cs typeface="メイリオ" pitchFamily="34" charset="-120"/>
               </a:rPr>
-              <a:t>（負荷投与なら穿刺から 6 時間以上後）</a:t>
+              <a:t>•</a:t>
             </a:r>
             <a:endParaRPr lang="ja-JP" sz="2200" dirty="0"/>
           </a:p>
@@ -12722,8 +12819,8 @@
         </p:nvSpPr>
         <p:spPr>
           <a:xfrm>
-            <a:off x="502920" y="5426964"/>
-            <a:ext cx="11183112" cy="457200"/>
+            <a:off x="850392" y="3805733"/>
+            <a:ext cx="5114239" cy="374904"/>
           </a:xfrm>
           <a:prstGeom prst="rect">
             <a:avLst/>
@@ -12735,11 +12832,11 @@
           <a:bodyPr wrap="square" lIns="0" tIns="0" rIns="0" bIns="0" rtlCol="0" anchor="t"/>
           <a:lstStyle/>
           <a:p>
-            <a:pPr algn="ctr" indent="0" marL="0">
-              <a:buNone/>
-            </a:pPr>
-            <a:r>
-              <a:rPr lang="ja-JP" altLang="en-US" sz="2400" b="1" dirty="0">
+            <a:pPr algn="l" indent="0" marL="0">
+              <a:buNone/>
+            </a:pPr>
+            <a:r>
+              <a:rPr lang="ja-JP" altLang="en-US" sz="2200" b="1" dirty="0">
                 <a:solidFill>
                   <a:srgbClr val="262626"/>
                 </a:solidFill>
@@ -12747,10 +12844,188 @@
                 <a:ea typeface="メイリオ" pitchFamily="34" charset="-122"/>
                 <a:cs typeface="メイリオ" pitchFamily="34" charset="-120"/>
               </a:rPr>
-              <a:t>『◯日前から中止』ではなく、</a:t>
-            </a:r>
-            <a:r>
-              <a:rPr lang="ja-JP" altLang="en-US" sz="2400" b="1" dirty="0">
+              <a:t>3 か月以内の静脈血栓塞栓症：</a:t>
+            </a:r>
+            <a:endParaRPr lang="ja-JP" sz="2200" dirty="0"/>
+          </a:p>
+        </p:txBody>
+      </p:sp>
+      <p:sp>
+        <p:nvSpPr>
+          <p:cNvPr id="23" name="Text 21"/>
+          <p:cNvSpPr txBox="1"/>
+          <p:nvPr/>
+        </p:nvSpPr>
+        <p:spPr>
+          <a:xfrm>
+            <a:off x="850392" y="4141318"/>
+            <a:ext cx="5114239" cy="374904"/>
+          </a:xfrm>
+          <a:prstGeom prst="rect">
+            <a:avLst/>
+          </a:prstGeom>
+          <a:noFill/>
+          <a:ln/>
+        </p:spPr>
+        <p:txBody>
+          <a:bodyPr wrap="square" lIns="0" tIns="0" rIns="0" bIns="0" rtlCol="0" anchor="t"/>
+          <a:lstStyle/>
+          <a:p>
+            <a:pPr algn="l" indent="0" marL="0">
+              <a:buNone/>
+            </a:pPr>
+            <a:r>
+              <a:rPr lang="ja-JP" altLang="en-US" sz="2200" dirty="0">
+                <a:solidFill>
+                  <a:srgbClr val="262626"/>
+                </a:solidFill>
+                <a:latin typeface="メイリオ" pitchFamily="34" charset="0"/>
+                <a:ea typeface="メイリオ" pitchFamily="34" charset="-122"/>
+                <a:cs typeface="メイリオ" pitchFamily="34" charset="-120"/>
+              </a:rPr>
+              <a:t>延期を主科と</a:t>
+            </a:r>
+            <a:endParaRPr lang="ja-JP" sz="2200" dirty="0"/>
+          </a:p>
+        </p:txBody>
+      </p:sp>
+      <p:sp>
+        <p:nvSpPr>
+          <p:cNvPr id="24" name="Text 22"/>
+          <p:cNvSpPr txBox="1"/>
+          <p:nvPr/>
+        </p:nvSpPr>
+        <p:spPr>
+          <a:xfrm>
+            <a:off x="594360" y="4580230"/>
+            <a:ext cx="320040" cy="374904"/>
+          </a:xfrm>
+          <a:prstGeom prst="rect">
+            <a:avLst/>
+          </a:prstGeom>
+          <a:noFill/>
+          <a:ln/>
+        </p:spPr>
+        <p:txBody>
+          <a:bodyPr wrap="square" lIns="0" tIns="0" rIns="0" bIns="0" rtlCol="0" anchor="t"/>
+          <a:lstStyle/>
+          <a:p>
+            <a:pPr algn="l" indent="0" marL="0">
+              <a:buNone/>
+            </a:pPr>
+            <a:r>
+              <a:rPr lang="ja-JP" altLang="en-US" sz="2200" dirty="0">
+                <a:solidFill>
+                  <a:srgbClr val="262626"/>
+                </a:solidFill>
+                <a:latin typeface="メイリオ" pitchFamily="34" charset="0"/>
+                <a:ea typeface="メイリオ" pitchFamily="34" charset="-122"/>
+                <a:cs typeface="メイリオ" pitchFamily="34" charset="-120"/>
+              </a:rPr>
+              <a:t>•</a:t>
+            </a:r>
+            <a:endParaRPr lang="ja-JP" sz="2200" dirty="0"/>
+          </a:p>
+        </p:txBody>
+      </p:sp>
+      <p:sp>
+        <p:nvSpPr>
+          <p:cNvPr id="25" name="Text 23"/>
+          <p:cNvSpPr txBox="1"/>
+          <p:nvPr/>
+        </p:nvSpPr>
+        <p:spPr>
+          <a:xfrm>
+            <a:off x="850392" y="4580230"/>
+            <a:ext cx="5114239" cy="374904"/>
+          </a:xfrm>
+          <a:prstGeom prst="rect">
+            <a:avLst/>
+          </a:prstGeom>
+          <a:noFill/>
+          <a:ln/>
+        </p:spPr>
+        <p:txBody>
+          <a:bodyPr wrap="square" lIns="0" tIns="0" rIns="0" bIns="0" rtlCol="0" anchor="t"/>
+          <a:lstStyle/>
+          <a:p>
+            <a:pPr algn="l" indent="0" marL="0">
+              <a:buNone/>
+            </a:pPr>
+            <a:r>
+              <a:rPr lang="ja-JP" altLang="en-US" sz="2200" dirty="0">
+                <a:solidFill>
+                  <a:srgbClr val="262626"/>
+                </a:solidFill>
+                <a:latin typeface="メイリオ" pitchFamily="34" charset="0"/>
+                <a:ea typeface="メイリオ" pitchFamily="34" charset="-122"/>
+                <a:cs typeface="メイリオ" pitchFamily="34" charset="-120"/>
+              </a:rPr>
+              <a:t>迷ったら</a:t>
+            </a:r>
+            <a:r>
+              <a:rPr lang="ja-JP" altLang="en-US" sz="2200" b="1" dirty="0">
+                <a:solidFill>
+                  <a:srgbClr val="0072B2"/>
+                </a:solidFill>
+                <a:latin typeface="メイリオ" pitchFamily="34" charset="0"/>
+                <a:ea typeface="メイリオ" pitchFamily="34" charset="-122"/>
+                <a:cs typeface="メイリオ" pitchFamily="34" charset="-120"/>
+              </a:rPr>
+              <a:t>上級の麻酔科医に電話</a:t>
+            </a:r>
+            <a:endParaRPr lang="ja-JP" sz="2200" dirty="0"/>
+          </a:p>
+        </p:txBody>
+      </p:sp>
+      <p:sp>
+        <p:nvSpPr>
+          <p:cNvPr id="26" name="Shape 24"/>
+          <p:cNvSpPr/>
+          <p:nvPr/>
+        </p:nvSpPr>
+        <p:spPr>
+          <a:xfrm>
+            <a:off x="6275527" y="1691640"/>
+            <a:ext cx="5409590" cy="3374136"/>
+          </a:xfrm>
+          <a:prstGeom prst="roundRect">
+            <a:avLst>
+              <a:gd name="adj" fmla="val 2168"/>
+            </a:avLst>
+          </a:prstGeom>
+          <a:solidFill>
+            <a:srgbClr val="F2F2F2"/>
+          </a:solidFill>
+          <a:ln/>
+        </p:spPr>
+      </p:sp>
+      <p:sp>
+        <p:nvSpPr>
+          <p:cNvPr id="27" name="Text 25"/>
+          <p:cNvSpPr txBox="1"/>
+          <p:nvPr/>
+        </p:nvSpPr>
+        <p:spPr>
+          <a:xfrm>
+            <a:off x="6366967" y="1764792"/>
+            <a:ext cx="5226710" cy="374904"/>
+          </a:xfrm>
+          <a:prstGeom prst="rect">
+            <a:avLst/>
+          </a:prstGeom>
+          <a:noFill/>
+          <a:ln/>
+        </p:spPr>
+        <p:txBody>
+          <a:bodyPr wrap="square" lIns="0" tIns="0" rIns="0" bIns="0" rtlCol="0" anchor="t"/>
+          <a:lstStyle/>
+          <a:p>
+            <a:pPr algn="l" indent="0" marL="0">
+              <a:buNone/>
+            </a:pPr>
+            <a:r>
+              <a:rPr lang="ja-JP" altLang="en-US" sz="2200" b="1" dirty="0">
                 <a:solidFill>
                   <a:srgbClr val="D55E00"/>
                 </a:solidFill>
@@ -12758,10 +13033,38 @@
                 <a:ea typeface="メイリオ" pitchFamily="34" charset="-122"/>
                 <a:cs typeface="メイリオ" pitchFamily="34" charset="-120"/>
               </a:rPr>
-              <a:t>最終内服の日時と再開の条件</a:t>
-            </a:r>
-            <a:r>
-              <a:rPr lang="ja-JP" altLang="en-US" sz="2400" b="1" dirty="0">
+              <a:t>緊急手術</a:t>
+            </a:r>
+            <a:endParaRPr lang="ja-JP" sz="2200" dirty="0"/>
+          </a:p>
+        </p:txBody>
+      </p:sp>
+      <p:sp>
+        <p:nvSpPr>
+          <p:cNvPr id="28" name="Text 26"/>
+          <p:cNvSpPr txBox="1"/>
+          <p:nvPr/>
+        </p:nvSpPr>
+        <p:spPr>
+          <a:xfrm>
+            <a:off x="6366967" y="2155241"/>
+            <a:ext cx="320040" cy="374904"/>
+          </a:xfrm>
+          <a:prstGeom prst="rect">
+            <a:avLst/>
+          </a:prstGeom>
+          <a:noFill/>
+          <a:ln/>
+        </p:spPr>
+        <p:txBody>
+          <a:bodyPr wrap="square" lIns="0" tIns="0" rIns="0" bIns="0" rtlCol="0" anchor="t"/>
+          <a:lstStyle/>
+          <a:p>
+            <a:pPr algn="l" indent="0" marL="0">
+              <a:buNone/>
+            </a:pPr>
+            <a:r>
+              <a:rPr lang="ja-JP" altLang="en-US" sz="2200" dirty="0">
                 <a:solidFill>
                   <a:srgbClr val="262626"/>
                 </a:solidFill>
@@ -12769,9 +13072,438 @@
                 <a:ea typeface="メイリオ" pitchFamily="34" charset="-122"/>
                 <a:cs typeface="メイリオ" pitchFamily="34" charset="-120"/>
               </a:rPr>
-              <a:t>を書く</a:t>
-            </a:r>
-            <a:endParaRPr lang="ja-JP" sz="2400" dirty="0"/>
+              <a:t>•</a:t>
+            </a:r>
+            <a:endParaRPr lang="ja-JP" sz="2200" dirty="0"/>
+          </a:p>
+        </p:txBody>
+      </p:sp>
+      <p:sp>
+        <p:nvSpPr>
+          <p:cNvPr id="29" name="Text 27"/>
+          <p:cNvSpPr txBox="1"/>
+          <p:nvPr/>
+        </p:nvSpPr>
+        <p:spPr>
+          <a:xfrm>
+            <a:off x="6622999" y="2155241"/>
+            <a:ext cx="4970678" cy="374904"/>
+          </a:xfrm>
+          <a:prstGeom prst="rect">
+            <a:avLst/>
+          </a:prstGeom>
+          <a:noFill/>
+          <a:ln/>
+        </p:spPr>
+        <p:txBody>
+          <a:bodyPr wrap="square" lIns="0" tIns="0" rIns="0" bIns="0" rtlCol="0" anchor="t"/>
+          <a:lstStyle/>
+          <a:p>
+            <a:pPr algn="l" indent="0" marL="0">
+              <a:buNone/>
+            </a:pPr>
+            <a:r>
+              <a:rPr lang="ja-JP" altLang="en-US" sz="2200" dirty="0">
+                <a:solidFill>
+                  <a:srgbClr val="262626"/>
+                </a:solidFill>
+                <a:latin typeface="メイリオ" pitchFamily="34" charset="0"/>
+                <a:ea typeface="メイリオ" pitchFamily="34" charset="-122"/>
+                <a:cs typeface="メイリオ" pitchFamily="34" charset="-120"/>
+              </a:rPr>
+              <a:t>休薬表は使えない。</a:t>
+            </a:r>
+            <a:endParaRPr lang="ja-JP" sz="2200" dirty="0"/>
+          </a:p>
+        </p:txBody>
+      </p:sp>
+      <p:sp>
+        <p:nvSpPr>
+          <p:cNvPr id="30" name="Text 28"/>
+          <p:cNvSpPr txBox="1"/>
+          <p:nvPr/>
+        </p:nvSpPr>
+        <p:spPr>
+          <a:xfrm>
+            <a:off x="6622999" y="2489911"/>
+            <a:ext cx="4970678" cy="374904"/>
+          </a:xfrm>
+          <a:prstGeom prst="rect">
+            <a:avLst/>
+          </a:prstGeom>
+          <a:noFill/>
+          <a:ln/>
+        </p:spPr>
+        <p:txBody>
+          <a:bodyPr wrap="square" lIns="0" tIns="0" rIns="0" bIns="0" rtlCol="0" anchor="t"/>
+          <a:lstStyle/>
+          <a:p>
+            <a:pPr algn="l" indent="0" marL="0">
+              <a:buNone/>
+            </a:pPr>
+            <a:r>
+              <a:rPr lang="ja-JP" altLang="en-US" sz="2200" dirty="0">
+                <a:solidFill>
+                  <a:srgbClr val="262626"/>
+                </a:solidFill>
+                <a:latin typeface="メイリオ" pitchFamily="34" charset="0"/>
+                <a:ea typeface="メイリオ" pitchFamily="34" charset="-122"/>
+                <a:cs typeface="メイリオ" pitchFamily="34" charset="-120"/>
+              </a:rPr>
+              <a:t>最終内服の時刻を聞く</a:t>
+            </a:r>
+            <a:endParaRPr lang="ja-JP" sz="2200" dirty="0"/>
+          </a:p>
+        </p:txBody>
+      </p:sp>
+      <p:sp>
+        <p:nvSpPr>
+          <p:cNvPr id="31" name="Text 29"/>
+          <p:cNvSpPr txBox="1"/>
+          <p:nvPr/>
+        </p:nvSpPr>
+        <p:spPr>
+          <a:xfrm>
+            <a:off x="6366967" y="2928823"/>
+            <a:ext cx="320040" cy="374904"/>
+          </a:xfrm>
+          <a:prstGeom prst="rect">
+            <a:avLst/>
+          </a:prstGeom>
+          <a:noFill/>
+          <a:ln/>
+        </p:spPr>
+        <p:txBody>
+          <a:bodyPr wrap="square" lIns="0" tIns="0" rIns="0" bIns="0" rtlCol="0" anchor="t"/>
+          <a:lstStyle/>
+          <a:p>
+            <a:pPr algn="l" indent="0" marL="0">
+              <a:buNone/>
+            </a:pPr>
+            <a:r>
+              <a:rPr lang="ja-JP" altLang="en-US" sz="2200" dirty="0">
+                <a:solidFill>
+                  <a:srgbClr val="262626"/>
+                </a:solidFill>
+                <a:latin typeface="メイリオ" pitchFamily="34" charset="0"/>
+                <a:ea typeface="メイリオ" pitchFamily="34" charset="-122"/>
+                <a:cs typeface="メイリオ" pitchFamily="34" charset="-120"/>
+              </a:rPr>
+              <a:t>•</a:t>
+            </a:r>
+            <a:endParaRPr lang="ja-JP" sz="2200" dirty="0"/>
+          </a:p>
+        </p:txBody>
+      </p:sp>
+      <p:sp>
+        <p:nvSpPr>
+          <p:cNvPr id="32" name="Text 30"/>
+          <p:cNvSpPr txBox="1"/>
+          <p:nvPr/>
+        </p:nvSpPr>
+        <p:spPr>
+          <a:xfrm>
+            <a:off x="6622999" y="2928823"/>
+            <a:ext cx="4970678" cy="374904"/>
+          </a:xfrm>
+          <a:prstGeom prst="rect">
+            <a:avLst/>
+          </a:prstGeom>
+          <a:noFill/>
+          <a:ln/>
+        </p:spPr>
+        <p:txBody>
+          <a:bodyPr wrap="square" lIns="0" tIns="0" rIns="0" bIns="0" rtlCol="0" anchor="t"/>
+          <a:lstStyle/>
+          <a:p>
+            <a:pPr algn="l" indent="0" marL="0">
+              <a:buNone/>
+            </a:pPr>
+            <a:r>
+              <a:rPr lang="ja-JP" altLang="en-US" sz="2200" b="1" dirty="0">
+                <a:solidFill>
+                  <a:srgbClr val="262626"/>
+                </a:solidFill>
+                <a:latin typeface="メイリオ" pitchFamily="34" charset="0"/>
+                <a:ea typeface="メイリオ" pitchFamily="34" charset="-122"/>
+                <a:cs typeface="メイリオ" pitchFamily="34" charset="-120"/>
+              </a:rPr>
+              <a:t>中和薬の在庫：</a:t>
+            </a:r>
+            <a:endParaRPr lang="ja-JP" sz="2200" dirty="0"/>
+          </a:p>
+        </p:txBody>
+      </p:sp>
+      <p:sp>
+        <p:nvSpPr>
+          <p:cNvPr id="33" name="Text 31"/>
+          <p:cNvSpPr txBox="1"/>
+          <p:nvPr/>
+        </p:nvSpPr>
+        <p:spPr>
+          <a:xfrm>
+            <a:off x="6622999" y="3264408"/>
+            <a:ext cx="4970678" cy="374904"/>
+          </a:xfrm>
+          <a:prstGeom prst="rect">
+            <a:avLst/>
+          </a:prstGeom>
+          <a:noFill/>
+          <a:ln/>
+        </p:spPr>
+        <p:txBody>
+          <a:bodyPr wrap="square" lIns="0" tIns="0" rIns="0" bIns="0" rtlCol="0" anchor="t"/>
+          <a:lstStyle/>
+          <a:p>
+            <a:pPr algn="l" indent="0" marL="0">
+              <a:buNone/>
+            </a:pPr>
+            <a:r>
+              <a:rPr lang="ja-JP" altLang="en-US" sz="2200" dirty="0">
+                <a:solidFill>
+                  <a:srgbClr val="262626"/>
+                </a:solidFill>
+                <a:latin typeface="メイリオ" pitchFamily="34" charset="0"/>
+                <a:ea typeface="メイリオ" pitchFamily="34" charset="-122"/>
+                <a:cs typeface="メイリオ" pitchFamily="34" charset="-120"/>
+              </a:rPr>
+              <a:t>ビタミン K、PCC、イダルシズマブ</a:t>
+            </a:r>
+            <a:endParaRPr lang="ja-JP" sz="2200" dirty="0"/>
+          </a:p>
+        </p:txBody>
+      </p:sp>
+      <p:sp>
+        <p:nvSpPr>
+          <p:cNvPr id="34" name="Text 32"/>
+          <p:cNvSpPr txBox="1"/>
+          <p:nvPr/>
+        </p:nvSpPr>
+        <p:spPr>
+          <a:xfrm>
+            <a:off x="6366967" y="3702406"/>
+            <a:ext cx="320040" cy="374904"/>
+          </a:xfrm>
+          <a:prstGeom prst="rect">
+            <a:avLst/>
+          </a:prstGeom>
+          <a:noFill/>
+          <a:ln/>
+        </p:spPr>
+        <p:txBody>
+          <a:bodyPr wrap="square" lIns="0" tIns="0" rIns="0" bIns="0" rtlCol="0" anchor="t"/>
+          <a:lstStyle/>
+          <a:p>
+            <a:pPr algn="l" indent="0" marL="0">
+              <a:buNone/>
+            </a:pPr>
+            <a:r>
+              <a:rPr lang="ja-JP" altLang="en-US" sz="2200" dirty="0">
+                <a:solidFill>
+                  <a:srgbClr val="262626"/>
+                </a:solidFill>
+                <a:latin typeface="メイリオ" pitchFamily="34" charset="0"/>
+                <a:ea typeface="メイリオ" pitchFamily="34" charset="-122"/>
+                <a:cs typeface="メイリオ" pitchFamily="34" charset="-120"/>
+              </a:rPr>
+              <a:t>•</a:t>
+            </a:r>
+            <a:endParaRPr lang="ja-JP" sz="2200" dirty="0"/>
+          </a:p>
+        </p:txBody>
+      </p:sp>
+      <p:sp>
+        <p:nvSpPr>
+          <p:cNvPr id="35" name="Text 33"/>
+          <p:cNvSpPr txBox="1"/>
+          <p:nvPr/>
+        </p:nvSpPr>
+        <p:spPr>
+          <a:xfrm>
+            <a:off x="6622999" y="3702406"/>
+            <a:ext cx="4970678" cy="374904"/>
+          </a:xfrm>
+          <a:prstGeom prst="rect">
+            <a:avLst/>
+          </a:prstGeom>
+          <a:noFill/>
+          <a:ln/>
+        </p:spPr>
+        <p:txBody>
+          <a:bodyPr wrap="square" lIns="0" tIns="0" rIns="0" bIns="0" rtlCol="0" anchor="t"/>
+          <a:lstStyle/>
+          <a:p>
+            <a:pPr algn="l" indent="0" marL="0">
+              <a:buNone/>
+            </a:pPr>
+            <a:r>
+              <a:rPr lang="ja-JP" altLang="en-US" sz="2200" dirty="0">
+                <a:solidFill>
+                  <a:srgbClr val="262626"/>
+                </a:solidFill>
+                <a:latin typeface="メイリオ" pitchFamily="34" charset="0"/>
+                <a:ea typeface="メイリオ" pitchFamily="34" charset="-122"/>
+                <a:cs typeface="メイリオ" pitchFamily="34" charset="-120"/>
+              </a:rPr>
+              <a:t>脊髄幹麻酔を避けて全身麻酔に</a:t>
+            </a:r>
+            <a:endParaRPr lang="ja-JP" sz="2200" dirty="0"/>
+          </a:p>
+        </p:txBody>
+      </p:sp>
+      <p:sp>
+        <p:nvSpPr>
+          <p:cNvPr id="36" name="Text 34"/>
+          <p:cNvSpPr txBox="1"/>
+          <p:nvPr/>
+        </p:nvSpPr>
+        <p:spPr>
+          <a:xfrm>
+            <a:off x="6366967" y="4141318"/>
+            <a:ext cx="320040" cy="374904"/>
+          </a:xfrm>
+          <a:prstGeom prst="rect">
+            <a:avLst/>
+          </a:prstGeom>
+          <a:noFill/>
+          <a:ln/>
+        </p:spPr>
+        <p:txBody>
+          <a:bodyPr wrap="square" lIns="0" tIns="0" rIns="0" bIns="0" rtlCol="0" anchor="t"/>
+          <a:lstStyle/>
+          <a:p>
+            <a:pPr algn="l" indent="0" marL="0">
+              <a:buNone/>
+            </a:pPr>
+            <a:r>
+              <a:rPr lang="ja-JP" altLang="en-US" sz="2200" dirty="0">
+                <a:solidFill>
+                  <a:srgbClr val="262626"/>
+                </a:solidFill>
+                <a:latin typeface="メイリオ" pitchFamily="34" charset="0"/>
+                <a:ea typeface="メイリオ" pitchFamily="34" charset="-122"/>
+                <a:cs typeface="メイリオ" pitchFamily="34" charset="-120"/>
+              </a:rPr>
+              <a:t>•</a:t>
+            </a:r>
+            <a:endParaRPr lang="ja-JP" sz="2200" dirty="0"/>
+          </a:p>
+        </p:txBody>
+      </p:sp>
+      <p:sp>
+        <p:nvSpPr>
+          <p:cNvPr id="37" name="Text 35"/>
+          <p:cNvSpPr txBox="1"/>
+          <p:nvPr/>
+        </p:nvSpPr>
+        <p:spPr>
+          <a:xfrm>
+            <a:off x="6622999" y="4141318"/>
+            <a:ext cx="4970678" cy="374904"/>
+          </a:xfrm>
+          <a:prstGeom prst="rect">
+            <a:avLst/>
+          </a:prstGeom>
+          <a:noFill/>
+          <a:ln/>
+        </p:spPr>
+        <p:txBody>
+          <a:bodyPr wrap="square" lIns="0" tIns="0" rIns="0" bIns="0" rtlCol="0" anchor="t"/>
+          <a:lstStyle/>
+          <a:p>
+            <a:pPr algn="l" indent="0" marL="0">
+              <a:buNone/>
+            </a:pPr>
+            <a:r>
+              <a:rPr lang="ja-JP" altLang="en-US" sz="2200" dirty="0">
+                <a:solidFill>
+                  <a:srgbClr val="262626"/>
+                </a:solidFill>
+                <a:latin typeface="メイリオ" pitchFamily="34" charset="0"/>
+                <a:ea typeface="メイリオ" pitchFamily="34" charset="-122"/>
+                <a:cs typeface="メイリオ" pitchFamily="34" charset="-120"/>
+              </a:rPr>
+              <a:t>血液製剤の準備（→ 4-4）</a:t>
+            </a:r>
+            <a:endParaRPr lang="ja-JP" sz="2200" dirty="0"/>
+          </a:p>
+        </p:txBody>
+      </p:sp>
+      <p:sp>
+        <p:nvSpPr>
+          <p:cNvPr id="38" name="Text 36"/>
+          <p:cNvSpPr txBox="1"/>
+          <p:nvPr/>
+        </p:nvSpPr>
+        <p:spPr>
+          <a:xfrm>
+            <a:off x="6366967" y="4580230"/>
+            <a:ext cx="320040" cy="374904"/>
+          </a:xfrm>
+          <a:prstGeom prst="rect">
+            <a:avLst/>
+          </a:prstGeom>
+          <a:noFill/>
+          <a:ln/>
+        </p:spPr>
+        <p:txBody>
+          <a:bodyPr wrap="square" lIns="0" tIns="0" rIns="0" bIns="0" rtlCol="0" anchor="t"/>
+          <a:lstStyle/>
+          <a:p>
+            <a:pPr algn="l" indent="0" marL="0">
+              <a:buNone/>
+            </a:pPr>
+            <a:r>
+              <a:rPr lang="ja-JP" altLang="en-US" sz="2200" dirty="0">
+                <a:solidFill>
+                  <a:srgbClr val="262626"/>
+                </a:solidFill>
+                <a:latin typeface="メイリオ" pitchFamily="34" charset="0"/>
+                <a:ea typeface="メイリオ" pitchFamily="34" charset="-122"/>
+                <a:cs typeface="メイリオ" pitchFamily="34" charset="-120"/>
+              </a:rPr>
+              <a:t>•</a:t>
+            </a:r>
+            <a:endParaRPr lang="ja-JP" sz="2200" dirty="0"/>
+          </a:p>
+        </p:txBody>
+      </p:sp>
+      <p:sp>
+        <p:nvSpPr>
+          <p:cNvPr id="39" name="Text 37"/>
+          <p:cNvSpPr txBox="1"/>
+          <p:nvPr/>
+        </p:nvSpPr>
+        <p:spPr>
+          <a:xfrm>
+            <a:off x="6622999" y="4580230"/>
+            <a:ext cx="4970678" cy="374904"/>
+          </a:xfrm>
+          <a:prstGeom prst="rect">
+            <a:avLst/>
+          </a:prstGeom>
+          <a:noFill/>
+          <a:ln/>
+        </p:spPr>
+        <p:txBody>
+          <a:bodyPr wrap="square" lIns="0" tIns="0" rIns="0" bIns="0" rtlCol="0" anchor="t"/>
+          <a:lstStyle/>
+          <a:p>
+            <a:pPr algn="l" indent="0" marL="0">
+              <a:buNone/>
+            </a:pPr>
+            <a:r>
+              <a:rPr lang="ja-JP" altLang="en-US" sz="2200" dirty="0">
+                <a:solidFill>
+                  <a:srgbClr val="262626"/>
+                </a:solidFill>
+                <a:latin typeface="メイリオ" pitchFamily="34" charset="0"/>
+                <a:ea typeface="メイリオ" pitchFamily="34" charset="-122"/>
+                <a:cs typeface="メイリオ" pitchFamily="34" charset="-120"/>
+              </a:rPr>
+              <a:t>DOAC は CrCl で残り方が違う</a:t>
+            </a:r>
+            <a:endParaRPr lang="ja-JP" sz="2200" dirty="0"/>
           </a:p>
         </p:txBody>
       </p:sp>
@@ -12842,7 +13574,7 @@
                 <a:ea typeface="メイリオ" pitchFamily="34" charset="-122"/>
                 <a:cs typeface="メイリオ" pitchFamily="34" charset="-120"/>
               </a:rPr>
-              <a:t>まとめ</a:t>
+              <a:t>術前指示の書き方</a:t>
             </a:r>
             <a:endParaRPr lang="ja-JP" sz="4400" dirty="0"/>
           </a:p>
@@ -13034,7 +13766,7 @@
             </a:avLst>
           </a:prstGeom>
           <a:solidFill>
-            <a:srgbClr val="D9D9D9"/>
+            <a:srgbClr val="00A8AA"/>
           </a:solidFill>
           <a:ln/>
         </p:spPr>
@@ -13046,9 +13778,9 @@
               <a:buNone/>
             </a:pPr>
             <a:r>
-              <a:rPr lang="ja-JP" altLang="en-US" sz="1050" dirty="0">
-                <a:solidFill>
-                  <a:srgbClr val="404040"/>
+              <a:rPr lang="ja-JP" altLang="en-US" sz="1050" b="1" dirty="0">
+                <a:solidFill>
+                  <a:srgbClr val="FFFFFF"/>
                 </a:solidFill>
                 <a:latin typeface="メイリオ" pitchFamily="34" charset="0"/>
                 <a:ea typeface="メイリオ" pitchFamily="34" charset="-122"/>
@@ -13063,9 +13795,9 @@
               <a:buNone/>
             </a:pPr>
             <a:r>
-              <a:rPr lang="ja-JP" altLang="en-US" sz="1050" dirty="0">
-                <a:solidFill>
-                  <a:srgbClr val="404040"/>
+              <a:rPr lang="ja-JP" altLang="en-US" sz="1050" b="1" dirty="0">
+                <a:solidFill>
+                  <a:srgbClr val="FFFFFF"/>
                 </a:solidFill>
                 <a:latin typeface="メイリオ" pitchFamily="34" charset="0"/>
                 <a:ea typeface="メイリオ" pitchFamily="34" charset="-122"/>
@@ -13094,7 +13826,7 @@
             </a:avLst>
           </a:prstGeom>
           <a:solidFill>
-            <a:srgbClr val="00A8AA"/>
+            <a:srgbClr val="D9D9D9"/>
           </a:solidFill>
           <a:ln/>
         </p:spPr>
@@ -13106,9 +13838,9 @@
               <a:buNone/>
             </a:pPr>
             <a:r>
-              <a:rPr lang="ja-JP" altLang="en-US" sz="1050" b="1" dirty="0">
-                <a:solidFill>
-                  <a:srgbClr val="FFFFFF"/>
+              <a:rPr lang="ja-JP" altLang="en-US" sz="1050" dirty="0">
+                <a:solidFill>
+                  <a:srgbClr val="404040"/>
                 </a:solidFill>
                 <a:latin typeface="メイリオ" pitchFamily="34" charset="0"/>
                 <a:ea typeface="メイリオ" pitchFamily="34" charset="-122"/>
@@ -13192,7 +13924,7 @@
                 <a:ea typeface="メイリオ" pitchFamily="34" charset="-122"/>
                 <a:cs typeface="メイリオ" pitchFamily="34" charset="-120"/>
               </a:rPr>
-              <a:t>日本循環器学会／日本不整脈心電学会 2020 年改訂版 不整脈薬物治療ガイドライン</a:t>
+              <a:t>Kopp SL, et al. Reg Anesth Pain Med 2025/Douketis JD, et al. JAMA Intern Med</a:t>
             </a:r>
             <a:endParaRPr lang="ja-JP" sz="1600" dirty="0"/>
           </a:p>
@@ -13209,7 +13941,7 @@
                 <a:ea typeface="メイリオ" pitchFamily="34" charset="-122"/>
                 <a:cs typeface="メイリオ" pitchFamily="34" charset="-120"/>
               </a:rPr>
-              <a:t>Douketis JD, et al. Chest 2022;162:e207-e243 / Kopp SL, et al. Reg Anesth Pain Med 2025</a:t>
+              <a:t>2019;179:1469-78/日本循環器学会／日本不整脈心電学会 2020 年改訂版不整脈薬物治療ガイドライン</a:t>
             </a:r>
             <a:endParaRPr lang="ja-JP" sz="1600" dirty="0"/>
           </a:p>
@@ -13217,14 +13949,36 @@
       </p:sp>
       <p:sp>
         <p:nvSpPr>
-          <p:cNvPr id="11" name="Text 9"/>
+          <p:cNvPr id="11" name="Shape 9"/>
+          <p:cNvSpPr/>
+          <p:nvPr/>
+        </p:nvSpPr>
+        <p:spPr>
+          <a:xfrm>
+            <a:off x="502920" y="1664208"/>
+            <a:ext cx="11183112" cy="3538728"/>
+          </a:xfrm>
+          <a:prstGeom prst="roundRect">
+            <a:avLst>
+              <a:gd name="adj" fmla="val 2067"/>
+            </a:avLst>
+          </a:prstGeom>
+          <a:solidFill>
+            <a:srgbClr val="F2F2F2"/>
+          </a:solidFill>
+          <a:ln/>
+        </p:spPr>
+      </p:sp>
+      <p:sp>
+        <p:nvSpPr>
+          <p:cNvPr id="12" name="Text 10"/>
           <p:cNvSpPr txBox="1"/>
           <p:nvPr/>
         </p:nvSpPr>
         <p:spPr>
           <a:xfrm>
-            <a:off x="502920" y="1691640"/>
-            <a:ext cx="11155680" cy="4197096"/>
+            <a:off x="585216" y="1755648"/>
+            <a:ext cx="11018520" cy="374904"/>
           </a:xfrm>
           <a:prstGeom prst="rect">
             <a:avLst/>
@@ -13233,18 +13987,25 @@
           <a:ln/>
         </p:spPr>
         <p:txBody>
-          <a:bodyPr wrap="square" lIns="0" tIns="0" rIns="0" bIns="0" rtlCol="0" anchor="ctr"/>
-          <a:lstStyle/>
-          <a:p>
-            <a:pPr algn="l" marL="355600" indent="-355600">
-              <a:spcAft>
-                <a:spcPts val="2800"/>
-              </a:spcAft>
-              <a:buSzPct val="100000"/>
-              <a:buChar char="•"/>
-            </a:pPr>
-            <a:r>
-              <a:rPr lang="ja-JP" altLang="en-US" sz="2400" dirty="0">
+          <a:bodyPr wrap="square" lIns="0" tIns="0" rIns="0" bIns="0" rtlCol="0" anchor="t"/>
+          <a:lstStyle/>
+          <a:p>
+            <a:pPr algn="l" indent="0" marL="0">
+              <a:buNone/>
+            </a:pPr>
+            <a:r>
+              <a:rPr lang="ja-JP" altLang="en-US" sz="2200" b="1" dirty="0">
+                <a:solidFill>
+                  <a:srgbClr val="0072B2"/>
+                </a:solidFill>
+                <a:latin typeface="メイリオ" pitchFamily="34" charset="0"/>
+                <a:ea typeface="メイリオ" pitchFamily="34" charset="-122"/>
+                <a:cs typeface="メイリオ" pitchFamily="34" charset="-120"/>
+              </a:rPr>
+              <a:t>患者 A（心房細動）</a:t>
+            </a:r>
+            <a:r>
+              <a:rPr lang="ja-JP" altLang="en-US" sz="2200" b="1" dirty="0">
                 <a:solidFill>
                   <a:srgbClr val="262626"/>
                 </a:solidFill>
@@ -13252,42 +14013,483 @@
                 <a:ea typeface="メイリオ" pitchFamily="34" charset="-122"/>
                 <a:cs typeface="メイリオ" pitchFamily="34" charset="-120"/>
               </a:rPr>
-              <a:t>休薬は</a:t>
-            </a:r>
+              <a:t>エリキュース 5 mg 1 日 2 回</a:t>
+            </a:r>
+            <a:r>
+              <a:rPr lang="ja-JP" altLang="en-US" sz="2200" dirty="0">
+                <a:solidFill>
+                  <a:srgbClr val="262626"/>
+                </a:solidFill>
+                <a:latin typeface="メイリオ" pitchFamily="34" charset="0"/>
+                <a:ea typeface="メイリオ" pitchFamily="34" charset="-122"/>
+                <a:cs typeface="メイリオ" pitchFamily="34" charset="-120"/>
+              </a:rPr>
+              <a:t>：最終内服は</a:t>
+            </a:r>
+            <a:endParaRPr lang="ja-JP" sz="2200" dirty="0"/>
+          </a:p>
+        </p:txBody>
+      </p:sp>
+      <p:sp>
+        <p:nvSpPr>
+          <p:cNvPr id="13" name="Text 11"/>
+          <p:cNvSpPr txBox="1"/>
+          <p:nvPr/>
+        </p:nvSpPr>
+        <p:spPr>
+          <a:xfrm>
+            <a:off x="896112" y="2127809"/>
+            <a:ext cx="10707624" cy="374904"/>
+          </a:xfrm>
+          <a:prstGeom prst="rect">
+            <a:avLst/>
+          </a:prstGeom>
+          <a:noFill/>
+          <a:ln/>
+        </p:spPr>
+        <p:txBody>
+          <a:bodyPr wrap="square" lIns="0" tIns="0" rIns="0" bIns="0" rtlCol="0" anchor="t"/>
+          <a:lstStyle/>
+          <a:p>
+            <a:pPr algn="l" indent="0" marL="0">
+              <a:buNone/>
+            </a:pPr>
+            <a:r>
+              <a:rPr lang="ja-JP" altLang="en-US" sz="2200" dirty="0">
+                <a:solidFill>
+                  <a:srgbClr val="262626"/>
+                </a:solidFill>
+                <a:latin typeface="メイリオ" pitchFamily="34" charset="0"/>
+                <a:ea typeface="メイリオ" pitchFamily="34" charset="-122"/>
+                <a:cs typeface="メイリオ" pitchFamily="34" charset="-120"/>
+              </a:rPr>
+              <a:t>手術 4 日前の夜（◯/◯ 20 時）。脊髄くも膜下麻酔の予定のため</a:t>
+            </a:r>
+            <a:endParaRPr lang="ja-JP" sz="2200" dirty="0"/>
+          </a:p>
+        </p:txBody>
+      </p:sp>
+      <p:sp>
+        <p:nvSpPr>
+          <p:cNvPr id="14" name="Text 12"/>
+          <p:cNvSpPr txBox="1"/>
+          <p:nvPr/>
+        </p:nvSpPr>
+        <p:spPr>
+          <a:xfrm>
+            <a:off x="896112" y="2462479"/>
+            <a:ext cx="10707624" cy="374904"/>
+          </a:xfrm>
+          <a:prstGeom prst="rect">
+            <a:avLst/>
+          </a:prstGeom>
+          <a:noFill/>
+          <a:ln/>
+        </p:spPr>
+        <p:txBody>
+          <a:bodyPr wrap="square" lIns="0" tIns="0" rIns="0" bIns="0" rtlCol="0" anchor="t"/>
+          <a:lstStyle/>
+          <a:p>
+            <a:pPr algn="l" indent="0" marL="0">
+              <a:buNone/>
+            </a:pPr>
+            <a:r>
+              <a:rPr lang="ja-JP" altLang="en-US" sz="2200" b="1" dirty="0">
+                <a:solidFill>
+                  <a:srgbClr val="D55E00"/>
+                </a:solidFill>
+                <a:latin typeface="メイリオ" pitchFamily="34" charset="0"/>
+                <a:ea typeface="メイリオ" pitchFamily="34" charset="-122"/>
+                <a:cs typeface="メイリオ" pitchFamily="34" charset="-120"/>
+              </a:rPr>
+              <a:t>72 時間以上</a:t>
+            </a:r>
+            <a:r>
+              <a:rPr lang="ja-JP" altLang="en-US" sz="2200" dirty="0">
+                <a:solidFill>
+                  <a:srgbClr val="262626"/>
+                </a:solidFill>
+                <a:latin typeface="メイリオ" pitchFamily="34" charset="0"/>
+                <a:ea typeface="メイリオ" pitchFamily="34" charset="-122"/>
+                <a:cs typeface="メイリオ" pitchFamily="34" charset="-120"/>
+              </a:rPr>
+              <a:t>あける（9 時入室で約 85 時間）。ブリッジなし</a:t>
+            </a:r>
+            <a:endParaRPr lang="ja-JP" sz="2200" dirty="0"/>
+          </a:p>
+        </p:txBody>
+      </p:sp>
+      <p:sp>
+        <p:nvSpPr>
+          <p:cNvPr id="15" name="Text 13"/>
+          <p:cNvSpPr txBox="1"/>
+          <p:nvPr/>
+        </p:nvSpPr>
+        <p:spPr>
+          <a:xfrm>
+            <a:off x="585216" y="2852928"/>
+            <a:ext cx="11018520" cy="374904"/>
+          </a:xfrm>
+          <a:prstGeom prst="rect">
+            <a:avLst/>
+          </a:prstGeom>
+          <a:noFill/>
+          <a:ln/>
+        </p:spPr>
+        <p:txBody>
+          <a:bodyPr wrap="square" lIns="0" tIns="0" rIns="0" bIns="0" rtlCol="0" anchor="t"/>
+          <a:lstStyle/>
+          <a:p>
+            <a:pPr algn="l" indent="0" marL="0">
+              <a:buNone/>
+            </a:pPr>
+            <a:r>
+              <a:rPr lang="ja-JP" altLang="en-US" sz="2200" b="1" dirty="0">
+                <a:solidFill>
+                  <a:srgbClr val="262626"/>
+                </a:solidFill>
+                <a:latin typeface="メイリオ" pitchFamily="34" charset="0"/>
+                <a:ea typeface="メイリオ" pitchFamily="34" charset="-122"/>
+                <a:cs typeface="メイリオ" pitchFamily="34" charset="-120"/>
+              </a:rPr>
+              <a:t>再開：</a:t>
+            </a:r>
+            <a:r>
+              <a:rPr lang="ja-JP" altLang="en-US" sz="2200" dirty="0">
+                <a:solidFill>
+                  <a:srgbClr val="262626"/>
+                </a:solidFill>
+                <a:latin typeface="メイリオ" pitchFamily="34" charset="0"/>
+                <a:ea typeface="メイリオ" pitchFamily="34" charset="-122"/>
+                <a:cs typeface="メイリオ" pitchFamily="34" charset="-120"/>
+              </a:rPr>
+              <a:t>術後 2 日目の夜、止血を確認してから。処方医（◯◯内科）に連絡済み</a:t>
+            </a:r>
+            <a:endParaRPr lang="ja-JP" sz="2200" dirty="0"/>
+          </a:p>
+        </p:txBody>
+      </p:sp>
+      <p:sp>
+        <p:nvSpPr>
+          <p:cNvPr id="16" name="Shape 14"/>
+          <p:cNvSpPr/>
+          <p:nvPr/>
+        </p:nvSpPr>
+        <p:spPr>
+          <a:xfrm>
+            <a:off x="585216" y="3266237"/>
+            <a:ext cx="11018520" cy="0"/>
+          </a:xfrm>
+          <a:prstGeom prst="line">
+            <a:avLst/>
+          </a:prstGeom>
+          <a:noFill/>
+          <a:ln w="12700">
+            <a:solidFill>
+              <a:srgbClr val="BFBFBF"/>
+            </a:solidFill>
+            <a:prstDash val="solid"/>
+          </a:ln>
+        </p:spPr>
+      </p:sp>
+      <p:sp>
+        <p:nvSpPr>
+          <p:cNvPr id="17" name="Text 15"/>
+          <p:cNvSpPr txBox="1"/>
+          <p:nvPr/>
+        </p:nvSpPr>
+        <p:spPr>
+          <a:xfrm>
+            <a:off x="585216" y="3343961"/>
+            <a:ext cx="11018520" cy="374904"/>
+          </a:xfrm>
+          <a:prstGeom prst="rect">
+            <a:avLst/>
+          </a:prstGeom>
+          <a:noFill/>
+          <a:ln/>
+        </p:spPr>
+        <p:txBody>
+          <a:bodyPr wrap="square" lIns="0" tIns="0" rIns="0" bIns="0" rtlCol="0" anchor="t"/>
+          <a:lstStyle/>
+          <a:p>
+            <a:pPr algn="l" indent="0" marL="0">
+              <a:buNone/>
+            </a:pPr>
+            <a:r>
+              <a:rPr lang="ja-JP" altLang="en-US" sz="2200" b="1" dirty="0">
+                <a:solidFill>
+                  <a:srgbClr val="0072B2"/>
+                </a:solidFill>
+                <a:latin typeface="メイリオ" pitchFamily="34" charset="0"/>
+                <a:ea typeface="メイリオ" pitchFamily="34" charset="-122"/>
+                <a:cs typeface="メイリオ" pitchFamily="34" charset="-120"/>
+              </a:rPr>
+              <a:t>患者 B（ステント留置 2 年前）</a:t>
+            </a:r>
+            <a:r>
+              <a:rPr lang="ja-JP" altLang="en-US" sz="2200" b="1" dirty="0">
+                <a:solidFill>
+                  <a:srgbClr val="262626"/>
+                </a:solidFill>
+                <a:latin typeface="メイリオ" pitchFamily="34" charset="0"/>
+                <a:ea typeface="メイリオ" pitchFamily="34" charset="-122"/>
+                <a:cs typeface="メイリオ" pitchFamily="34" charset="-120"/>
+              </a:rPr>
+              <a:t>バイアスピリン 100 mg</a:t>
+            </a:r>
+            <a:r>
+              <a:rPr lang="ja-JP" altLang="en-US" sz="2200" dirty="0">
+                <a:solidFill>
+                  <a:srgbClr val="262626"/>
+                </a:solidFill>
+                <a:latin typeface="メイリオ" pitchFamily="34" charset="0"/>
+                <a:ea typeface="メイリオ" pitchFamily="34" charset="-122"/>
+                <a:cs typeface="メイリオ" pitchFamily="34" charset="-120"/>
+              </a:rPr>
+              <a:t>：継続</a:t>
+            </a:r>
+            <a:endParaRPr lang="ja-JP" sz="2200" dirty="0"/>
+          </a:p>
+        </p:txBody>
+      </p:sp>
+      <p:sp>
+        <p:nvSpPr>
+          <p:cNvPr id="18" name="Text 16"/>
+          <p:cNvSpPr txBox="1"/>
+          <p:nvPr/>
+        </p:nvSpPr>
+        <p:spPr>
+          <a:xfrm>
+            <a:off x="585216" y="3733495"/>
+            <a:ext cx="11018520" cy="374904"/>
+          </a:xfrm>
+          <a:prstGeom prst="rect">
+            <a:avLst/>
+          </a:prstGeom>
+          <a:noFill/>
+          <a:ln/>
+        </p:spPr>
+        <p:txBody>
+          <a:bodyPr wrap="square" lIns="0" tIns="0" rIns="0" bIns="0" rtlCol="0" anchor="t"/>
+          <a:lstStyle/>
+          <a:p>
+            <a:pPr algn="l" indent="0" marL="0">
+              <a:buNone/>
+            </a:pPr>
+            <a:r>
+              <a:rPr lang="ja-JP" altLang="en-US" sz="2200" b="1" dirty="0">
+                <a:solidFill>
+                  <a:srgbClr val="262626"/>
+                </a:solidFill>
+                <a:latin typeface="メイリオ" pitchFamily="34" charset="0"/>
+                <a:ea typeface="メイリオ" pitchFamily="34" charset="-122"/>
+                <a:cs typeface="メイリオ" pitchFamily="34" charset="-120"/>
+              </a:rPr>
+              <a:t>クロピドグレル 75 mg</a:t>
+            </a:r>
+            <a:r>
+              <a:rPr lang="ja-JP" altLang="en-US" sz="2200" dirty="0">
+                <a:solidFill>
+                  <a:srgbClr val="262626"/>
+                </a:solidFill>
+                <a:latin typeface="メイリオ" pitchFamily="34" charset="0"/>
+                <a:ea typeface="メイリオ" pitchFamily="34" charset="-122"/>
+                <a:cs typeface="メイリオ" pitchFamily="34" charset="-120"/>
+              </a:rPr>
+              <a:t>：PCI 施行医（循環器 ◯◯医師）と相談し、</a:t>
+            </a:r>
+            <a:endParaRPr lang="ja-JP" sz="2200" dirty="0"/>
+          </a:p>
+        </p:txBody>
+      </p:sp>
+      <p:sp>
+        <p:nvSpPr>
+          <p:cNvPr id="19" name="Text 17"/>
+          <p:cNvSpPr txBox="1"/>
+          <p:nvPr/>
+        </p:nvSpPr>
+        <p:spPr>
+          <a:xfrm>
+            <a:off x="896112" y="4105656"/>
+            <a:ext cx="10707624" cy="374904"/>
+          </a:xfrm>
+          <a:prstGeom prst="rect">
+            <a:avLst/>
+          </a:prstGeom>
+          <a:noFill/>
+          <a:ln/>
+        </p:spPr>
+        <p:txBody>
+          <a:bodyPr wrap="square" lIns="0" tIns="0" rIns="0" bIns="0" rtlCol="0" anchor="t"/>
+          <a:lstStyle/>
+          <a:p>
+            <a:pPr algn="l" indent="0" marL="0">
+              <a:buNone/>
+            </a:pPr>
+            <a:r>
+              <a:rPr lang="ja-JP" altLang="en-US" sz="2200" dirty="0">
+                <a:solidFill>
+                  <a:srgbClr val="262626"/>
+                </a:solidFill>
+                <a:latin typeface="メイリオ" pitchFamily="34" charset="0"/>
+                <a:ea typeface="メイリオ" pitchFamily="34" charset="-122"/>
+                <a:cs typeface="メイリオ" pitchFamily="34" charset="-120"/>
+              </a:rPr>
+              <a:t>最終内服は手術 7 日前の朝（◯/◯ 8 時）。</a:t>
+            </a:r>
+            <a:endParaRPr lang="ja-JP" sz="2200" dirty="0"/>
+          </a:p>
+        </p:txBody>
+      </p:sp>
+      <p:sp>
+        <p:nvSpPr>
+          <p:cNvPr id="20" name="Text 18"/>
+          <p:cNvSpPr txBox="1"/>
+          <p:nvPr/>
+        </p:nvSpPr>
+        <p:spPr>
+          <a:xfrm>
+            <a:off x="896112" y="4441241"/>
+            <a:ext cx="10707624" cy="374904"/>
+          </a:xfrm>
+          <a:prstGeom prst="rect">
+            <a:avLst/>
+          </a:prstGeom>
+          <a:noFill/>
+          <a:ln/>
+        </p:spPr>
+        <p:txBody>
+          <a:bodyPr wrap="square" lIns="0" tIns="0" rIns="0" bIns="0" rtlCol="0" anchor="t"/>
+          <a:lstStyle/>
+          <a:p>
+            <a:pPr algn="l" indent="0" marL="0">
+              <a:buNone/>
+            </a:pPr>
+            <a:r>
+              <a:rPr lang="ja-JP" altLang="en-US" sz="2200" dirty="0">
+                <a:solidFill>
+                  <a:srgbClr val="262626"/>
+                </a:solidFill>
+                <a:latin typeface="メイリオ" pitchFamily="34" charset="0"/>
+                <a:ea typeface="メイリオ" pitchFamily="34" charset="-122"/>
+                <a:cs typeface="メイリオ" pitchFamily="34" charset="-120"/>
+              </a:rPr>
+              <a:t>脊髄くも膜下麻酔のため </a:t>
+            </a:r>
+            <a:r>
+              <a:rPr lang="ja-JP" altLang="en-US" sz="2200" b="1" dirty="0">
+                <a:solidFill>
+                  <a:srgbClr val="D55E00"/>
+                </a:solidFill>
+                <a:latin typeface="メイリオ" pitchFamily="34" charset="0"/>
+                <a:ea typeface="メイリオ" pitchFamily="34" charset="-122"/>
+                <a:cs typeface="メイリオ" pitchFamily="34" charset="-120"/>
+              </a:rPr>
+              <a:t>7 日以上</a:t>
+            </a:r>
+            <a:r>
+              <a:rPr lang="ja-JP" altLang="en-US" sz="2200" dirty="0">
+                <a:solidFill>
+                  <a:srgbClr val="262626"/>
+                </a:solidFill>
+                <a:latin typeface="メイリオ" pitchFamily="34" charset="0"/>
+                <a:ea typeface="メイリオ" pitchFamily="34" charset="-122"/>
+                <a:cs typeface="メイリオ" pitchFamily="34" charset="-120"/>
+              </a:rPr>
+              <a:t>あける。再開は止血を確認してから</a:t>
+            </a:r>
+            <a:endParaRPr lang="ja-JP" sz="2200" dirty="0"/>
+          </a:p>
+        </p:txBody>
+      </p:sp>
+      <p:sp>
+        <p:nvSpPr>
+          <p:cNvPr id="21" name="Text 19"/>
+          <p:cNvSpPr txBox="1"/>
+          <p:nvPr/>
+        </p:nvSpPr>
+        <p:spPr>
+          <a:xfrm>
+            <a:off x="896112" y="4775911"/>
+            <a:ext cx="10707624" cy="374904"/>
+          </a:xfrm>
+          <a:prstGeom prst="rect">
+            <a:avLst/>
+          </a:prstGeom>
+          <a:noFill/>
+          <a:ln/>
+        </p:spPr>
+        <p:txBody>
+          <a:bodyPr wrap="square" lIns="0" tIns="0" rIns="0" bIns="0" rtlCol="0" anchor="t"/>
+          <a:lstStyle/>
+          <a:p>
+            <a:pPr algn="l" indent="0" marL="0">
+              <a:buNone/>
+            </a:pPr>
+            <a:r>
+              <a:rPr lang="ja-JP" altLang="en-US" sz="2200" dirty="0">
+                <a:solidFill>
+                  <a:srgbClr val="262626"/>
+                </a:solidFill>
+                <a:latin typeface="メイリオ" pitchFamily="34" charset="0"/>
+                <a:ea typeface="メイリオ" pitchFamily="34" charset="-122"/>
+                <a:cs typeface="メイリオ" pitchFamily="34" charset="-120"/>
+              </a:rPr>
+              <a:t>（負荷投与なら穿刺から 6 時間以上後）</a:t>
+            </a:r>
+            <a:endParaRPr lang="ja-JP" sz="2200" dirty="0"/>
+          </a:p>
+        </p:txBody>
+      </p:sp>
+      <p:sp>
+        <p:nvSpPr>
+          <p:cNvPr id="22" name="Text 20"/>
+          <p:cNvSpPr txBox="1"/>
+          <p:nvPr/>
+        </p:nvSpPr>
+        <p:spPr>
+          <a:xfrm>
+            <a:off x="502920" y="5426964"/>
+            <a:ext cx="11183112" cy="457200"/>
+          </a:xfrm>
+          <a:prstGeom prst="rect">
+            <a:avLst/>
+          </a:prstGeom>
+          <a:noFill/>
+          <a:ln/>
+        </p:spPr>
+        <p:txBody>
+          <a:bodyPr wrap="square" lIns="0" tIns="0" rIns="0" bIns="0" rtlCol="0" anchor="t"/>
+          <a:lstStyle/>
+          <a:p>
+            <a:pPr algn="ctr" indent="0" marL="0">
+              <a:buNone/>
+            </a:pPr>
             <a:r>
               <a:rPr lang="ja-JP" altLang="en-US" sz="2400" b="1" dirty="0">
                 <a:solidFill>
-                  <a:srgbClr val="0072B2"/>
-                </a:solidFill>
-                <a:latin typeface="メイリオ" pitchFamily="34" charset="0"/>
-                <a:ea typeface="メイリオ" pitchFamily="34" charset="-122"/>
-                <a:cs typeface="メイリオ" pitchFamily="34" charset="-120"/>
-              </a:rPr>
-              <a:t>出血リスク × 血栓リスク</a:t>
-            </a:r>
-            <a:r>
-              <a:rPr lang="ja-JP" altLang="en-US" sz="2400" dirty="0">
-                <a:solidFill>
                   <a:srgbClr val="262626"/>
                 </a:solidFill>
                 <a:latin typeface="メイリオ" pitchFamily="34" charset="0"/>
                 <a:ea typeface="メイリオ" pitchFamily="34" charset="-122"/>
                 <a:cs typeface="メイリオ" pitchFamily="34" charset="-120"/>
               </a:rPr>
-              <a:t>で決める。止血できる手技は続ける</a:t>
-            </a:r>
-            <a:endParaRPr lang="ja-JP" sz="2400" dirty="0"/>
-          </a:p>
-          <a:p>
-            <a:pPr algn="l" marL="355600" indent="-355600">
-              <a:spcAft>
-                <a:spcPts val="2800"/>
-              </a:spcAft>
-              <a:buSzPct val="100000"/>
-              <a:buChar char="•"/>
-            </a:pPr>
-            <a:r>
-              <a:rPr lang="ja-JP" altLang="en-US" sz="2400" dirty="0">
+              <a:t>『◯日前から中止』ではなく、</a:t>
+            </a:r>
+            <a:r>
+              <a:rPr lang="ja-JP" altLang="en-US" sz="2400" b="1" dirty="0">
+                <a:solidFill>
+                  <a:srgbClr val="D55E00"/>
+                </a:solidFill>
+                <a:latin typeface="メイリオ" pitchFamily="34" charset="0"/>
+                <a:ea typeface="メイリオ" pitchFamily="34" charset="-122"/>
+                <a:cs typeface="メイリオ" pitchFamily="34" charset="-120"/>
+              </a:rPr>
+              <a:t>最終内服の日時と再開の条件</a:t>
+            </a:r>
+            <a:r>
+              <a:rPr lang="ja-JP" altLang="en-US" sz="2400" b="1" dirty="0">
                 <a:solidFill>
                   <a:srgbClr val="262626"/>
                 </a:solidFill>
@@ -13295,125 +14497,7 @@
                 <a:ea typeface="メイリオ" pitchFamily="34" charset="-122"/>
                 <a:cs typeface="メイリオ" pitchFamily="34" charset="-120"/>
               </a:rPr>
-              <a:t>ワルファリン 5 日、DOAC 1〜2 日。</a:t>
-            </a:r>
-            <a:r>
-              <a:rPr lang="ja-JP" altLang="en-US" sz="2400" b="1" dirty="0">
-                <a:solidFill>
-                  <a:srgbClr val="D55E00"/>
-                </a:solidFill>
-                <a:latin typeface="メイリオ" pitchFamily="34" charset="0"/>
-                <a:ea typeface="メイリオ" pitchFamily="34" charset="-122"/>
-                <a:cs typeface="メイリオ" pitchFamily="34" charset="-120"/>
-              </a:rPr>
-              <a:t>ブリッジは原則しない</a:t>
-            </a:r>
-            <a:endParaRPr lang="ja-JP" sz="2400" dirty="0"/>
-          </a:p>
-          <a:p>
-            <a:pPr algn="l" marL="355600" indent="-355600">
-              <a:spcAft>
-                <a:spcPts val="2800"/>
-              </a:spcAft>
-              <a:buSzPct val="100000"/>
-              <a:buChar char="•"/>
-            </a:pPr>
-            <a:r>
-              <a:rPr lang="ja-JP" altLang="en-US" sz="2400" dirty="0">
-                <a:solidFill>
-                  <a:srgbClr val="262626"/>
-                </a:solidFill>
-                <a:latin typeface="メイリオ" pitchFamily="34" charset="0"/>
-                <a:ea typeface="メイリオ" pitchFamily="34" charset="-122"/>
-                <a:cs typeface="メイリオ" pitchFamily="34" charset="-120"/>
-              </a:rPr>
-              <a:t>アスピリンは原則続ける。P2Y12 阻害薬の中止は </a:t>
-            </a:r>
-            <a:r>
-              <a:rPr lang="ja-JP" altLang="en-US" sz="2400" b="1" dirty="0">
-                <a:solidFill>
-                  <a:srgbClr val="0072B2"/>
-                </a:solidFill>
-                <a:latin typeface="メイリオ" pitchFamily="34" charset="0"/>
-                <a:ea typeface="メイリオ" pitchFamily="34" charset="-122"/>
-                <a:cs typeface="メイリオ" pitchFamily="34" charset="-120"/>
-              </a:rPr>
-              <a:t>PCI 施行医と</a:t>
-            </a:r>
-            <a:endParaRPr lang="ja-JP" sz="2400" dirty="0"/>
-          </a:p>
-          <a:p>
-            <a:pPr algn="l" marL="355600" indent="-355600">
-              <a:spcAft>
-                <a:spcPts val="2800"/>
-              </a:spcAft>
-              <a:buSzPct val="100000"/>
-              <a:buChar char="•"/>
-            </a:pPr>
-            <a:r>
-              <a:rPr lang="ja-JP" altLang="en-US" sz="2400" dirty="0">
-                <a:solidFill>
-                  <a:srgbClr val="262626"/>
-                </a:solidFill>
-                <a:latin typeface="メイリオ" pitchFamily="34" charset="0"/>
-                <a:ea typeface="メイリオ" pitchFamily="34" charset="-122"/>
-                <a:cs typeface="メイリオ" pitchFamily="34" charset="-120"/>
-              </a:rPr>
-              <a:t>区域麻酔は手術より長い：</a:t>
-            </a:r>
-            <a:r>
-              <a:rPr lang="ja-JP" altLang="en-US" sz="2400" b="1" dirty="0">
-                <a:solidFill>
-                  <a:srgbClr val="D55E00"/>
-                </a:solidFill>
-                <a:latin typeface="メイリオ" pitchFamily="34" charset="0"/>
-                <a:ea typeface="メイリオ" pitchFamily="34" charset="-122"/>
-                <a:cs typeface="メイリオ" pitchFamily="34" charset="-120"/>
-              </a:rPr>
-              <a:t>高用量 DOAC 72 時間</a:t>
-            </a:r>
-            <a:r>
-              <a:rPr lang="ja-JP" altLang="en-US" sz="2400" dirty="0">
-                <a:solidFill>
-                  <a:srgbClr val="262626"/>
-                </a:solidFill>
-                <a:latin typeface="メイリオ" pitchFamily="34" charset="0"/>
-                <a:ea typeface="メイリオ" pitchFamily="34" charset="-122"/>
-                <a:cs typeface="メイリオ" pitchFamily="34" charset="-120"/>
-              </a:rPr>
-              <a:t>（ASRA 第 5 版）</a:t>
-            </a:r>
-            <a:endParaRPr lang="ja-JP" sz="2400" dirty="0"/>
-          </a:p>
-          <a:p>
-            <a:pPr algn="l" marL="355600" indent="-355600">
-              <a:spcAft>
-                <a:spcPts val="2800"/>
-              </a:spcAft>
-              <a:buSzPct val="100000"/>
-              <a:buChar char="•"/>
-            </a:pPr>
-            <a:r>
-              <a:rPr lang="ja-JP" altLang="en-US" sz="2400" dirty="0">
-                <a:solidFill>
-                  <a:srgbClr val="262626"/>
-                </a:solidFill>
-                <a:latin typeface="メイリオ" pitchFamily="34" charset="0"/>
-                <a:ea typeface="メイリオ" pitchFamily="34" charset="-122"/>
-                <a:cs typeface="メイリオ" pitchFamily="34" charset="-120"/>
-              </a:rPr>
-              <a:t>最終内服の日時・再開の条件・相談相手を記録する。</a:t>
-            </a:r>
-            <a:r>
-              <a:rPr lang="ja-JP" altLang="en-US" sz="2400" b="1" dirty="0">
-                <a:solidFill>
-                  <a:srgbClr val="D55E00"/>
-                </a:solidFill>
-                <a:latin typeface="メイリオ" pitchFamily="34" charset="0"/>
-                <a:ea typeface="メイリオ" pitchFamily="34" charset="-122"/>
-                <a:cs typeface="メイリオ" pitchFamily="34" charset="-120"/>
-              </a:rPr>
-              <a:t>緊急は中和薬</a:t>
+              <a:t>を書く</a:t>
             </a:r>
             <a:endParaRPr lang="ja-JP" sz="2400" dirty="0"/>
           </a:p>

--- a/slides/4-12_antithrombotic_drugs/4-12_antithrombotic_drugs.pptx
+++ b/slides/4-12_antithrombotic_drugs/4-12_antithrombotic_drugs.pptx
@@ -2415,7 +2415,7 @@
                 <a:ea typeface="メイリオ" pitchFamily="34" charset="-122"/>
                 <a:cs typeface="メイリオ" pitchFamily="34" charset="-120"/>
               </a:rPr>
-              <a:t>抗血小板</a:t>
+              <a:t>抗血小</a:t>
             </a:r>
             <a:endParaRPr lang="ja-JP" sz="1050" dirty="0"/>
           </a:p>
@@ -2432,7 +2432,7 @@
                 <a:ea typeface="メイリオ" pitchFamily="34" charset="-122"/>
                 <a:cs typeface="メイリオ" pitchFamily="34" charset="-120"/>
               </a:rPr>
-              <a:t>薬</a:t>
+              <a:t>板薬</a:t>
             </a:r>
             <a:endParaRPr lang="ja-JP" sz="1050" dirty="0"/>
           </a:p>
@@ -3059,7 +3059,7 @@
                 <a:ea typeface="メイリオ" pitchFamily="34" charset="-122"/>
                 <a:cs typeface="メイリオ" pitchFamily="34" charset="-120"/>
               </a:rPr>
-              <a:t>抗血小板</a:t>
+              <a:t>抗血小</a:t>
             </a:r>
             <a:endParaRPr lang="ja-JP" sz="1050" dirty="0"/>
           </a:p>
@@ -3076,7 +3076,7 @@
                 <a:ea typeface="メイリオ" pitchFamily="34" charset="-122"/>
                 <a:cs typeface="メイリオ" pitchFamily="34" charset="-120"/>
               </a:rPr>
-              <a:t>薬</a:t>
+              <a:t>板薬</a:t>
             </a:r>
             <a:endParaRPr lang="ja-JP" sz="1050" dirty="0"/>
           </a:p>
@@ -4789,7 +4789,7 @@
                 <a:ea typeface="メイリオ" pitchFamily="34" charset="-122"/>
                 <a:cs typeface="メイリオ" pitchFamily="34" charset="-120"/>
               </a:rPr>
-              <a:t>抗血小板</a:t>
+              <a:t>抗血小</a:t>
             </a:r>
             <a:endParaRPr lang="ja-JP" sz="1050" dirty="0"/>
           </a:p>
@@ -4806,7 +4806,7 @@
                 <a:ea typeface="メイリオ" pitchFamily="34" charset="-122"/>
                 <a:cs typeface="メイリオ" pitchFamily="34" charset="-120"/>
               </a:rPr>
-              <a:t>薬</a:t>
+              <a:t>板薬</a:t>
             </a:r>
             <a:endParaRPr lang="ja-JP" sz="1050" dirty="0"/>
           </a:p>
@@ -5754,7 +5754,7 @@
                 <a:ea typeface="メイリオ" pitchFamily="34" charset="-122"/>
                 <a:cs typeface="メイリオ" pitchFamily="34" charset="-120"/>
               </a:rPr>
-              <a:t>抗血小板</a:t>
+              <a:t>抗血小</a:t>
             </a:r>
             <a:endParaRPr lang="ja-JP" sz="1050" dirty="0"/>
           </a:p>
@@ -5771,7 +5771,7 @@
                 <a:ea typeface="メイリオ" pitchFamily="34" charset="-122"/>
                 <a:cs typeface="メイリオ" pitchFamily="34" charset="-120"/>
               </a:rPr>
-              <a:t>薬</a:t>
+              <a:t>板薬</a:t>
             </a:r>
             <a:endParaRPr lang="ja-JP" sz="1050" dirty="0"/>
           </a:p>
@@ -6172,7 +6172,7 @@
         <p:spPr>
           <a:xfrm>
             <a:off x="576072" y="2063801"/>
-            <a:ext cx="6249010" cy="374904"/>
+            <a:ext cx="320040" cy="374904"/>
           </a:xfrm>
           <a:prstGeom prst="rect">
             <a:avLst/>
@@ -6188,7 +6188,7 @@
               <a:buNone/>
             </a:pPr>
             <a:r>
-              <a:rPr lang="ja-JP" altLang="en-US" sz="2200" b="1" dirty="0">
+              <a:rPr lang="ja-JP" altLang="en-US" sz="2200" dirty="0">
                 <a:solidFill>
                   <a:srgbClr val="262626"/>
                 </a:solidFill>
@@ -6196,18 +6196,7 @@
                 <a:ea typeface="メイリオ" pitchFamily="34" charset="-122"/>
                 <a:cs typeface="メイリオ" pitchFamily="34" charset="-120"/>
               </a:rPr>
-              <a:t>低リスク：</a:t>
-            </a:r>
-            <a:r>
-              <a:rPr lang="ja-JP" altLang="en-US" sz="2200" dirty="0">
-                <a:solidFill>
-                  <a:srgbClr val="262626"/>
-                </a:solidFill>
-                <a:latin typeface="メイリオ" pitchFamily="34" charset="0"/>
-                <a:ea typeface="メイリオ" pitchFamily="34" charset="-122"/>
-                <a:cs typeface="メイリオ" pitchFamily="34" charset="-120"/>
-              </a:rPr>
-              <a:t>1 日休薬、翌日に再開</a:t>
+              <a:t>•</a:t>
             </a:r>
             <a:endParaRPr lang="ja-JP" sz="2200" dirty="0"/>
           </a:p>
@@ -6221,8 +6210,8 @@
         </p:nvSpPr>
         <p:spPr>
           <a:xfrm>
-            <a:off x="576072" y="2398471"/>
-            <a:ext cx="6249010" cy="374904"/>
+            <a:off x="832104" y="2063801"/>
+            <a:ext cx="5992978" cy="374904"/>
           </a:xfrm>
           <a:prstGeom prst="rect">
             <a:avLst/>
@@ -6246,7 +6235,7 @@
                 <a:ea typeface="メイリオ" pitchFamily="34" charset="-122"/>
                 <a:cs typeface="メイリオ" pitchFamily="34" charset="-120"/>
               </a:rPr>
-              <a:t>高リスク：</a:t>
+              <a:t>低リスク：</a:t>
             </a:r>
             <a:r>
               <a:rPr lang="ja-JP" altLang="en-US" sz="2200" dirty="0">
@@ -6257,7 +6246,7 @@
                 <a:ea typeface="メイリオ" pitchFamily="34" charset="-122"/>
                 <a:cs typeface="メイリオ" pitchFamily="34" charset="-120"/>
               </a:rPr>
-              <a:t>2 日休薬</a:t>
+              <a:t>1 日休薬、翌日に再開</a:t>
             </a:r>
             <a:endParaRPr lang="ja-JP" sz="2200" dirty="0"/>
           </a:p>
@@ -6271,6 +6260,95 @@
         </p:nvSpPr>
         <p:spPr>
           <a:xfrm>
+            <a:off x="576072" y="2398471"/>
+            <a:ext cx="320040" cy="374904"/>
+          </a:xfrm>
+          <a:prstGeom prst="rect">
+            <a:avLst/>
+          </a:prstGeom>
+          <a:noFill/>
+          <a:ln/>
+        </p:spPr>
+        <p:txBody>
+          <a:bodyPr wrap="square" lIns="0" tIns="0" rIns="0" bIns="0" rtlCol="0" anchor="t"/>
+          <a:lstStyle/>
+          <a:p>
+            <a:pPr algn="l" indent="0" marL="0">
+              <a:buNone/>
+            </a:pPr>
+            <a:r>
+              <a:rPr lang="ja-JP" altLang="en-US" sz="2200" dirty="0">
+                <a:solidFill>
+                  <a:srgbClr val="262626"/>
+                </a:solidFill>
+                <a:latin typeface="メイリオ" pitchFamily="34" charset="0"/>
+                <a:ea typeface="メイリオ" pitchFamily="34" charset="-122"/>
+                <a:cs typeface="メイリオ" pitchFamily="34" charset="-120"/>
+              </a:rPr>
+              <a:t>•</a:t>
+            </a:r>
+            <a:endParaRPr lang="ja-JP" sz="2200" dirty="0"/>
+          </a:p>
+        </p:txBody>
+      </p:sp>
+      <p:sp>
+        <p:nvSpPr>
+          <p:cNvPr id="19" name="Text 17"/>
+          <p:cNvSpPr txBox="1"/>
+          <p:nvPr/>
+        </p:nvSpPr>
+        <p:spPr>
+          <a:xfrm>
+            <a:off x="832104" y="2398471"/>
+            <a:ext cx="5992978" cy="374904"/>
+          </a:xfrm>
+          <a:prstGeom prst="rect">
+            <a:avLst/>
+          </a:prstGeom>
+          <a:noFill/>
+          <a:ln/>
+        </p:spPr>
+        <p:txBody>
+          <a:bodyPr wrap="square" lIns="0" tIns="0" rIns="0" bIns="0" rtlCol="0" anchor="t"/>
+          <a:lstStyle/>
+          <a:p>
+            <a:pPr algn="l" indent="0" marL="0">
+              <a:buNone/>
+            </a:pPr>
+            <a:r>
+              <a:rPr lang="ja-JP" altLang="en-US" sz="2200" b="1" dirty="0">
+                <a:solidFill>
+                  <a:srgbClr val="262626"/>
+                </a:solidFill>
+                <a:latin typeface="メイリオ" pitchFamily="34" charset="0"/>
+                <a:ea typeface="メイリオ" pitchFamily="34" charset="-122"/>
+                <a:cs typeface="メイリオ" pitchFamily="34" charset="-120"/>
+              </a:rPr>
+              <a:t>高リスク：</a:t>
+            </a:r>
+            <a:r>
+              <a:rPr lang="ja-JP" altLang="en-US" sz="2200" dirty="0">
+                <a:solidFill>
+                  <a:srgbClr val="262626"/>
+                </a:solidFill>
+                <a:latin typeface="メイリオ" pitchFamily="34" charset="0"/>
+                <a:ea typeface="メイリオ" pitchFamily="34" charset="-122"/>
+                <a:cs typeface="メイリオ" pitchFamily="34" charset="-120"/>
+              </a:rPr>
+              <a:t>2 日休薬</a:t>
+            </a:r>
+            <a:endParaRPr lang="ja-JP" sz="2200" dirty="0"/>
+          </a:p>
+        </p:txBody>
+      </p:sp>
+      <p:sp>
+        <p:nvSpPr>
+          <p:cNvPr id="20" name="Text 18"/>
+          <p:cNvSpPr txBox="1"/>
+          <p:nvPr/>
+        </p:nvSpPr>
+        <p:spPr>
+          <a:xfrm>
             <a:off x="576072" y="2734056"/>
             <a:ext cx="6249010" cy="374904"/>
           </a:xfrm>
@@ -6304,7 +6382,7 @@
       </p:sp>
       <p:sp>
         <p:nvSpPr>
-          <p:cNvPr id="19" name="Text 17"/>
+          <p:cNvPr id="21" name="Text 19"/>
           <p:cNvSpPr txBox="1"/>
           <p:nvPr/>
         </p:nvSpPr>
@@ -6343,14 +6421,14 @@
       </p:sp>
       <p:sp>
         <p:nvSpPr>
-          <p:cNvPr id="20" name="Text 18"/>
+          <p:cNvPr id="22" name="Text 20"/>
           <p:cNvSpPr txBox="1"/>
           <p:nvPr/>
         </p:nvSpPr>
         <p:spPr>
           <a:xfrm>
             <a:off x="576072" y="3404311"/>
-            <a:ext cx="6249010" cy="374904"/>
+            <a:ext cx="320040" cy="374904"/>
           </a:xfrm>
           <a:prstGeom prst="rect">
             <a:avLst/>
@@ -6366,6 +6444,45 @@
               <a:buNone/>
             </a:pPr>
             <a:r>
+              <a:rPr lang="ja-JP" altLang="en-US" sz="2200" dirty="0">
+                <a:solidFill>
+                  <a:srgbClr val="262626"/>
+                </a:solidFill>
+                <a:latin typeface="メイリオ" pitchFamily="34" charset="0"/>
+                <a:ea typeface="メイリオ" pitchFamily="34" charset="-122"/>
+                <a:cs typeface="メイリオ" pitchFamily="34" charset="-120"/>
+              </a:rPr>
+              <a:t>•</a:t>
+            </a:r>
+            <a:endParaRPr lang="ja-JP" sz="2200" dirty="0"/>
+          </a:p>
+        </p:txBody>
+      </p:sp>
+      <p:sp>
+        <p:nvSpPr>
+          <p:cNvPr id="23" name="Text 21"/>
+          <p:cNvSpPr txBox="1"/>
+          <p:nvPr/>
+        </p:nvSpPr>
+        <p:spPr>
+          <a:xfrm>
+            <a:off x="832104" y="3404311"/>
+            <a:ext cx="5992978" cy="374904"/>
+          </a:xfrm>
+          <a:prstGeom prst="rect">
+            <a:avLst/>
+          </a:prstGeom>
+          <a:noFill/>
+          <a:ln/>
+        </p:spPr>
+        <p:txBody>
+          <a:bodyPr wrap="square" lIns="0" tIns="0" rIns="0" bIns="0" rtlCol="0" anchor="t"/>
+          <a:lstStyle/>
+          <a:p>
+            <a:pPr algn="l" indent="0" marL="0">
+              <a:buNone/>
+            </a:pPr>
+            <a:r>
               <a:rPr lang="ja-JP" altLang="en-US" sz="2200" b="1" dirty="0">
                 <a:solidFill>
                   <a:srgbClr val="262626"/>
@@ -6382,7 +6499,7 @@
       </p:sp>
       <p:sp>
         <p:nvSpPr>
-          <p:cNvPr id="21" name="Text 19"/>
+          <p:cNvPr id="24" name="Text 22"/>
           <p:cNvSpPr txBox="1"/>
           <p:nvPr/>
         </p:nvSpPr>
@@ -6421,7 +6538,7 @@
       </p:sp>
       <p:sp>
         <p:nvSpPr>
-          <p:cNvPr id="22" name="Text 20"/>
+          <p:cNvPr id="25" name="Text 23"/>
           <p:cNvSpPr txBox="1"/>
           <p:nvPr/>
         </p:nvSpPr>
@@ -6460,14 +6577,14 @@
       </p:sp>
       <p:sp>
         <p:nvSpPr>
-          <p:cNvPr id="23" name="Text 21"/>
+          <p:cNvPr id="26" name="Text 24"/>
           <p:cNvSpPr txBox="1"/>
           <p:nvPr/>
         </p:nvSpPr>
         <p:spPr>
           <a:xfrm>
             <a:off x="576072" y="4410151"/>
-            <a:ext cx="6249010" cy="374904"/>
+            <a:ext cx="320040" cy="374904"/>
           </a:xfrm>
           <a:prstGeom prst="rect">
             <a:avLst/>
@@ -6483,6 +6600,45 @@
               <a:buNone/>
             </a:pPr>
             <a:r>
+              <a:rPr lang="ja-JP" altLang="en-US" sz="2200" dirty="0">
+                <a:solidFill>
+                  <a:srgbClr val="262626"/>
+                </a:solidFill>
+                <a:latin typeface="メイリオ" pitchFamily="34" charset="0"/>
+                <a:ea typeface="メイリオ" pitchFamily="34" charset="-122"/>
+                <a:cs typeface="メイリオ" pitchFamily="34" charset="-120"/>
+              </a:rPr>
+              <a:t>•</a:t>
+            </a:r>
+            <a:endParaRPr lang="ja-JP" sz="2200" dirty="0"/>
+          </a:p>
+        </p:txBody>
+      </p:sp>
+      <p:sp>
+        <p:nvSpPr>
+          <p:cNvPr id="27" name="Text 25"/>
+          <p:cNvSpPr txBox="1"/>
+          <p:nvPr/>
+        </p:nvSpPr>
+        <p:spPr>
+          <a:xfrm>
+            <a:off x="832104" y="4410151"/>
+            <a:ext cx="5992978" cy="374904"/>
+          </a:xfrm>
+          <a:prstGeom prst="rect">
+            <a:avLst/>
+          </a:prstGeom>
+          <a:noFill/>
+          <a:ln/>
+        </p:spPr>
+        <p:txBody>
+          <a:bodyPr wrap="square" lIns="0" tIns="0" rIns="0" bIns="0" rtlCol="0" anchor="t"/>
+          <a:lstStyle/>
+          <a:p>
+            <a:pPr algn="l" indent="0" marL="0">
+              <a:buNone/>
+            </a:pPr>
+            <a:r>
               <a:rPr lang="ja-JP" altLang="en-US" sz="2200" b="1" dirty="0">
                 <a:solidFill>
                   <a:srgbClr val="D55E00"/>
@@ -6499,7 +6655,7 @@
       </p:sp>
       <p:sp>
         <p:nvSpPr>
-          <p:cNvPr id="24" name="Shape 22"/>
+          <p:cNvPr id="28" name="Shape 26"/>
           <p:cNvSpPr/>
           <p:nvPr/>
         </p:nvSpPr>
@@ -6521,7 +6677,7 @@
       </p:sp>
       <p:sp>
         <p:nvSpPr>
-          <p:cNvPr id="25" name="Text 23"/>
+          <p:cNvPr id="29" name="Text 27"/>
           <p:cNvSpPr txBox="1"/>
           <p:nvPr/>
         </p:nvSpPr>
@@ -6560,14 +6716,14 @@
       </p:sp>
       <p:sp>
         <p:nvSpPr>
-          <p:cNvPr id="26" name="Text 24"/>
+          <p:cNvPr id="30" name="Text 28"/>
           <p:cNvSpPr txBox="1"/>
           <p:nvPr/>
         </p:nvSpPr>
         <p:spPr>
           <a:xfrm>
             <a:off x="7190842" y="2063801"/>
-            <a:ext cx="4421124" cy="374904"/>
+            <a:ext cx="320040" cy="374904"/>
           </a:xfrm>
           <a:prstGeom prst="rect">
             <a:avLst/>
@@ -6583,6 +6739,45 @@
               <a:buNone/>
             </a:pPr>
             <a:r>
+              <a:rPr lang="ja-JP" altLang="en-US" sz="2200" dirty="0">
+                <a:solidFill>
+                  <a:srgbClr val="262626"/>
+                </a:solidFill>
+                <a:latin typeface="メイリオ" pitchFamily="34" charset="0"/>
+                <a:ea typeface="メイリオ" pitchFamily="34" charset="-122"/>
+                <a:cs typeface="メイリオ" pitchFamily="34" charset="-120"/>
+              </a:rPr>
+              <a:t>•</a:t>
+            </a:r>
+            <a:endParaRPr lang="ja-JP" sz="2200" dirty="0"/>
+          </a:p>
+        </p:txBody>
+      </p:sp>
+      <p:sp>
+        <p:nvSpPr>
+          <p:cNvPr id="31" name="Text 29"/>
+          <p:cNvSpPr txBox="1"/>
+          <p:nvPr/>
+        </p:nvSpPr>
+        <p:spPr>
+          <a:xfrm>
+            <a:off x="7446874" y="2063801"/>
+            <a:ext cx="4165092" cy="374904"/>
+          </a:xfrm>
+          <a:prstGeom prst="rect">
+            <a:avLst/>
+          </a:prstGeom>
+          <a:noFill/>
+          <a:ln/>
+        </p:spPr>
+        <p:txBody>
+          <a:bodyPr wrap="square" lIns="0" tIns="0" rIns="0" bIns="0" rtlCol="0" anchor="t"/>
+          <a:lstStyle/>
+          <a:p>
+            <a:pPr algn="l" indent="0" marL="0">
+              <a:buNone/>
+            </a:pPr>
+            <a:r>
               <a:rPr lang="ja-JP" altLang="en-US" sz="2200" b="1" dirty="0">
                 <a:solidFill>
                   <a:srgbClr val="262626"/>
@@ -6599,7 +6794,7 @@
       </p:sp>
       <p:sp>
         <p:nvSpPr>
-          <p:cNvPr id="27" name="Text 25"/>
+          <p:cNvPr id="32" name="Text 30"/>
           <p:cNvSpPr txBox="1"/>
           <p:nvPr/>
         </p:nvSpPr>
@@ -6649,14 +6844,14 @@
       </p:sp>
       <p:sp>
         <p:nvSpPr>
-          <p:cNvPr id="28" name="Text 26"/>
+          <p:cNvPr id="33" name="Text 31"/>
           <p:cNvSpPr txBox="1"/>
           <p:nvPr/>
         </p:nvSpPr>
         <p:spPr>
           <a:xfrm>
             <a:off x="7190842" y="2734056"/>
-            <a:ext cx="4421124" cy="374904"/>
+            <a:ext cx="320040" cy="374904"/>
           </a:xfrm>
           <a:prstGeom prst="rect">
             <a:avLst/>
@@ -6672,6 +6867,45 @@
               <a:buNone/>
             </a:pPr>
             <a:r>
+              <a:rPr lang="ja-JP" altLang="en-US" sz="2200" dirty="0">
+                <a:solidFill>
+                  <a:srgbClr val="262626"/>
+                </a:solidFill>
+                <a:latin typeface="メイリオ" pitchFamily="34" charset="0"/>
+                <a:ea typeface="メイリオ" pitchFamily="34" charset="-122"/>
+                <a:cs typeface="メイリオ" pitchFamily="34" charset="-120"/>
+              </a:rPr>
+              <a:t>•</a:t>
+            </a:r>
+            <a:endParaRPr lang="ja-JP" sz="2200" dirty="0"/>
+          </a:p>
+        </p:txBody>
+      </p:sp>
+      <p:sp>
+        <p:nvSpPr>
+          <p:cNvPr id="34" name="Text 32"/>
+          <p:cNvSpPr txBox="1"/>
+          <p:nvPr/>
+        </p:nvSpPr>
+        <p:spPr>
+          <a:xfrm>
+            <a:off x="7446874" y="2734056"/>
+            <a:ext cx="4165092" cy="374904"/>
+          </a:xfrm>
+          <a:prstGeom prst="rect">
+            <a:avLst/>
+          </a:prstGeom>
+          <a:noFill/>
+          <a:ln/>
+        </p:spPr>
+        <p:txBody>
+          <a:bodyPr wrap="square" lIns="0" tIns="0" rIns="0" bIns="0" rtlCol="0" anchor="t"/>
+          <a:lstStyle/>
+          <a:p>
+            <a:pPr algn="l" indent="0" marL="0">
+              <a:buNone/>
+            </a:pPr>
+            <a:r>
               <a:rPr lang="ja-JP" altLang="en-US" sz="2200" b="1" dirty="0">
                 <a:solidFill>
                   <a:srgbClr val="262626"/>
@@ -6680,7 +6914,7 @@
                 <a:ea typeface="メイリオ" pitchFamily="34" charset="-122"/>
                 <a:cs typeface="メイリオ" pitchFamily="34" charset="-120"/>
               </a:rPr>
-              <a:t>腎機能は eGFR ではなく CrCl</a:t>
+              <a:t>腎機能は eGFR ではなく</a:t>
             </a:r>
             <a:endParaRPr lang="ja-JP" sz="2200" dirty="0"/>
           </a:p>
@@ -6688,7 +6922,7 @@
       </p:sp>
       <p:sp>
         <p:nvSpPr>
-          <p:cNvPr id="29" name="Text 27"/>
+          <p:cNvPr id="35" name="Text 33"/>
           <p:cNvSpPr txBox="1"/>
           <p:nvPr/>
         </p:nvSpPr>
@@ -6711,6 +6945,17 @@
               <a:buNone/>
             </a:pPr>
             <a:r>
+              <a:rPr lang="ja-JP" altLang="en-US" sz="2200" b="1" dirty="0">
+                <a:solidFill>
+                  <a:srgbClr val="262626"/>
+                </a:solidFill>
+                <a:latin typeface="メイリオ" pitchFamily="34" charset="0"/>
+                <a:ea typeface="メイリオ" pitchFamily="34" charset="-122"/>
+                <a:cs typeface="メイリオ" pitchFamily="34" charset="-120"/>
+              </a:rPr>
+              <a:t>CrCl</a:t>
+            </a:r>
+            <a:r>
               <a:rPr lang="ja-JP" altLang="en-US" sz="2200" dirty="0">
                 <a:solidFill>
                   <a:srgbClr val="262626"/>
@@ -6727,14 +6972,14 @@
       </p:sp>
       <p:sp>
         <p:nvSpPr>
-          <p:cNvPr id="30" name="Text 28"/>
+          <p:cNvPr id="36" name="Text 34"/>
           <p:cNvSpPr txBox="1"/>
           <p:nvPr/>
         </p:nvSpPr>
         <p:spPr>
           <a:xfrm>
             <a:off x="7190842" y="3404311"/>
-            <a:ext cx="4421124" cy="374904"/>
+            <a:ext cx="320040" cy="374904"/>
           </a:xfrm>
           <a:prstGeom prst="rect">
             <a:avLst/>
@@ -6750,6 +6995,45 @@
               <a:buNone/>
             </a:pPr>
             <a:r>
+              <a:rPr lang="ja-JP" altLang="en-US" sz="2200" dirty="0">
+                <a:solidFill>
+                  <a:srgbClr val="262626"/>
+                </a:solidFill>
+                <a:latin typeface="メイリオ" pitchFamily="34" charset="0"/>
+                <a:ea typeface="メイリオ" pitchFamily="34" charset="-122"/>
+                <a:cs typeface="メイリオ" pitchFamily="34" charset="-120"/>
+              </a:rPr>
+              <a:t>•</a:t>
+            </a:r>
+            <a:endParaRPr lang="ja-JP" sz="2200" dirty="0"/>
+          </a:p>
+        </p:txBody>
+      </p:sp>
+      <p:sp>
+        <p:nvSpPr>
+          <p:cNvPr id="37" name="Text 35"/>
+          <p:cNvSpPr txBox="1"/>
+          <p:nvPr/>
+        </p:nvSpPr>
+        <p:spPr>
+          <a:xfrm>
+            <a:off x="7446874" y="3404311"/>
+            <a:ext cx="4165092" cy="374904"/>
+          </a:xfrm>
+          <a:prstGeom prst="rect">
+            <a:avLst/>
+          </a:prstGeom>
+          <a:noFill/>
+          <a:ln/>
+        </p:spPr>
+        <p:txBody>
+          <a:bodyPr wrap="square" lIns="0" tIns="0" rIns="0" bIns="0" rtlCol="0" anchor="t"/>
+          <a:lstStyle/>
+          <a:p>
+            <a:pPr algn="l" indent="0" marL="0">
+              <a:buNone/>
+            </a:pPr>
+            <a:r>
               <a:rPr lang="ja-JP" altLang="en-US" sz="2200" b="1" dirty="0">
                 <a:solidFill>
                   <a:srgbClr val="262626"/>
@@ -6766,7 +7050,7 @@
       </p:sp>
       <p:sp>
         <p:nvSpPr>
-          <p:cNvPr id="31" name="Text 29"/>
+          <p:cNvPr id="38" name="Text 36"/>
           <p:cNvSpPr txBox="1"/>
           <p:nvPr/>
         </p:nvSpPr>
@@ -6797,7 +7081,7 @@
                 <a:ea typeface="メイリオ" pitchFamily="34" charset="-122"/>
                 <a:cs typeface="メイリオ" pitchFamily="34" charset="-120"/>
               </a:rPr>
-              <a:t>（→ S6）</a:t>
+              <a:t>（→ 区域麻酔①）</a:t>
             </a:r>
             <a:endParaRPr lang="ja-JP" sz="2200" dirty="0"/>
           </a:p>
@@ -6805,14 +7089,14 @@
       </p:sp>
       <p:sp>
         <p:nvSpPr>
-          <p:cNvPr id="32" name="Text 30"/>
+          <p:cNvPr id="39" name="Text 37"/>
           <p:cNvSpPr txBox="1"/>
           <p:nvPr/>
         </p:nvSpPr>
         <p:spPr>
           <a:xfrm>
             <a:off x="7190842" y="4075481"/>
-            <a:ext cx="4421124" cy="374904"/>
+            <a:ext cx="320040" cy="374904"/>
           </a:xfrm>
           <a:prstGeom prst="rect">
             <a:avLst/>
@@ -6828,6 +7112,45 @@
               <a:buNone/>
             </a:pPr>
             <a:r>
+              <a:rPr lang="ja-JP" altLang="en-US" sz="2200" dirty="0">
+                <a:solidFill>
+                  <a:srgbClr val="262626"/>
+                </a:solidFill>
+                <a:latin typeface="メイリオ" pitchFamily="34" charset="0"/>
+                <a:ea typeface="メイリオ" pitchFamily="34" charset="-122"/>
+                <a:cs typeface="メイリオ" pitchFamily="34" charset="-120"/>
+              </a:rPr>
+              <a:t>•</a:t>
+            </a:r>
+            <a:endParaRPr lang="ja-JP" sz="2200" dirty="0"/>
+          </a:p>
+        </p:txBody>
+      </p:sp>
+      <p:sp>
+        <p:nvSpPr>
+          <p:cNvPr id="40" name="Text 38"/>
+          <p:cNvSpPr txBox="1"/>
+          <p:nvPr/>
+        </p:nvSpPr>
+        <p:spPr>
+          <a:xfrm>
+            <a:off x="7446874" y="4075481"/>
+            <a:ext cx="4165092" cy="374904"/>
+          </a:xfrm>
+          <a:prstGeom prst="rect">
+            <a:avLst/>
+          </a:prstGeom>
+          <a:noFill/>
+          <a:ln/>
+        </p:spPr>
+        <p:txBody>
+          <a:bodyPr wrap="square" lIns="0" tIns="0" rIns="0" bIns="0" rtlCol="0" anchor="t"/>
+          <a:lstStyle/>
+          <a:p>
+            <a:pPr algn="l" indent="0" marL="0">
+              <a:buNone/>
+            </a:pPr>
+            <a:r>
               <a:rPr lang="ja-JP" altLang="en-US" sz="2200" b="1" dirty="0">
                 <a:solidFill>
                   <a:srgbClr val="262626"/>
@@ -6844,7 +7167,7 @@
       </p:sp>
       <p:sp>
         <p:nvSpPr>
-          <p:cNvPr id="33" name="Text 31"/>
+          <p:cNvPr id="41" name="Text 39"/>
           <p:cNvSpPr txBox="1"/>
           <p:nvPr/>
         </p:nvSpPr>
@@ -7111,7 +7434,7 @@
                 <a:ea typeface="メイリオ" pitchFamily="34" charset="-122"/>
                 <a:cs typeface="メイリオ" pitchFamily="34" charset="-120"/>
               </a:rPr>
-              <a:t>抗血小板</a:t>
+              <a:t>抗血小</a:t>
             </a:r>
             <a:endParaRPr lang="ja-JP" sz="1050" dirty="0"/>
           </a:p>
@@ -7128,7 +7451,7 @@
                 <a:ea typeface="メイリオ" pitchFamily="34" charset="-122"/>
                 <a:cs typeface="メイリオ" pitchFamily="34" charset="-120"/>
               </a:rPr>
-              <a:t>薬</a:t>
+              <a:t>板薬</a:t>
             </a:r>
             <a:endParaRPr lang="ja-JP" sz="1050" dirty="0"/>
           </a:p>
@@ -8863,7 +9186,7 @@
                 <a:ea typeface="メイリオ" pitchFamily="34" charset="-122"/>
                 <a:cs typeface="メイリオ" pitchFamily="34" charset="-120"/>
               </a:rPr>
-              <a:t>抗血小板</a:t>
+              <a:t>抗血小</a:t>
             </a:r>
             <a:endParaRPr lang="ja-JP" sz="1050" dirty="0"/>
           </a:p>
@@ -8880,7 +9203,7 @@
                 <a:ea typeface="メイリオ" pitchFamily="34" charset="-122"/>
                 <a:cs typeface="メイリオ" pitchFamily="34" charset="-120"/>
               </a:rPr>
-              <a:t>薬</a:t>
+              <a:t>板薬</a:t>
             </a:r>
             <a:endParaRPr lang="ja-JP" sz="1050" dirty="0"/>
           </a:p>
@@ -10591,7 +10914,7 @@
                 <a:ea typeface="メイリオ" pitchFamily="34" charset="-122"/>
                 <a:cs typeface="メイリオ" pitchFamily="34" charset="-120"/>
               </a:rPr>
-              <a:t>抗血小板</a:t>
+              <a:t>抗血小</a:t>
             </a:r>
             <a:endParaRPr lang="ja-JP" sz="1050" dirty="0"/>
           </a:p>
@@ -10608,7 +10931,7 @@
                 <a:ea typeface="メイリオ" pitchFamily="34" charset="-122"/>
                 <a:cs typeface="メイリオ" pitchFamily="34" charset="-120"/>
               </a:rPr>
-              <a:t>薬</a:t>
+              <a:t>板薬</a:t>
             </a:r>
             <a:endParaRPr lang="ja-JP" sz="1050" dirty="0"/>
           </a:p>
@@ -10835,9 +11158,9 @@
             <a:tbl>
               <a:tblPr/>
               <a:tblGrid>
-                <a:gridCol w="2350008"/>
-                <a:gridCol w="6693408"/>
-                <a:gridCol w="2112264"/>
+                <a:gridCol w="1792224"/>
+                <a:gridCol w="6254496"/>
+                <a:gridCol w="3108960"/>
               </a:tblGrid>
               <a:tr h="749808">
                 <a:tc>
@@ -11308,7 +11631,7 @@
                   </a:tcPr>
                 </a:tc>
               </a:tr>
-              <a:tr h="749808">
+              <a:tr h="1088136">
                 <a:tc>
                   <a:txBody>
                     <a:bodyPr/>
@@ -11329,7 +11652,31 @@
                           <a:ea typeface="メイリオ" pitchFamily="34" charset="-122"/>
                           <a:cs typeface="メイリオ" pitchFamily="34" charset="-120"/>
                         </a:rPr>
-                        <a:t>未分画ヘパリン</a:t>
+                        <a:t>未分画</a:t>
+                      </a:r>
+                      <a:endParaRPr lang="en-US" sz="2200" dirty="0">
+                        <a:latin typeface="メイリオ" charset="0"/>
+                        <a:ea typeface="メイリオ" charset="0"/>
+                        <a:cs typeface="メイリオ" charset="0"/>
+                      </a:endParaRPr>
+                    </a:p>
+                    <a:p>
+                      <a:pPr algn="l" indent="0" marL="0">
+                        <a:lnSpc>
+                          <a:spcPts val="2640"/>
+                        </a:lnSpc>
+                        <a:buNone/>
+                      </a:pPr>
+                      <a:r>
+                        <a:rPr lang="ja-JP" altLang="en-US" sz="2200" b="1" dirty="0">
+                          <a:solidFill>
+                            <a:srgbClr val="262626"/>
+                          </a:solidFill>
+                          <a:latin typeface="メイリオ" pitchFamily="34" charset="0"/>
+                          <a:ea typeface="メイリオ" pitchFamily="34" charset="-122"/>
+                          <a:cs typeface="メイリオ" pitchFamily="34" charset="-120"/>
+                        </a:rPr>
+                        <a:t>ヘパリン</a:t>
                       </a:r>
                       <a:endParaRPr lang="en-US" sz="2200" dirty="0">
                         <a:latin typeface="メイリオ" charset="0"/>
@@ -11397,7 +11744,31 @@
                           <a:ea typeface="メイリオ" pitchFamily="34" charset="-122"/>
                           <a:cs typeface="メイリオ" pitchFamily="34" charset="-120"/>
                         </a:rPr>
-                        <a:t>皮下 低用量 4〜6 時間、高用量 12〜24 時間。</a:t>
+                        <a:t>皮下 低用量 4〜6 時間、</a:t>
+                      </a:r>
+                      <a:endParaRPr lang="en-US" sz="2200" dirty="0">
+                        <a:latin typeface="メイリオ" charset="0"/>
+                        <a:ea typeface="メイリオ" charset="0"/>
+                        <a:cs typeface="メイリオ" charset="0"/>
+                      </a:endParaRPr>
+                    </a:p>
+                    <a:p>
+                      <a:pPr algn="l" indent="0" marL="0">
+                        <a:lnSpc>
+                          <a:spcPts val="2640"/>
+                        </a:lnSpc>
+                        <a:buNone/>
+                      </a:pPr>
+                      <a:r>
+                        <a:rPr lang="ja-JP" altLang="en-US" sz="2200" dirty="0">
+                          <a:solidFill>
+                            <a:srgbClr val="262626"/>
+                          </a:solidFill>
+                          <a:latin typeface="メイリオ" pitchFamily="34" charset="0"/>
+                          <a:ea typeface="メイリオ" pitchFamily="34" charset="-122"/>
+                          <a:cs typeface="メイリオ" pitchFamily="34" charset="-120"/>
+                        </a:rPr>
+                        <a:t>高用量 12〜24 時間。</a:t>
                       </a:r>
                       <a:endParaRPr lang="en-US" sz="2200" dirty="0">
                         <a:latin typeface="メイリオ" charset="0"/>
@@ -11538,7 +11909,7 @@
                   </a:tcPr>
                 </a:tc>
               </a:tr>
-              <a:tr h="1417320">
+              <a:tr h="1088136">
                 <a:tc>
                   <a:txBody>
                     <a:bodyPr/>
@@ -11651,7 +12022,7 @@
                           <a:ea typeface="メイリオ" pitchFamily="34" charset="-122"/>
                           <a:cs typeface="メイリオ" pitchFamily="34" charset="-120"/>
                         </a:rPr>
-                        <a:t>クロピドグレル 5〜7 日、チカグレロル 5 日、</a:t>
+                        <a:t>クロピドグレル 5〜7 日、</a:t>
                       </a:r>
                       <a:endParaRPr lang="en-US" sz="2200" dirty="0">
                         <a:latin typeface="メイリオ" charset="0"/>
@@ -11675,7 +12046,7 @@
                           <a:ea typeface="メイリオ" pitchFamily="34" charset="-122"/>
                           <a:cs typeface="メイリオ" pitchFamily="34" charset="-120"/>
                         </a:rPr>
-                        <a:t>プラスグレル 7〜10 日</a:t>
+                        <a:t>チカグレロル 5 日、プラスグレル 7〜10 日</a:t>
                       </a:r>
                       <a:endParaRPr lang="en-US" sz="2200" dirty="0">
                         <a:latin typeface="メイリオ" charset="0"/>
@@ -11743,7 +12114,7 @@
                           <a:ea typeface="メイリオ" pitchFamily="34" charset="-122"/>
                           <a:cs typeface="メイリオ" pitchFamily="34" charset="-120"/>
                         </a:rPr>
-                        <a:t>負荷なし：</a:t>
+                        <a:t>負荷なし：すぐ、</a:t>
                       </a:r>
                       <a:endParaRPr lang="en-US" sz="2200" dirty="0">
                         <a:latin typeface="メイリオ" charset="0"/>
@@ -11767,55 +12138,7 @@
                           <a:ea typeface="メイリオ" pitchFamily="34" charset="-122"/>
                           <a:cs typeface="メイリオ" pitchFamily="34" charset="-120"/>
                         </a:rPr>
-                        <a:t>すぐ、</a:t>
-                      </a:r>
-                      <a:endParaRPr lang="en-US" sz="2200" dirty="0">
-                        <a:latin typeface="メイリオ" charset="0"/>
-                        <a:ea typeface="メイリオ" charset="0"/>
-                        <a:cs typeface="メイリオ" charset="0"/>
-                      </a:endParaRPr>
-                    </a:p>
-                    <a:p>
-                      <a:pPr algn="l" indent="0" marL="0">
-                        <a:lnSpc>
-                          <a:spcPts val="2640"/>
-                        </a:lnSpc>
-                        <a:buNone/>
-                      </a:pPr>
-                      <a:r>
-                        <a:rPr lang="ja-JP" altLang="en-US" sz="2200" dirty="0">
-                          <a:solidFill>
-                            <a:srgbClr val="262626"/>
-                          </a:solidFill>
-                          <a:latin typeface="メイリオ" pitchFamily="34" charset="0"/>
-                          <a:ea typeface="メイリオ" pitchFamily="34" charset="-122"/>
-                          <a:cs typeface="メイリオ" pitchFamily="34" charset="-120"/>
-                        </a:rPr>
-                        <a:t>負荷あり：</a:t>
-                      </a:r>
-                      <a:endParaRPr lang="en-US" sz="2200" dirty="0">
-                        <a:latin typeface="メイリオ" charset="0"/>
-                        <a:ea typeface="メイリオ" charset="0"/>
-                        <a:cs typeface="メイリオ" charset="0"/>
-                      </a:endParaRPr>
-                    </a:p>
-                    <a:p>
-                      <a:pPr algn="l" indent="0" marL="0">
-                        <a:lnSpc>
-                          <a:spcPts val="2640"/>
-                        </a:lnSpc>
-                        <a:buNone/>
-                      </a:pPr>
-                      <a:r>
-                        <a:rPr lang="ja-JP" altLang="en-US" sz="2200" dirty="0">
-                          <a:solidFill>
-                            <a:srgbClr val="262626"/>
-                          </a:solidFill>
-                          <a:latin typeface="メイリオ" pitchFamily="34" charset="0"/>
-                          <a:ea typeface="メイリオ" pitchFamily="34" charset="-122"/>
-                          <a:cs typeface="メイリオ" pitchFamily="34" charset="-120"/>
-                        </a:rPr>
-                        <a:t>6 時間後</a:t>
+                        <a:t>負荷あり：6 時間後</a:t>
                       </a:r>
                       <a:endParaRPr lang="en-US" sz="2200" dirty="0">
                         <a:latin typeface="メイリオ" charset="0"/>
@@ -11876,7 +12199,7 @@
         </p:nvSpPr>
         <p:spPr>
           <a:xfrm>
-            <a:off x="502920" y="5303520"/>
+            <a:off x="502920" y="5312664"/>
             <a:ext cx="11183112" cy="457200"/>
           </a:xfrm>
           <a:prstGeom prst="rect">
@@ -12137,7 +12460,7 @@
                 <a:ea typeface="メイリオ" pitchFamily="34" charset="-122"/>
                 <a:cs typeface="メイリオ" pitchFamily="34" charset="-120"/>
               </a:rPr>
-              <a:t>抗血小板</a:t>
+              <a:t>抗血小</a:t>
             </a:r>
             <a:endParaRPr lang="ja-JP" sz="1050" dirty="0"/>
           </a:p>
@@ -12154,7 +12477,7 @@
                 <a:ea typeface="メイリオ" pitchFamily="34" charset="-122"/>
                 <a:cs typeface="メイリオ" pitchFamily="34" charset="-120"/>
               </a:rPr>
-              <a:t>薬</a:t>
+              <a:t>板薬</a:t>
             </a:r>
             <a:endParaRPr lang="ja-JP" sz="1050" dirty="0"/>
           </a:p>
@@ -13726,7 +14049,7 @@
                 <a:ea typeface="メイリオ" pitchFamily="34" charset="-122"/>
                 <a:cs typeface="メイリオ" pitchFamily="34" charset="-120"/>
               </a:rPr>
-              <a:t>抗血小板</a:t>
+              <a:t>抗血小</a:t>
             </a:r>
             <a:endParaRPr lang="ja-JP" sz="1050" dirty="0"/>
           </a:p>
@@ -13743,7 +14066,7 @@
                 <a:ea typeface="メイリオ" pitchFamily="34" charset="-122"/>
                 <a:cs typeface="メイリオ" pitchFamily="34" charset="-120"/>
               </a:rPr>
-              <a:t>薬</a:t>
+              <a:t>板薬</a:t>
             </a:r>
             <a:endParaRPr lang="ja-JP" sz="1050" dirty="0"/>
           </a:p>
@@ -13956,11 +14279,11 @@
         <p:spPr>
           <a:xfrm>
             <a:off x="502920" y="1664208"/>
-            <a:ext cx="11183112" cy="3538728"/>
+            <a:ext cx="11183112" cy="3547872"/>
           </a:xfrm>
           <a:prstGeom prst="roundRect">
             <a:avLst>
-              <a:gd name="adj" fmla="val 2067"/>
+              <a:gd name="adj" fmla="val 2062"/>
             </a:avLst>
           </a:prstGeom>
           <a:solidFill>
@@ -14038,7 +14361,7 @@
         </p:nvSpPr>
         <p:spPr>
           <a:xfrm>
-            <a:off x="896112" y="2127809"/>
+            <a:off x="896112" y="2091233"/>
             <a:ext cx="10707624" cy="374904"/>
           </a:xfrm>
           <a:prstGeom prst="rect">
@@ -14063,7 +14386,7 @@
                 <a:ea typeface="メイリオ" pitchFamily="34" charset="-122"/>
                 <a:cs typeface="メイリオ" pitchFamily="34" charset="-120"/>
               </a:rPr>
-              <a:t>手術 4 日前の夜（◯/◯ 20 時）。脊髄くも膜下麻酔の予定のため</a:t>
+              <a:t>手術 4 日前の夜（○/○ 20 時）。脊髄くも膜下麻酔の予定のため</a:t>
             </a:r>
             <a:endParaRPr lang="ja-JP" sz="2200" dirty="0"/>
           </a:p>
@@ -14077,7 +14400,7 @@
         </p:nvSpPr>
         <p:spPr>
           <a:xfrm>
-            <a:off x="896112" y="2462479"/>
+            <a:off x="896112" y="2425903"/>
             <a:ext cx="10707624" cy="374904"/>
           </a:xfrm>
           <a:prstGeom prst="rect">
@@ -14127,7 +14450,7 @@
         </p:nvSpPr>
         <p:spPr>
           <a:xfrm>
-            <a:off x="585216" y="2852928"/>
+            <a:off x="585216" y="2816352"/>
             <a:ext cx="11018520" cy="374904"/>
           </a:xfrm>
           <a:prstGeom prst="rect">
@@ -14163,7 +14486,7 @@
                 <a:ea typeface="メイリオ" pitchFamily="34" charset="-122"/>
                 <a:cs typeface="メイリオ" pitchFamily="34" charset="-120"/>
               </a:rPr>
-              <a:t>術後 2 日目の夜、止血を確認してから。処方医（◯◯内科）に連絡済み</a:t>
+              <a:t>術後 2 日目の夜、止血を確認してから。処方医（○○内科）に連絡済み</a:t>
             </a:r>
             <a:endParaRPr lang="ja-JP" sz="2200" dirty="0"/>
           </a:p>
@@ -14177,7 +14500,7 @@
         </p:nvSpPr>
         <p:spPr>
           <a:xfrm>
-            <a:off x="585216" y="3266237"/>
+            <a:off x="585216" y="3261665"/>
             <a:ext cx="11018520" cy="0"/>
           </a:xfrm>
           <a:prstGeom prst="line">
@@ -14200,7 +14523,7 @@
         </p:nvSpPr>
         <p:spPr>
           <a:xfrm>
-            <a:off x="585216" y="3343961"/>
+            <a:off x="585216" y="3353105"/>
             <a:ext cx="11018520" cy="374904"/>
           </a:xfrm>
           <a:prstGeom prst="rect">
@@ -14261,7 +14584,7 @@
         </p:nvSpPr>
         <p:spPr>
           <a:xfrm>
-            <a:off x="585216" y="3733495"/>
+            <a:off x="585216" y="3742639"/>
             <a:ext cx="11018520" cy="374904"/>
           </a:xfrm>
           <a:prstGeom prst="rect">
@@ -14297,7 +14620,7 @@
                 <a:ea typeface="メイリオ" pitchFamily="34" charset="-122"/>
                 <a:cs typeface="メイリオ" pitchFamily="34" charset="-120"/>
               </a:rPr>
-              <a:t>：PCI 施行医（循環器 ◯◯医師）と相談し、</a:t>
+              <a:t>：PCI 施行医（循環器 ○○医師）と相談し、</a:t>
             </a:r>
             <a:endParaRPr lang="ja-JP" sz="2200" dirty="0"/>
           </a:p>
@@ -14311,7 +14634,7 @@
         </p:nvSpPr>
         <p:spPr>
           <a:xfrm>
-            <a:off x="896112" y="4105656"/>
+            <a:off x="896112" y="4078224"/>
             <a:ext cx="10707624" cy="374904"/>
           </a:xfrm>
           <a:prstGeom prst="rect">
@@ -14336,7 +14659,7 @@
                 <a:ea typeface="メイリオ" pitchFamily="34" charset="-122"/>
                 <a:cs typeface="メイリオ" pitchFamily="34" charset="-120"/>
               </a:rPr>
-              <a:t>最終内服は手術 7 日前の朝（◯/◯ 8 時）。</a:t>
+              <a:t>最終内服は手術 7 日前の朝（○/○ 8 時）。</a:t>
             </a:r>
             <a:endParaRPr lang="ja-JP" sz="2200" dirty="0"/>
           </a:p>
@@ -14350,7 +14673,7 @@
         </p:nvSpPr>
         <p:spPr>
           <a:xfrm>
-            <a:off x="896112" y="4441241"/>
+            <a:off x="896112" y="4413809"/>
             <a:ext cx="10707624" cy="374904"/>
           </a:xfrm>
           <a:prstGeom prst="rect">
@@ -14411,7 +14734,7 @@
         </p:nvSpPr>
         <p:spPr>
           <a:xfrm>
-            <a:off x="896112" y="4775911"/>
+            <a:off x="896112" y="4748479"/>
             <a:ext cx="10707624" cy="374904"/>
           </a:xfrm>
           <a:prstGeom prst="rect">
@@ -14450,7 +14773,7 @@
         </p:nvSpPr>
         <p:spPr>
           <a:xfrm>
-            <a:off x="502920" y="5426964"/>
+            <a:off x="502920" y="5431536"/>
             <a:ext cx="11183112" cy="457200"/>
           </a:xfrm>
           <a:prstGeom prst="rect">
@@ -14475,7 +14798,7 @@
                 <a:ea typeface="メイリオ" pitchFamily="34" charset="-122"/>
                 <a:cs typeface="メイリオ" pitchFamily="34" charset="-120"/>
               </a:rPr>
-              <a:t>『◯日前から中止』ではなく、</a:t>
+              <a:t>『○日前から中止』ではなく、</a:t>
             </a:r>
             <a:r>
               <a:rPr lang="ja-JP" altLang="en-US" sz="2400" b="1" dirty="0">

--- a/slides/4-12_antithrombotic_drugs/4-12_antithrombotic_drugs.pptx
+++ b/slides/4-12_antithrombotic_drugs/4-12_antithrombotic_drugs.pptx
@@ -2630,7 +2630,7 @@
                 <a:ea typeface="メイリオ" pitchFamily="34" charset="-122"/>
                 <a:cs typeface="メイリオ" pitchFamily="34" charset="-120"/>
               </a:rPr>
-              <a:t>Douketis JD, et al. Chest 2022;162:e207-e243 / Kopp SL, et al. Reg Anesth Pain Med 2025</a:t>
+              <a:t>Douketis JD, et al. Chest 2022;162:e207-e243/Kopp SL, et al. Reg Anesth Pain Med 2025</a:t>
             </a:r>
             <a:endParaRPr lang="ja-JP" sz="1600" dirty="0"/>
           </a:p>
@@ -4987,7 +4987,7 @@
                 <a:ea typeface="メイリオ" pitchFamily="34" charset="-122"/>
                 <a:cs typeface="メイリオ" pitchFamily="34" charset="-120"/>
               </a:rPr>
-              <a:t>Douketis JD, et al. N Engl J Med 2015;373:823-833 / 日本循環器学会／日本不整脈心電学会</a:t>
+              <a:t>Douketis JD, et al. N Engl J Med 2015;373:823-833/日本循環器学会／日本不整脈心電学会</a:t>
             </a:r>
             <a:endParaRPr lang="ja-JP" sz="1600" dirty="0"/>
           </a:p>
@@ -5004,7 +5004,7 @@
                 <a:ea typeface="メイリオ" pitchFamily="34" charset="-122"/>
                 <a:cs typeface="メイリオ" pitchFamily="34" charset="-120"/>
               </a:rPr>
-              <a:t>2020 年改訂版 不整脈薬物治療ガイドライン / Douketis JD, et al. Chest 2022;162:e207-e243</a:t>
+              <a:t>2020 年改訂版 不整脈薬物治療ガイドライン/Douketis JD, et al. Chest 2022;162:e207-e243</a:t>
             </a:r>
             <a:endParaRPr lang="ja-JP" sz="1600" dirty="0"/>
           </a:p>
@@ -5952,7 +5952,7 @@
                 <a:ea typeface="メイリオ" pitchFamily="34" charset="-122"/>
                 <a:cs typeface="メイリオ" pitchFamily="34" charset="-120"/>
               </a:rPr>
-              <a:t>Douketis JD, et al. JAMA Intern Med 2019;179:1469-1478 / 日本循環器学会／日本不整脈心電学会</a:t>
+              <a:t>Douketis JD, et al. JAMA Intern Med 2019;179:1469-1478/日本循環器学会／日本不整脈心電学会</a:t>
             </a:r>
             <a:endParaRPr lang="ja-JP" sz="1600" dirty="0"/>
           </a:p>
@@ -5969,7 +5969,7 @@
                 <a:ea typeface="メイリオ" pitchFamily="34" charset="-122"/>
                 <a:cs typeface="メイリオ" pitchFamily="34" charset="-120"/>
               </a:rPr>
-              <a:t>2020 年改訂版 不整脈薬物治療ガイドライン / Joglar JA, et al. Circulation 2024;149:e1-e156</a:t>
+              <a:t>2020 年改訂版 不整脈薬物治療ガイドライン/Joglar JA, et al. Circulation 2024;149:e1-e156</a:t>
             </a:r>
             <a:endParaRPr lang="ja-JP" sz="1600" dirty="0"/>
           </a:p>
@@ -9384,7 +9384,7 @@
                 <a:ea typeface="メイリオ" pitchFamily="34" charset="-122"/>
                 <a:cs typeface="メイリオ" pitchFamily="34" charset="-120"/>
               </a:rPr>
-              <a:t>Kopp SL, et al. Reg Anesth Pain Med 2025 / 日本ペインクリニック学会・日本麻酔科学会・</a:t>
+              <a:t>Kopp SL, et al. Reg Anesth Pain Med 2025/日本ペインクリニック学会・日本麻酔科学会・</a:t>
             </a:r>
             <a:endParaRPr lang="ja-JP" sz="1600" dirty="0"/>
           </a:p>
@@ -11112,7 +11112,7 @@
                 <a:ea typeface="メイリオ" pitchFamily="34" charset="-122"/>
                 <a:cs typeface="メイリオ" pitchFamily="34" charset="-120"/>
               </a:rPr>
-              <a:t>Kopp SL, et al. Reg Anesth Pain Med 2025 / 日本ペインクリニック学会・日本麻酔科学会・</a:t>
+              <a:t>Kopp SL, et al. Reg Anesth Pain Med 2025/日本ペインクリニック学会・日本麻酔科学会・</a:t>
             </a:r>
             <a:endParaRPr lang="ja-JP" sz="1600" dirty="0"/>
           </a:p>
@@ -14247,7 +14247,7 @@
                 <a:ea typeface="メイリオ" pitchFamily="34" charset="-122"/>
                 <a:cs typeface="メイリオ" pitchFamily="34" charset="-120"/>
               </a:rPr>
-              <a:t>Kopp SL, et al. Reg Anesth Pain Med 2025/Douketis JD, et al. JAMA Intern Med</a:t>
+              <a:t>Kopp SL, et al. Reg Anesth Pain Med 2025/Douketis JD, et al. JAMA Intern Med 2019;179:</a:t>
             </a:r>
             <a:endParaRPr lang="ja-JP" sz="1600" dirty="0"/>
           </a:p>
@@ -14264,7 +14264,7 @@
                 <a:ea typeface="メイリオ" pitchFamily="34" charset="-122"/>
                 <a:cs typeface="メイリオ" pitchFamily="34" charset="-120"/>
               </a:rPr>
-              <a:t>2019;179:1469-78/日本循環器学会／日本不整脈心電学会 2020 年改訂版不整脈薬物治療ガイドライン</a:t>
+              <a:t>1469-1478/日本循環器学会／日本不整脈心電学会 2020 年改訂版 不整脈薬物治療ガイドライン</a:t>
             </a:r>
             <a:endParaRPr lang="ja-JP" sz="1600" dirty="0"/>
           </a:p>
@@ -14386,7 +14386,7 @@
                 <a:ea typeface="メイリオ" pitchFamily="34" charset="-122"/>
                 <a:cs typeface="メイリオ" pitchFamily="34" charset="-120"/>
               </a:rPr>
-              <a:t>手術 4 日前の夜（○/○ 20 時）。脊髄くも膜下麻酔の予定のため</a:t>
+              <a:t>手術 4 日前の夜（〇/〇 20 時）。脊髄くも膜下麻酔の予定のため</a:t>
             </a:r>
             <a:endParaRPr lang="ja-JP" sz="2200" dirty="0"/>
           </a:p>
@@ -14486,7 +14486,7 @@
                 <a:ea typeface="メイリオ" pitchFamily="34" charset="-122"/>
                 <a:cs typeface="メイリオ" pitchFamily="34" charset="-120"/>
               </a:rPr>
-              <a:t>術後 2 日目の夜、止血を確認してから。処方医（○○内科）に連絡済み</a:t>
+              <a:t>術後 2 日目の夜、止血を確認してから。処方医（〇〇内科）に連絡済み</a:t>
             </a:r>
             <a:endParaRPr lang="ja-JP" sz="2200" dirty="0"/>
           </a:p>
@@ -14620,7 +14620,7 @@
                 <a:ea typeface="メイリオ" pitchFamily="34" charset="-122"/>
                 <a:cs typeface="メイリオ" pitchFamily="34" charset="-120"/>
               </a:rPr>
-              <a:t>：PCI 施行医（循環器 ○○医師）と相談し、</a:t>
+              <a:t>：PCI 施行医（循環器 〇〇医師）と相談し、</a:t>
             </a:r>
             <a:endParaRPr lang="ja-JP" sz="2200" dirty="0"/>
           </a:p>
@@ -14659,7 +14659,7 @@
                 <a:ea typeface="メイリオ" pitchFamily="34" charset="-122"/>
                 <a:cs typeface="メイリオ" pitchFamily="34" charset="-120"/>
               </a:rPr>
-              <a:t>最終内服は手術 7 日前の朝（○/○ 8 時）。</a:t>
+              <a:t>最終内服は手術 7 日前の朝（〇/〇 8 時）。</a:t>
             </a:r>
             <a:endParaRPr lang="ja-JP" sz="2200" dirty="0"/>
           </a:p>
@@ -14798,7 +14798,7 @@
                 <a:ea typeface="メイリオ" pitchFamily="34" charset="-122"/>
                 <a:cs typeface="メイリオ" pitchFamily="34" charset="-120"/>
               </a:rPr>
-              <a:t>『○日前から中止』ではなく、</a:t>
+              <a:t>『〇日前から中止』ではなく、</a:t>
             </a:r>
             <a:r>
               <a:rPr lang="ja-JP" altLang="en-US" sz="2400" b="1" dirty="0">
